--- a/02_Area/Lecture_스포츠경기예측론/03_분포.pptx
+++ b/02_Area/Lecture_스포츠경기예측론/03_분포.pptx
@@ -1,6 +1,6 @@
 
 <file path=ppt/presentation.xml><?xml version="1.0" encoding="utf-8"?>
-<p:presentation xmlns:a="http://schemas.openxmlformats.org/drawingml/2006/main" xmlns:p="http://schemas.openxmlformats.org/presentationml/2006/main" xmlns:r="http://schemas.openxmlformats.org/officeDocument/2006/relationships" autoCompressPictures="0" saveSubsetFonts="1">
+<p:presentation xmlns:a="http://schemas.openxmlformats.org/drawingml/2006/main" xmlns:r="http://schemas.openxmlformats.org/officeDocument/2006/relationships" xmlns:p="http://schemas.openxmlformats.org/presentationml/2006/main" saveSubsetFonts="1" autoCompressPictures="0">
   <p:sldMasterIdLst>
     <p:sldMasterId id="2147483648" r:id="rId1"/>
   </p:sldMasterIdLst>
@@ -18,6 +18,8 @@
     <p:sldId id="266" r:id="rId12"/>
     <p:sldId id="267" r:id="rId13"/>
     <p:sldId id="268" r:id="rId14"/>
+    <p:sldId id="269" r:id="rId15"/>
+    <p:sldId id="270" r:id="rId16"/>
   </p:sldIdLst>
   <p:sldSz cx="9144000" cy="5143500" type="screen16x9"/>
   <p:notesSz cx="6858000" cy="9144000"/>
@@ -25,8 +27,8 @@
     <a:defPPr>
       <a:defRPr lang="en-US"/>
     </a:defPPr>
-    <a:lvl1pPr algn="l" defTabSz="457200" eaLnBrk="1" hangingPunct="1" latinLnBrk="0" marL="0" rtl="0">
-      <a:defRPr kern="1200" sz="1800">
+    <a:lvl1pPr marL="0" algn="l" defTabSz="457200" rtl="0" eaLnBrk="1" latinLnBrk="0" hangingPunct="1">
+      <a:defRPr sz="1800" kern="1200">
         <a:solidFill>
           <a:schemeClr val="tx1"/>
         </a:solidFill>
@@ -35,8 +37,8 @@
         <a:cs typeface="+mn-cs"/>
       </a:defRPr>
     </a:lvl1pPr>
-    <a:lvl2pPr algn="l" defTabSz="457200" eaLnBrk="1" hangingPunct="1" latinLnBrk="0" marL="457200" rtl="0">
-      <a:defRPr kern="1200" sz="1800">
+    <a:lvl2pPr marL="457200" algn="l" defTabSz="457200" rtl="0" eaLnBrk="1" latinLnBrk="0" hangingPunct="1">
+      <a:defRPr sz="1800" kern="1200">
         <a:solidFill>
           <a:schemeClr val="tx1"/>
         </a:solidFill>
@@ -45,8 +47,8 @@
         <a:cs typeface="+mn-cs"/>
       </a:defRPr>
     </a:lvl2pPr>
-    <a:lvl3pPr algn="l" defTabSz="457200" eaLnBrk="1" hangingPunct="1" latinLnBrk="0" marL="914400" rtl="0">
-      <a:defRPr kern="1200" sz="1800">
+    <a:lvl3pPr marL="914400" algn="l" defTabSz="457200" rtl="0" eaLnBrk="1" latinLnBrk="0" hangingPunct="1">
+      <a:defRPr sz="1800" kern="1200">
         <a:solidFill>
           <a:schemeClr val="tx1"/>
         </a:solidFill>
@@ -55,8 +57,8 @@
         <a:cs typeface="+mn-cs"/>
       </a:defRPr>
     </a:lvl3pPr>
-    <a:lvl4pPr algn="l" defTabSz="457200" eaLnBrk="1" hangingPunct="1" latinLnBrk="0" marL="1371600" rtl="0">
-      <a:defRPr kern="1200" sz="1800">
+    <a:lvl4pPr marL="1371600" algn="l" defTabSz="457200" rtl="0" eaLnBrk="1" latinLnBrk="0" hangingPunct="1">
+      <a:defRPr sz="1800" kern="1200">
         <a:solidFill>
           <a:schemeClr val="tx1"/>
         </a:solidFill>
@@ -65,8 +67,8 @@
         <a:cs typeface="+mn-cs"/>
       </a:defRPr>
     </a:lvl4pPr>
-    <a:lvl5pPr algn="l" defTabSz="457200" eaLnBrk="1" hangingPunct="1" latinLnBrk="0" marL="1828800" rtl="0">
-      <a:defRPr kern="1200" sz="1800">
+    <a:lvl5pPr marL="1828800" algn="l" defTabSz="457200" rtl="0" eaLnBrk="1" latinLnBrk="0" hangingPunct="1">
+      <a:defRPr sz="1800" kern="1200">
         <a:solidFill>
           <a:schemeClr val="tx1"/>
         </a:solidFill>
@@ -75,8 +77,8 @@
         <a:cs typeface="+mn-cs"/>
       </a:defRPr>
     </a:lvl5pPr>
-    <a:lvl6pPr algn="l" defTabSz="457200" eaLnBrk="1" hangingPunct="1" latinLnBrk="0" marL="2286000" rtl="0">
-      <a:defRPr kern="1200" sz="1800">
+    <a:lvl6pPr marL="2286000" algn="l" defTabSz="457200" rtl="0" eaLnBrk="1" latinLnBrk="0" hangingPunct="1">
+      <a:defRPr sz="1800" kern="1200">
         <a:solidFill>
           <a:schemeClr val="tx1"/>
         </a:solidFill>
@@ -85,8 +87,8 @@
         <a:cs typeface="+mn-cs"/>
       </a:defRPr>
     </a:lvl6pPr>
-    <a:lvl7pPr algn="l" defTabSz="457200" eaLnBrk="1" hangingPunct="1" latinLnBrk="0" marL="2743200" rtl="0">
-      <a:defRPr kern="1200" sz="1800">
+    <a:lvl7pPr marL="2743200" algn="l" defTabSz="457200" rtl="0" eaLnBrk="1" latinLnBrk="0" hangingPunct="1">
+      <a:defRPr sz="1800" kern="1200">
         <a:solidFill>
           <a:schemeClr val="tx1"/>
         </a:solidFill>
@@ -95,8 +97,8 @@
         <a:cs typeface="+mn-cs"/>
       </a:defRPr>
     </a:lvl7pPr>
-    <a:lvl8pPr algn="l" defTabSz="457200" eaLnBrk="1" hangingPunct="1" latinLnBrk="0" marL="3200400" rtl="0">
-      <a:defRPr kern="1200" sz="1800">
+    <a:lvl8pPr marL="3200400" algn="l" defTabSz="457200" rtl="0" eaLnBrk="1" latinLnBrk="0" hangingPunct="1">
+      <a:defRPr sz="1800" kern="1200">
         <a:solidFill>
           <a:schemeClr val="tx1"/>
         </a:solidFill>
@@ -105,8 +107,8 @@
         <a:cs typeface="+mn-cs"/>
       </a:defRPr>
     </a:lvl8pPr>
-    <a:lvl9pPr algn="l" defTabSz="457200" eaLnBrk="1" hangingPunct="1" latinLnBrk="0" marL="3657600" rtl="0">
-      <a:defRPr kern="1200" sz="1800">
+    <a:lvl9pPr marL="3657600" algn="l" defTabSz="457200" rtl="0" eaLnBrk="1" latinLnBrk="0" hangingPunct="1">
+      <a:defRPr sz="1800" kern="1200">
         <a:solidFill>
           <a:schemeClr val="tx1"/>
         </a:solidFill>
@@ -159,7 +161,7 @@
             <a:spLocks noGrp="1"/>
           </p:cNvSpPr>
           <p:nvPr>
-            <p:ph type="ctrTitle"/>
+            <p:ph type="ctrTitle" hasCustomPrompt="1"/>
           </p:nvPr>
         </p:nvSpPr>
         <p:spPr>
@@ -169,10 +171,12 @@
           </a:xfrm>
         </p:spPr>
         <p:txBody>
-          <a:bodyPr anchor="t"/>
+          <a:bodyPr anchor="t">
+            <a:noAutofit/>
+          </a:bodyPr>
           <a:lstStyle>
             <a:lvl1pPr algn="l">
-              <a:defRPr lang="en-US" sz="8100" b="0" kern="1200" spc="-150" dirty="0">
+              <a:defRPr lang="en-US" sz="7200" b="0" kern="1200" spc="-150" dirty="0">
                 <a:solidFill>
                   <a:prstClr val="black"/>
                 </a:solidFill>
@@ -446,7 +450,7 @@
           <a:p>
             <a:fld id="{241EB5C9-1307-BA42-ABA2-0BC069CD8E7F}" type="datetimeFigureOut">
               <a:rPr lang="en-US" smtClean="0"/>
-              <a:t>9/29/26</a:t>
+              <a:t>10/1/26</a:t>
             </a:fld>
             <a:endParaRPr lang="en-US"/>
           </a:p>
@@ -638,7 +642,7 @@
           <a:p>
             <a:fld id="{241EB5C9-1307-BA42-ABA2-0BC069CD8E7F}" type="datetimeFigureOut">
               <a:rPr lang="en-US" smtClean="0"/>
-              <a:t>9/29/26</a:t>
+              <a:t>10/1/26</a:t>
             </a:fld>
             <a:endParaRPr lang="en-US"/>
           </a:p>
@@ -906,7 +910,7 @@
           <a:lstStyle/>
           <a:p>
             <a:r>
-              <a:rPr lang="ko-KR" altLang="en-US" sz="2000" u="sng" spc="-300" dirty="0">
+              <a:rPr lang="ko-KR" altLang="en-US" sz="2000" u="sng" spc="-150" dirty="0">
                 <a:solidFill>
                   <a:schemeClr val="bg1">
                     <a:lumMod val="75000"/>
@@ -915,10 +919,10 @@
                 <a:latin typeface="더잠실 3 Regular" panose="00000500000000000000" pitchFamily="2" charset="-127"/>
                 <a:ea typeface="더잠실 3 Regular" panose="00000500000000000000" pitchFamily="2" charset="-127"/>
               </a:rPr>
-              <a:t>상관분석</a:t>
-            </a:r>
-            <a:r>
-              <a:rPr lang="ko-KR" altLang="en-US" sz="2000" spc="-300" dirty="0">
+              <a:t>분포</a:t>
+            </a:r>
+            <a:r>
+              <a:rPr lang="ko-KR" altLang="en-US" sz="2000" spc="-150" dirty="0">
                 <a:solidFill>
                   <a:schemeClr val="bg1">
                     <a:lumMod val="75000"/>
@@ -930,7 +934,7 @@
               <a:t> </a:t>
             </a:r>
             <a:r>
-              <a:rPr lang="en-US" altLang="ko-KR" sz="1600" dirty="0">
+              <a:rPr lang="en-US" altLang="ko-KR" sz="1600" spc="-150" dirty="0" err="1">
                 <a:solidFill>
                   <a:schemeClr val="bg1">
                     <a:lumMod val="75000"/>
@@ -939,8 +943,17 @@
                 <a:latin typeface="Baguet Script" panose="00000500000000000000" pitchFamily="2" charset="0"/>
                 <a:ea typeface="ChosunilboNM" panose="02030304000000000000" pitchFamily="18" charset="-128"/>
               </a:rPr>
-              <a:t>Correlation</a:t>
-            </a:r>
+              <a:t>Dstribution</a:t>
+            </a:r>
+            <a:endParaRPr lang="en-US" altLang="ko-KR" sz="1600" spc="-150" dirty="0">
+              <a:solidFill>
+                <a:schemeClr val="bg1">
+                  <a:lumMod val="75000"/>
+                </a:schemeClr>
+              </a:solidFill>
+              <a:latin typeface="Baguet Script" panose="00000500000000000000" pitchFamily="2" charset="0"/>
+              <a:ea typeface="ChosunilboNM" panose="02030304000000000000" pitchFamily="18" charset="-128"/>
+            </a:endParaRPr>
           </a:p>
         </p:txBody>
       </p:sp>
@@ -983,7 +996,7 @@
                 <a:latin typeface="Baguet Script" panose="00000500000000000000" pitchFamily="2" charset="0"/>
                 <a:ea typeface="ChosunilboNM" panose="02030304000000000000" pitchFamily="18" charset="-128"/>
               </a:rPr>
-              <a:t>Section 04 |  </a:t>
+              <a:t>Section 03 |  </a:t>
             </a:r>
             <a:r>
               <a:rPr lang="ko-KR" altLang="en-US" sz="2000" b="1" spc="-150" dirty="0">
@@ -996,7 +1009,7 @@
                 <a:latin typeface="더잠실 3 Regular" panose="00000500000000000000" pitchFamily="2" charset="-127"/>
                 <a:ea typeface="더잠실 3 Regular" panose="00000500000000000000" pitchFamily="2" charset="-127"/>
               </a:rPr>
-              <a:t>상관과 예측</a:t>
+              <a:t>분포</a:t>
             </a:r>
           </a:p>
         </p:txBody>
@@ -1198,7 +1211,7 @@
           <a:p>
             <a:fld id="{241EB5C9-1307-BA42-ABA2-0BC069CD8E7F}" type="datetimeFigureOut">
               <a:rPr lang="en-US" smtClean="0"/>
-              <a:t>9/29/26</a:t>
+              <a:t>10/1/26</a:t>
             </a:fld>
             <a:endParaRPr lang="en-US"/>
           </a:p>
@@ -1497,7 +1510,7 @@
           <a:p>
             <a:fld id="{241EB5C9-1307-BA42-ABA2-0BC069CD8E7F}" type="datetimeFigureOut">
               <a:rPr lang="en-US" smtClean="0"/>
-              <a:t>9/29/26</a:t>
+              <a:t>10/1/26</a:t>
             </a:fld>
             <a:endParaRPr lang="en-US"/>
           </a:p>
@@ -1930,7 +1943,7 @@
           <a:p>
             <a:fld id="{241EB5C9-1307-BA42-ABA2-0BC069CD8E7F}" type="datetimeFigureOut">
               <a:rPr lang="en-US" smtClean="0"/>
-              <a:t>9/29/26</a:t>
+              <a:t>10/1/26</a:t>
             </a:fld>
             <a:endParaRPr lang="en-US"/>
           </a:p>
@@ -2061,7 +2074,7 @@
           <a:p>
             <a:fld id="{241EB5C9-1307-BA42-ABA2-0BC069CD8E7F}" type="datetimeFigureOut">
               <a:rPr lang="en-US" smtClean="0"/>
-              <a:t>9/29/26</a:t>
+              <a:t>10/1/26</a:t>
             </a:fld>
             <a:endParaRPr lang="en-US"/>
           </a:p>
@@ -2170,7 +2183,7 @@
           <a:p>
             <a:fld id="{241EB5C9-1307-BA42-ABA2-0BC069CD8E7F}" type="datetimeFigureOut">
               <a:rPr lang="en-US" smtClean="0"/>
-              <a:t>9/29/26</a:t>
+              <a:t>10/1/26</a:t>
             </a:fld>
             <a:endParaRPr lang="en-US"/>
           </a:p>
@@ -2459,7 +2472,7 @@
           <a:p>
             <a:fld id="{241EB5C9-1307-BA42-ABA2-0BC069CD8E7F}" type="datetimeFigureOut">
               <a:rPr lang="en-US" smtClean="0"/>
-              <a:t>9/29/26</a:t>
+              <a:t>10/1/26</a:t>
             </a:fld>
             <a:endParaRPr lang="en-US"/>
           </a:p>
@@ -2725,7 +2738,7 @@
           <a:p>
             <a:fld id="{241EB5C9-1307-BA42-ABA2-0BC069CD8E7F}" type="datetimeFigureOut">
               <a:rPr lang="en-US" smtClean="0"/>
-              <a:t>9/29/26</a:t>
+              <a:t>10/1/26</a:t>
             </a:fld>
             <a:endParaRPr lang="en-US"/>
           </a:p>
@@ -2787,7 +2800,7 @@
 </file>
 
 <file path=ppt/slideMasters/slideMaster1.xml><?xml version="1.0" encoding="utf-8"?>
-<p:sldMaster xmlns:a="http://schemas.openxmlformats.org/drawingml/2006/main" xmlns:p="http://schemas.openxmlformats.org/presentationml/2006/main" xmlns:r="http://schemas.openxmlformats.org/officeDocument/2006/relationships">
+<p:sldMaster xmlns:a="http://schemas.openxmlformats.org/drawingml/2006/main" xmlns:r="http://schemas.openxmlformats.org/officeDocument/2006/relationships" xmlns:p="http://schemas.openxmlformats.org/presentationml/2006/main">
   <p:cSld>
     <p:bg>
       <p:bgRef idx="1001">
@@ -2828,7 +2841,7 @@
           </a:prstGeom>
         </p:spPr>
         <p:txBody>
-          <a:bodyPr anchor="ctr" bIns="45720" lIns="91440" rIns="91440" rtlCol="0" tIns="45720" vert="horz">
+          <a:bodyPr vert="horz" lIns="91440" tIns="45720" rIns="91440" bIns="45720" rtlCol="0" anchor="ctr">
             <a:normAutofit/>
           </a:bodyPr>
           <a:lstStyle/>
@@ -2847,7 +2860,7 @@
             <a:spLocks noGrp="1"/>
           </p:cNvSpPr>
           <p:nvPr>
-            <p:ph idx="1" type="body"/>
+            <p:ph type="body" idx="1"/>
           </p:nvPr>
         </p:nvSpPr>
         <p:spPr>
@@ -2860,7 +2873,7 @@
           </a:prstGeom>
         </p:spPr>
         <p:txBody>
-          <a:bodyPr bIns="45720" lIns="91440" rIns="91440" rtlCol="0" tIns="45720" vert="horz">
+          <a:bodyPr vert="horz" lIns="91440" tIns="45720" rIns="91440" bIns="45720" rtlCol="0">
             <a:normAutofit/>
           </a:bodyPr>
           <a:lstStyle/>
@@ -2908,7 +2921,7 @@
             <a:spLocks noGrp="1"/>
           </p:cNvSpPr>
           <p:nvPr>
-            <p:ph idx="2" sz="half" type="dt"/>
+            <p:ph type="dt" sz="half" idx="2"/>
           </p:nvPr>
         </p:nvSpPr>
         <p:spPr>
@@ -2921,7 +2934,7 @@
           </a:prstGeom>
         </p:spPr>
         <p:txBody>
-          <a:bodyPr anchor="ctr" bIns="45720" lIns="91440" rIns="91440" rtlCol="0" tIns="45720" vert="horz"/>
+          <a:bodyPr vert="horz" lIns="91440" tIns="45720" rIns="91440" bIns="45720" rtlCol="0" anchor="ctr"/>
           <a:lstStyle>
             <a:lvl1pPr algn="l">
               <a:defRPr sz="900">
@@ -2936,7 +2949,7 @@
           <a:p>
             <a:fld id="{241EB5C9-1307-BA42-ABA2-0BC069CD8E7F}" type="datetimeFigureOut">
               <a:rPr lang="en-US" smtClean="0"/>
-              <a:t>9/29/26</a:t>
+              <a:t>10/1/26</a:t>
             </a:fld>
             <a:endParaRPr lang="en-US"/>
           </a:p>
@@ -2949,7 +2962,7 @@
             <a:spLocks noGrp="1"/>
           </p:cNvSpPr>
           <p:nvPr>
-            <p:ph idx="3" sz="quarter" type="ftr"/>
+            <p:ph type="ftr" sz="quarter" idx="3"/>
           </p:nvPr>
         </p:nvSpPr>
         <p:spPr>
@@ -2962,7 +2975,7 @@
           </a:prstGeom>
         </p:spPr>
         <p:txBody>
-          <a:bodyPr anchor="ctr" bIns="45720" lIns="91440" rIns="91440" rtlCol="0" tIns="45720" vert="horz"/>
+          <a:bodyPr vert="horz" lIns="91440" tIns="45720" rIns="91440" bIns="45720" rtlCol="0" anchor="ctr"/>
           <a:lstStyle>
             <a:lvl1pPr algn="ctr">
               <a:defRPr sz="900">
@@ -2986,7 +2999,7 @@
             <a:spLocks noGrp="1"/>
           </p:cNvSpPr>
           <p:nvPr>
-            <p:ph idx="4" sz="quarter" type="sldNum"/>
+            <p:ph type="sldNum" sz="quarter" idx="4"/>
           </p:nvPr>
         </p:nvSpPr>
         <p:spPr>
@@ -2999,7 +3012,7 @@
           </a:prstGeom>
         </p:spPr>
         <p:txBody>
-          <a:bodyPr anchor="ctr" bIns="45720" lIns="91440" rIns="91440" rtlCol="0" tIns="45720" vert="horz"/>
+          <a:bodyPr vert="horz" lIns="91440" tIns="45720" rIns="91440" bIns="45720" rtlCol="0" anchor="ctr"/>
           <a:lstStyle>
             <a:lvl1pPr algn="r">
               <a:defRPr sz="900">
@@ -3027,7 +3040,7 @@
       </p:ext>
     </p:extLst>
   </p:cSld>
-  <p:clrMap accent1="accent1" accent2="accent2" accent3="accent3" accent4="accent4" accent5="accent5" accent6="accent6" bg1="lt1" bg2="lt2" folHlink="folHlink" hlink="hlink" tx1="dk1" tx2="dk2"/>
+  <p:clrMap bg1="lt1" tx1="dk1" bg2="lt2" tx2="dk2" accent1="accent1" accent2="accent2" accent3="accent3" accent4="accent4" accent5="accent5" accent6="accent6" hlink="hlink" folHlink="folHlink"/>
   <p:sldLayoutIdLst>
     <p:sldLayoutId id="2147483649" r:id="rId1"/>
     <p:sldLayoutId id="2147483650" r:id="rId2"/>
@@ -3043,12 +3056,12 @@
   </p:sldLayoutIdLst>
   <p:txStyles>
     <p:titleStyle>
-      <a:lvl1pPr algn="ctr" defTabSz="342900" eaLnBrk="1" hangingPunct="1" latinLnBrk="0" rtl="0">
+      <a:lvl1pPr algn="ctr" defTabSz="342900" rtl="0" eaLnBrk="1" latinLnBrk="0" hangingPunct="1">
         <a:spcBef>
           <a:spcPct val="0"/>
         </a:spcBef>
         <a:buNone/>
-        <a:defRPr kern="1200" sz="3300">
+        <a:defRPr sz="3300" kern="1200">
           <a:solidFill>
             <a:schemeClr val="tx1"/>
           </a:solidFill>
@@ -3059,13 +3072,13 @@
       </a:lvl1pPr>
     </p:titleStyle>
     <p:bodyStyle>
-      <a:lvl1pPr algn="l" defTabSz="342900" eaLnBrk="1" hangingPunct="1" indent="-342900" latinLnBrk="0" marL="342900" rtl="0">
+      <a:lvl1pPr marL="342900" indent="-342900" algn="l" defTabSz="342900" rtl="0" eaLnBrk="1" latinLnBrk="0" hangingPunct="1">
         <a:spcBef>
           <a:spcPct val="20000"/>
         </a:spcBef>
         <a:buFont typeface="Arial"/>
         <a:buChar char="•"/>
-        <a:defRPr kern="1200" sz="2400">
+        <a:defRPr sz="2400" kern="1200">
           <a:solidFill>
             <a:schemeClr val="tx1"/>
           </a:solidFill>
@@ -3074,13 +3087,13 @@
           <a:cs typeface="+mn-cs"/>
         </a:defRPr>
       </a:lvl1pPr>
-      <a:lvl2pPr algn="l" defTabSz="342900" eaLnBrk="1" hangingPunct="1" indent="-342900" latinLnBrk="0" marL="685800" rtl="0">
+      <a:lvl2pPr marL="685800" indent="-342900" algn="l" defTabSz="342900" rtl="0" eaLnBrk="1" latinLnBrk="0" hangingPunct="1">
         <a:spcBef>
           <a:spcPct val="20000"/>
         </a:spcBef>
         <a:buFont typeface="Arial"/>
         <a:buChar char="–"/>
-        <a:defRPr kern="1200" sz="2100">
+        <a:defRPr sz="2100" kern="1200">
           <a:solidFill>
             <a:schemeClr val="tx1"/>
           </a:solidFill>
@@ -3089,13 +3102,13 @@
           <a:cs typeface="+mn-cs"/>
         </a:defRPr>
       </a:lvl2pPr>
-      <a:lvl3pPr algn="l" defTabSz="342900" eaLnBrk="1" hangingPunct="1" indent="-342900" latinLnBrk="0" marL="1028700" rtl="0">
+      <a:lvl3pPr marL="1028700" indent="-342900" algn="l" defTabSz="342900" rtl="0" eaLnBrk="1" latinLnBrk="0" hangingPunct="1">
         <a:spcBef>
           <a:spcPct val="20000"/>
         </a:spcBef>
         <a:buFont typeface="Arial"/>
         <a:buChar char="•"/>
-        <a:defRPr kern="1200" sz="1800">
+        <a:defRPr sz="1800" kern="1200">
           <a:solidFill>
             <a:schemeClr val="tx1"/>
           </a:solidFill>
@@ -3104,13 +3117,13 @@
           <a:cs typeface="+mn-cs"/>
         </a:defRPr>
       </a:lvl3pPr>
-      <a:lvl4pPr algn="l" defTabSz="342900" eaLnBrk="1" hangingPunct="1" indent="-342900" latinLnBrk="0" marL="1371600" rtl="0">
+      <a:lvl4pPr marL="1371600" indent="-342900" algn="l" defTabSz="342900" rtl="0" eaLnBrk="1" latinLnBrk="0" hangingPunct="1">
         <a:spcBef>
           <a:spcPct val="20000"/>
         </a:spcBef>
         <a:buFont typeface="Arial"/>
         <a:buChar char="–"/>
-        <a:defRPr kern="1200" sz="1500">
+        <a:defRPr sz="1500" kern="1200">
           <a:solidFill>
             <a:schemeClr val="tx1"/>
           </a:solidFill>
@@ -3119,13 +3132,13 @@
           <a:cs typeface="+mn-cs"/>
         </a:defRPr>
       </a:lvl4pPr>
-      <a:lvl5pPr algn="l" defTabSz="342900" eaLnBrk="1" hangingPunct="1" indent="-342900" latinLnBrk="0" marL="1714500" rtl="0">
+      <a:lvl5pPr marL="1714500" indent="-342900" algn="l" defTabSz="342900" rtl="0" eaLnBrk="1" latinLnBrk="0" hangingPunct="1">
         <a:spcBef>
           <a:spcPct val="20000"/>
         </a:spcBef>
         <a:buFont typeface="Arial"/>
         <a:buChar char="»"/>
-        <a:defRPr kern="1200" sz="1500">
+        <a:defRPr sz="1500" kern="1200">
           <a:solidFill>
             <a:schemeClr val="tx1"/>
           </a:solidFill>
@@ -3134,13 +3147,13 @@
           <a:cs typeface="+mn-cs"/>
         </a:defRPr>
       </a:lvl5pPr>
-      <a:lvl6pPr algn="l" defTabSz="342900" eaLnBrk="1" hangingPunct="1" indent="-342900" latinLnBrk="0" marL="2057400" rtl="0">
+      <a:lvl6pPr marL="2057400" indent="-342900" algn="l" defTabSz="342900" rtl="0" eaLnBrk="1" latinLnBrk="0" hangingPunct="1">
         <a:spcBef>
           <a:spcPct val="20000"/>
         </a:spcBef>
         <a:buFont typeface="Arial"/>
         <a:buChar char="•"/>
-        <a:defRPr kern="1200" sz="1500">
+        <a:defRPr sz="1500" kern="1200">
           <a:solidFill>
             <a:schemeClr val="tx1"/>
           </a:solidFill>
@@ -3149,13 +3162,13 @@
           <a:cs typeface="+mn-cs"/>
         </a:defRPr>
       </a:lvl6pPr>
-      <a:lvl7pPr algn="l" defTabSz="342900" eaLnBrk="1" hangingPunct="1" indent="-342900" latinLnBrk="0" marL="2400300" rtl="0">
+      <a:lvl7pPr marL="2400300" indent="-342900" algn="l" defTabSz="342900" rtl="0" eaLnBrk="1" latinLnBrk="0" hangingPunct="1">
         <a:spcBef>
           <a:spcPct val="20000"/>
         </a:spcBef>
         <a:buFont typeface="Arial"/>
         <a:buChar char="•"/>
-        <a:defRPr kern="1200" sz="1500">
+        <a:defRPr sz="1500" kern="1200">
           <a:solidFill>
             <a:schemeClr val="tx1"/>
           </a:solidFill>
@@ -3164,13 +3177,13 @@
           <a:cs typeface="+mn-cs"/>
         </a:defRPr>
       </a:lvl7pPr>
-      <a:lvl8pPr algn="l" defTabSz="342900" eaLnBrk="1" hangingPunct="1" indent="-342900" latinLnBrk="0" marL="2743200" rtl="0">
+      <a:lvl8pPr marL="2743200" indent="-342900" algn="l" defTabSz="342900" rtl="0" eaLnBrk="1" latinLnBrk="0" hangingPunct="1">
         <a:spcBef>
           <a:spcPct val="20000"/>
         </a:spcBef>
         <a:buFont typeface="Arial"/>
         <a:buChar char="•"/>
-        <a:defRPr kern="1200" sz="1500">
+        <a:defRPr sz="1500" kern="1200">
           <a:solidFill>
             <a:schemeClr val="tx1"/>
           </a:solidFill>
@@ -3179,13 +3192,13 @@
           <a:cs typeface="+mn-cs"/>
         </a:defRPr>
       </a:lvl8pPr>
-      <a:lvl9pPr algn="l" defTabSz="342900" eaLnBrk="1" hangingPunct="1" indent="-342900" latinLnBrk="0" marL="3086100" rtl="0">
+      <a:lvl9pPr marL="3086100" indent="-342900" algn="l" defTabSz="342900" rtl="0" eaLnBrk="1" latinLnBrk="0" hangingPunct="1">
         <a:spcBef>
           <a:spcPct val="20000"/>
         </a:spcBef>
         <a:buFont typeface="Arial"/>
         <a:buChar char="•"/>
-        <a:defRPr kern="1200" sz="1500">
+        <a:defRPr sz="1500" kern="1200">
           <a:solidFill>
             <a:schemeClr val="tx1"/>
           </a:solidFill>
@@ -3199,8 +3212,8 @@
       <a:defPPr>
         <a:defRPr lang="en-US"/>
       </a:defPPr>
-      <a:lvl1pPr algn="l" defTabSz="342900" eaLnBrk="1" hangingPunct="1" latinLnBrk="0" marL="0" rtl="0">
-        <a:defRPr kern="1200" sz="1350">
+      <a:lvl1pPr marL="0" algn="l" defTabSz="342900" rtl="0" eaLnBrk="1" latinLnBrk="0" hangingPunct="1">
+        <a:defRPr sz="1350" kern="1200">
           <a:solidFill>
             <a:schemeClr val="tx1"/>
           </a:solidFill>
@@ -3209,8 +3222,8 @@
           <a:cs typeface="+mn-cs"/>
         </a:defRPr>
       </a:lvl1pPr>
-      <a:lvl2pPr algn="l" defTabSz="342900" eaLnBrk="1" hangingPunct="1" latinLnBrk="0" marL="342900" rtl="0">
-        <a:defRPr kern="1200" sz="1350">
+      <a:lvl2pPr marL="342900" algn="l" defTabSz="342900" rtl="0" eaLnBrk="1" latinLnBrk="0" hangingPunct="1">
+        <a:defRPr sz="1350" kern="1200">
           <a:solidFill>
             <a:schemeClr val="tx1"/>
           </a:solidFill>
@@ -3219,8 +3232,8 @@
           <a:cs typeface="+mn-cs"/>
         </a:defRPr>
       </a:lvl2pPr>
-      <a:lvl3pPr algn="l" defTabSz="342900" eaLnBrk="1" hangingPunct="1" latinLnBrk="0" marL="685800" rtl="0">
-        <a:defRPr kern="1200" sz="1350">
+      <a:lvl3pPr marL="685800" algn="l" defTabSz="342900" rtl="0" eaLnBrk="1" latinLnBrk="0" hangingPunct="1">
+        <a:defRPr sz="1350" kern="1200">
           <a:solidFill>
             <a:schemeClr val="tx1"/>
           </a:solidFill>
@@ -3229,8 +3242,8 @@
           <a:cs typeface="+mn-cs"/>
         </a:defRPr>
       </a:lvl3pPr>
-      <a:lvl4pPr algn="l" defTabSz="342900" eaLnBrk="1" hangingPunct="1" latinLnBrk="0" marL="1028700" rtl="0">
-        <a:defRPr kern="1200" sz="1350">
+      <a:lvl4pPr marL="1028700" algn="l" defTabSz="342900" rtl="0" eaLnBrk="1" latinLnBrk="0" hangingPunct="1">
+        <a:defRPr sz="1350" kern="1200">
           <a:solidFill>
             <a:schemeClr val="tx1"/>
           </a:solidFill>
@@ -3239,8 +3252,8 @@
           <a:cs typeface="+mn-cs"/>
         </a:defRPr>
       </a:lvl4pPr>
-      <a:lvl5pPr algn="l" defTabSz="342900" eaLnBrk="1" hangingPunct="1" latinLnBrk="0" marL="1371600" rtl="0">
-        <a:defRPr kern="1200" sz="1350">
+      <a:lvl5pPr marL="1371600" algn="l" defTabSz="342900" rtl="0" eaLnBrk="1" latinLnBrk="0" hangingPunct="1">
+        <a:defRPr sz="1350" kern="1200">
           <a:solidFill>
             <a:schemeClr val="tx1"/>
           </a:solidFill>
@@ -3249,8 +3262,8 @@
           <a:cs typeface="+mn-cs"/>
         </a:defRPr>
       </a:lvl5pPr>
-      <a:lvl6pPr algn="l" defTabSz="342900" eaLnBrk="1" hangingPunct="1" latinLnBrk="0" marL="1714500" rtl="0">
-        <a:defRPr kern="1200" sz="1350">
+      <a:lvl6pPr marL="1714500" algn="l" defTabSz="342900" rtl="0" eaLnBrk="1" latinLnBrk="0" hangingPunct="1">
+        <a:defRPr sz="1350" kern="1200">
           <a:solidFill>
             <a:schemeClr val="tx1"/>
           </a:solidFill>
@@ -3259,8 +3272,8 @@
           <a:cs typeface="+mn-cs"/>
         </a:defRPr>
       </a:lvl6pPr>
-      <a:lvl7pPr algn="l" defTabSz="342900" eaLnBrk="1" hangingPunct="1" latinLnBrk="0" marL="2057400" rtl="0">
-        <a:defRPr kern="1200" sz="1350">
+      <a:lvl7pPr marL="2057400" algn="l" defTabSz="342900" rtl="0" eaLnBrk="1" latinLnBrk="0" hangingPunct="1">
+        <a:defRPr sz="1350" kern="1200">
           <a:solidFill>
             <a:schemeClr val="tx1"/>
           </a:solidFill>
@@ -3269,8 +3282,8 @@
           <a:cs typeface="+mn-cs"/>
         </a:defRPr>
       </a:lvl7pPr>
-      <a:lvl8pPr algn="l" defTabSz="342900" eaLnBrk="1" hangingPunct="1" latinLnBrk="0" marL="2400300" rtl="0">
-        <a:defRPr kern="1200" sz="1350">
+      <a:lvl8pPr marL="2400300" algn="l" defTabSz="342900" rtl="0" eaLnBrk="1" latinLnBrk="0" hangingPunct="1">
+        <a:defRPr sz="1350" kern="1200">
           <a:solidFill>
             <a:schemeClr val="tx1"/>
           </a:solidFill>
@@ -3279,8 +3292,8 @@
           <a:cs typeface="+mn-cs"/>
         </a:defRPr>
       </a:lvl8pPr>
-      <a:lvl9pPr algn="l" defTabSz="342900" eaLnBrk="1" hangingPunct="1" latinLnBrk="0" marL="2743200" rtl="0">
-        <a:defRPr kern="1200" sz="1350">
+      <a:lvl9pPr marL="2743200" algn="l" defTabSz="342900" rtl="0" eaLnBrk="1" latinLnBrk="0" hangingPunct="1">
+        <a:defRPr sz="1350" kern="1200">
           <a:solidFill>
             <a:schemeClr val="tx1"/>
           </a:solidFill>
@@ -3291,6 +3304,22 @@
       </a:lvl9pPr>
     </p:otherStyle>
   </p:txStyles>
+  <p:extLst>
+    <p:ext uri="{27BBF7A9-308A-43DC-89C8-2F10F3537804}">
+      <p15:sldGuideLst xmlns:p15="http://schemas.microsoft.com/office/powerpoint/2012/main">
+        <p15:guide id="1" orient="horz" pos="1620" userDrawn="1">
+          <p15:clr>
+            <a:srgbClr val="F26B43"/>
+          </p15:clr>
+        </p15:guide>
+        <p15:guide id="2" pos="2880" userDrawn="1">
+          <p15:clr>
+            <a:srgbClr val="F26B43"/>
+          </p15:clr>
+        </p15:guide>
+      </p15:sldGuideLst>
+    </p:ext>
+  </p:extLst>
 </p:sldMaster>
 </file>
 
@@ -3318,7 +3347,7 @@
             <a:spLocks noGrp="1"/>
           </p:cNvSpPr>
           <p:nvPr>
-            <p:ph type="ctrTitle"/>
+            <p:ph type="ctrTitle" hasCustomPrompt="1"/>
           </p:nvPr>
         </p:nvSpPr>
         <p:spPr>
@@ -3331,11 +3360,10 @@
           <a:bodyPr/>
           <a:lstStyle/>
           <a:p>
-            <a:pPr lvl="0" indent="0" marL="0">
+            <a:pPr marL="0" lvl="0" indent="0">
               <a:buNone/>
             </a:pPr>
             <a:r>
-              <a:rPr/>
               <a:t>스포츠경기예측론</a:t>
             </a:r>
           </a:p>
@@ -3348,7 +3376,7 @@
             <a:spLocks noGrp="1"/>
           </p:cNvSpPr>
           <p:nvPr>
-            <p:ph idx="1" type="subTitle"/>
+            <p:ph type="subTitle" idx="1"/>
           </p:nvPr>
         </p:nvSpPr>
         <p:spPr>
@@ -3358,14 +3386,17 @@
           </a:xfrm>
         </p:spPr>
         <p:txBody>
-          <a:bodyPr/>
+          <a:bodyPr>
+            <a:normAutofit lnSpcReduction="10000"/>
+          </a:bodyPr>
           <a:lstStyle/>
           <a:p>
-            <a:pPr lvl="0" indent="0" marL="0">
+            <a:pPr marL="0" lvl="0" indent="0">
               <a:buNone/>
             </a:pPr>
-            <a:r>
-              <a:rPr/>
+            <a:br/>
+            <a:br/>
+            <a:r>
               <a:t>Jihoon, Park</a:t>
             </a:r>
           </a:p>
@@ -3373,6 +3404,9 @@
       </p:sp>
     </p:spTree>
   </p:cSld>
+  <p:clrMapOvr>
+    <a:masterClrMapping/>
+  </p:clrMapOvr>
 </p:sld>
 </file>
 
@@ -3413,12 +3447,11 @@
           <a:bodyPr/>
           <a:lstStyle/>
           <a:p>
-            <a:pPr lvl="0" indent="0" marL="0">
+            <a:pPr marL="0" lvl="0" indent="0">
               <a:buNone/>
             </a:pPr>
             <a:r>
-              <a:rPr/>
-              <a:t>F분포 탄생</a:t>
+              <a:t>t분포의 정의</a:t>
             </a:r>
           </a:p>
         </p:txBody>
@@ -3435,92 +3468,585 @@
                 <p:ph idx="1"/>
               </p:nvPr>
             </p:nvSpPr>
-            <p:spPr/>
+            <p:spPr>
+              <a:xfrm>
+                <a:off x="740999" y="1860259"/>
+                <a:ext cx="7847518" cy="3143439"/>
+              </a:xfrm>
+            </p:spPr>
+            <p:txBody>
+              <a:bodyPr>
+                <a:normAutofit fontScale="77500" lnSpcReduction="20000"/>
+              </a:bodyPr>
+              <a:lstStyle/>
+              <a:p>
+                <a:pPr marL="0" lvl="0" indent="0">
+                  <a:buNone/>
+                </a:pPr>
+                <a:r>
+                  <a:rPr dirty="0" err="1"/>
+                  <a:t>표본정규분포</a:t>
+                </a:r>
+                <a:endParaRPr dirty="0"/>
+              </a:p>
+              <a:p>
+                <a:pPr marL="0" lvl="0" indent="0">
+                  <a:buNone/>
+                </a:pPr>
+                <a14:m>
+                  <m:oMathPara xmlns:m="http://schemas.openxmlformats.org/officeDocument/2006/math">
+                    <m:oMathParaPr>
+                      <m:jc m:val="center"/>
+                    </m:oMathParaPr>
+                    <m:oMath>
+                      <m:r>
+                        <a:rPr>
+                          <a:latin typeface="Cambria Math" panose="02040503050406030204" pitchFamily="18" charset="0"/>
+                        </a:rPr>
+                        <m:t>𝑍</m:t>
+                      </m:r>
+                      <m:r>
+                        <a:rPr>
+                          <a:latin typeface="Cambria Math" panose="02040503050406030204" pitchFamily="18" charset="0"/>
+                        </a:rPr>
+                        <m:t>∼</m:t>
+                      </m:r>
+                      <m:r>
+                        <a:rPr>
+                          <a:latin typeface="Cambria Math" panose="02040503050406030204" pitchFamily="18" charset="0"/>
+                        </a:rPr>
+                        <m:t>𝑁</m:t>
+                      </m:r>
+                      <m:d>
+                        <m:dPr>
+                          <m:ctrlPr>
+                            <a:rPr>
+                              <a:latin typeface="Cambria Math" panose="02040503050406030204" pitchFamily="18" charset="0"/>
+                            </a:rPr>
+                          </m:ctrlPr>
+                        </m:dPr>
+                        <m:e>
+                          <m:r>
+                            <a:rPr>
+                              <a:latin typeface="Cambria Math" panose="02040503050406030204" pitchFamily="18" charset="0"/>
+                            </a:rPr>
+                            <m:t>0,1</m:t>
+                          </m:r>
+                        </m:e>
+                      </m:d>
+                    </m:oMath>
+                  </m:oMathPara>
+                </a14:m>
+                <a:endParaRPr dirty="0"/>
+              </a:p>
+              <a:p>
+                <a:pPr marL="0" lvl="0" indent="0">
+                  <a:buNone/>
+                </a:pPr>
+                <a:r>
+                  <a:rPr dirty="0" err="1"/>
+                  <a:t>와</a:t>
+                </a:r>
+                <a:r>
+                  <a:rPr dirty="0"/>
+                  <a:t> </a:t>
+                </a:r>
+                <a:r>
+                  <a:rPr dirty="0" err="1"/>
+                  <a:t>카이제곱분포</a:t>
+                </a:r>
+                <a:endParaRPr dirty="0"/>
+              </a:p>
+              <a:p>
+                <a:pPr marL="0" lvl="0" indent="0">
+                  <a:buNone/>
+                </a:pPr>
+                <a14:m>
+                  <m:oMathPara xmlns:m="http://schemas.openxmlformats.org/officeDocument/2006/math">
+                    <m:oMathParaPr>
+                      <m:jc m:val="center"/>
+                    </m:oMathParaPr>
+                    <m:oMath>
+                      <m:sSup>
+                        <m:sSupPr>
+                          <m:ctrlPr>
+                            <a:rPr>
+                              <a:latin typeface="Cambria Math" panose="02040503050406030204" pitchFamily="18" charset="0"/>
+                            </a:rPr>
+                          </m:ctrlPr>
+                        </m:sSupPr>
+                        <m:e>
+                          <m:r>
+                            <a:rPr>
+                              <a:latin typeface="Cambria Math" panose="02040503050406030204" pitchFamily="18" charset="0"/>
+                            </a:rPr>
+                            <m:t>𝜒</m:t>
+                          </m:r>
+                        </m:e>
+                        <m:sup>
+                          <m:r>
+                            <a:rPr>
+                              <a:latin typeface="Cambria Math" panose="02040503050406030204" pitchFamily="18" charset="0"/>
+                            </a:rPr>
+                            <m:t>2</m:t>
+                          </m:r>
+                        </m:sup>
+                      </m:sSup>
+                    </m:oMath>
+                  </m:oMathPara>
+                </a14:m>
+                <a:endParaRPr dirty="0"/>
+              </a:p>
+              <a:p>
+                <a:pPr marL="0" lvl="0" indent="0">
+                  <a:buNone/>
+                </a:pPr>
+                <a:r>
+                  <a:rPr dirty="0" err="1"/>
+                  <a:t>를</a:t>
+                </a:r>
+                <a:r>
+                  <a:rPr dirty="0"/>
+                  <a:t> </a:t>
+                </a:r>
+                <a:r>
+                  <a:rPr dirty="0" err="1"/>
+                  <a:t>이용하여</a:t>
+                </a:r>
+                <a:endParaRPr dirty="0"/>
+              </a:p>
+              <a:p>
+                <a:pPr marL="0" lvl="0" indent="0">
+                  <a:buNone/>
+                </a:pPr>
+                <a14:m>
+                  <m:oMathPara xmlns:m="http://schemas.openxmlformats.org/officeDocument/2006/math">
+                    <m:oMathParaPr>
+                      <m:jc m:val="center"/>
+                    </m:oMathParaPr>
+                    <m:oMath>
+                      <m:r>
+                        <a:rPr>
+                          <a:latin typeface="Cambria Math" panose="02040503050406030204" pitchFamily="18" charset="0"/>
+                        </a:rPr>
+                        <m:t>𝑡</m:t>
+                      </m:r>
+                      <m:r>
+                        <a:rPr>
+                          <a:latin typeface="Cambria Math" panose="02040503050406030204" pitchFamily="18" charset="0"/>
+                        </a:rPr>
+                        <m:t>=</m:t>
+                      </m:r>
+                      <m:f>
+                        <m:fPr>
+                          <m:ctrlPr>
+                            <a:rPr>
+                              <a:latin typeface="Cambria Math" panose="02040503050406030204" pitchFamily="18" charset="0"/>
+                            </a:rPr>
+                          </m:ctrlPr>
+                        </m:fPr>
+                        <m:num>
+                          <m:r>
+                            <a:rPr>
+                              <a:latin typeface="Cambria Math" panose="02040503050406030204" pitchFamily="18" charset="0"/>
+                            </a:rPr>
+                            <m:t>𝑍</m:t>
+                          </m:r>
+                        </m:num>
+                        <m:den>
+                          <m:rad>
+                            <m:radPr>
+                              <m:degHide m:val="on"/>
+                              <m:ctrlPr>
+                                <a:rPr i="1">
+                                  <a:latin typeface="Cambria Math" panose="02040503050406030204" pitchFamily="18" charset="0"/>
+                                </a:rPr>
+                              </m:ctrlPr>
+                            </m:radPr>
+                            <m:deg/>
+                            <m:e>
+                              <m:sSup>
+                                <m:sSupPr>
+                                  <m:ctrlPr>
+                                    <a:rPr>
+                                      <a:latin typeface="Cambria Math" panose="02040503050406030204" pitchFamily="18" charset="0"/>
+                                    </a:rPr>
+                                  </m:ctrlPr>
+                                </m:sSupPr>
+                                <m:e>
+                                  <m:r>
+                                    <a:rPr>
+                                      <a:latin typeface="Cambria Math" panose="02040503050406030204" pitchFamily="18" charset="0"/>
+                                    </a:rPr>
+                                    <m:t>𝜒</m:t>
+                                  </m:r>
+                                </m:e>
+                                <m:sup>
+                                  <m:r>
+                                    <a:rPr>
+                                      <a:latin typeface="Cambria Math" panose="02040503050406030204" pitchFamily="18" charset="0"/>
+                                    </a:rPr>
+                                    <m:t>2</m:t>
+                                  </m:r>
+                                </m:sup>
+                              </m:sSup>
+                              <m:r>
+                                <a:rPr>
+                                  <a:latin typeface="Cambria Math" panose="02040503050406030204" pitchFamily="18" charset="0"/>
+                                </a:rPr>
+                                <m:t>/</m:t>
+                              </m:r>
+                              <m:r>
+                                <a:rPr>
+                                  <a:latin typeface="Cambria Math" panose="02040503050406030204" pitchFamily="18" charset="0"/>
+                                </a:rPr>
+                                <m:t>𝑑𝑓</m:t>
+                              </m:r>
+                            </m:e>
+                          </m:rad>
+                        </m:den>
+                      </m:f>
+                    </m:oMath>
+                  </m:oMathPara>
+                </a14:m>
+                <a:endParaRPr dirty="0"/>
+              </a:p>
+              <a:p>
+                <a:pPr marL="0" lvl="0" indent="0">
+                  <a:buNone/>
+                </a:pPr>
+                <a:r>
+                  <a:rPr dirty="0" err="1"/>
+                  <a:t>t값</a:t>
+                </a:r>
+                <a:endParaRPr dirty="0"/>
+              </a:p>
+              <a:p>
+                <a:pPr marL="0" lvl="0" indent="0">
+                  <a:buNone/>
+                </a:pPr>
+                <a14:m>
+                  <m:oMathPara xmlns:m="http://schemas.openxmlformats.org/officeDocument/2006/math">
+                    <m:oMathParaPr>
+                      <m:jc m:val="center"/>
+                    </m:oMathParaPr>
+                    <m:oMath>
+                      <m:r>
+                        <a:rPr>
+                          <a:latin typeface="Cambria Math" panose="02040503050406030204" pitchFamily="18" charset="0"/>
+                        </a:rPr>
+                        <m:t>𝑡</m:t>
+                      </m:r>
+                      <m:r>
+                        <a:rPr>
+                          <a:latin typeface="Cambria Math" panose="02040503050406030204" pitchFamily="18" charset="0"/>
+                        </a:rPr>
+                        <m:t>=</m:t>
+                      </m:r>
+                      <m:f>
+                        <m:fPr>
+                          <m:ctrlPr>
+                            <a:rPr i="1">
+                              <a:latin typeface="Cambria Math" panose="02040503050406030204" pitchFamily="18" charset="0"/>
+                            </a:rPr>
+                          </m:ctrlPr>
+                        </m:fPr>
+                        <m:num>
+                          <m:acc>
+                            <m:accPr>
+                              <m:chr m:val="‾"/>
+                              <m:ctrlPr>
+                                <a:rPr>
+                                  <a:latin typeface="Cambria Math" panose="02040503050406030204" pitchFamily="18" charset="0"/>
+                                </a:rPr>
+                              </m:ctrlPr>
+                            </m:accPr>
+                            <m:e>
+                              <m:r>
+                                <a:rPr>
+                                  <a:latin typeface="Cambria Math" panose="02040503050406030204" pitchFamily="18" charset="0"/>
+                                </a:rPr>
+                                <m:t>𝑋</m:t>
+                              </m:r>
+                            </m:e>
+                          </m:acc>
+                          <m:r>
+                            <a:rPr>
+                              <a:latin typeface="Cambria Math" panose="02040503050406030204" pitchFamily="18" charset="0"/>
+                            </a:rPr>
+                            <m:t>−</m:t>
+                          </m:r>
+                          <m:r>
+                            <a:rPr>
+                              <a:latin typeface="Cambria Math" panose="02040503050406030204" pitchFamily="18" charset="0"/>
+                            </a:rPr>
+                            <m:t>𝜇</m:t>
+                          </m:r>
+                        </m:num>
+                        <m:den>
+                          <m:r>
+                            <a:rPr>
+                              <a:latin typeface="Cambria Math" panose="02040503050406030204" pitchFamily="18" charset="0"/>
+                            </a:rPr>
+                            <m:t>𝑠</m:t>
+                          </m:r>
+                          <m:r>
+                            <a:rPr>
+                              <a:latin typeface="Cambria Math" panose="02040503050406030204" pitchFamily="18" charset="0"/>
+                            </a:rPr>
+                            <m:t>/</m:t>
+                          </m:r>
+                          <m:rad>
+                            <m:radPr>
+                              <m:degHide m:val="on"/>
+                              <m:ctrlPr>
+                                <a:rPr i="1">
+                                  <a:latin typeface="Cambria Math" panose="02040503050406030204" pitchFamily="18" charset="0"/>
+                                </a:rPr>
+                              </m:ctrlPr>
+                            </m:radPr>
+                            <m:deg/>
+                            <m:e>
+                              <m:r>
+                                <a:rPr>
+                                  <a:latin typeface="Cambria Math" panose="02040503050406030204" pitchFamily="18" charset="0"/>
+                                </a:rPr>
+                                <m:t>𝑛</m:t>
+                              </m:r>
+                            </m:e>
+                          </m:rad>
+                        </m:den>
+                      </m:f>
+                    </m:oMath>
+                  </m:oMathPara>
+                </a14:m>
+                <a:endParaRPr dirty="0"/>
+              </a:p>
+              <a:p>
+                <a:pPr marL="0" lvl="0" indent="0">
+                  <a:buNone/>
+                </a:pPr>
+                <a:r>
+                  <a:rPr dirty="0" err="1"/>
+                  <a:t>즉</a:t>
+                </a:r>
+                <a:r>
+                  <a:rPr dirty="0"/>
+                  <a:t>,</a:t>
+                </a:r>
+              </a:p>
+              <a:p>
+                <a:pPr marL="0" lvl="0" indent="0">
+                  <a:buNone/>
+                </a:pPr>
+                <a14:m>
+                  <m:oMathPara xmlns:m="http://schemas.openxmlformats.org/officeDocument/2006/math">
+                    <m:oMathParaPr>
+                      <m:jc m:val="center"/>
+                    </m:oMathParaPr>
+                    <m:oMath>
+                      <m:f>
+                        <m:fPr>
+                          <m:ctrlPr>
+                            <a:rPr>
+                              <a:latin typeface="Cambria Math" panose="02040503050406030204" pitchFamily="18" charset="0"/>
+                            </a:rPr>
+                          </m:ctrlPr>
+                        </m:fPr>
+                        <m:num>
+                          <m:r>
+                            <a:rPr>
+                              <a:latin typeface="Cambria Math" panose="02040503050406030204" pitchFamily="18" charset="0"/>
+                            </a:rPr>
+                            <m:t>평균 차이</m:t>
+                          </m:r>
+                        </m:num>
+                        <m:den>
+                          <m:r>
+                            <a:rPr>
+                              <a:latin typeface="Cambria Math" panose="02040503050406030204" pitchFamily="18" charset="0"/>
+                            </a:rPr>
+                            <m:t>표준오차</m:t>
+                          </m:r>
+                        </m:den>
+                      </m:f>
+                    </m:oMath>
+                  </m:oMathPara>
+                </a14:m>
+                <a:endParaRPr dirty="0"/>
+              </a:p>
+              <a:p>
+                <a:pPr marL="0" lvl="0" indent="0">
+                  <a:buNone/>
+                </a:pPr>
+                <a:endParaRPr lang="en-US" dirty="0"/>
+              </a:p>
+              <a:p>
+                <a:pPr marL="0" lvl="0" indent="0">
+                  <a:buNone/>
+                </a:pPr>
+                <a:r>
+                  <a:rPr dirty="0" err="1"/>
+                  <a:t>자유도</a:t>
+                </a:r>
+                <a:r>
+                  <a:rPr dirty="0"/>
+                  <a:t>(</a:t>
+                </a:r>
+                <a:r>
+                  <a:rPr dirty="0" err="1"/>
+                  <a:t>표본</a:t>
+                </a:r>
+                <a:r>
+                  <a:rPr dirty="0"/>
+                  <a:t>)</a:t>
+                </a:r>
+                <a:r>
+                  <a:rPr dirty="0" err="1"/>
+                  <a:t>가</a:t>
+                </a:r>
+                <a:r>
+                  <a:rPr dirty="0"/>
+                  <a:t> </a:t>
+                </a:r>
+                <a:r>
+                  <a:rPr dirty="0" err="1"/>
+                  <a:t>작으면</a:t>
+                </a:r>
+                <a:r>
+                  <a:rPr dirty="0"/>
+                  <a:t> </a:t>
+                </a:r>
+                <a:r>
+                  <a:rPr b="1" dirty="0" err="1"/>
+                  <a:t>꼬리가</a:t>
+                </a:r>
+                <a:r>
+                  <a:rPr b="1" dirty="0"/>
+                  <a:t> </a:t>
+                </a:r>
+                <a:r>
+                  <a:rPr b="1" dirty="0" err="1"/>
+                  <a:t>두꺼움</a:t>
+                </a:r>
+                <a:r>
+                  <a:rPr dirty="0"/>
+                  <a:t>, </a:t>
+                </a:r>
+                <a:r>
+                  <a:rPr dirty="0" err="1"/>
+                  <a:t>자유도가</a:t>
+                </a:r>
+                <a:r>
+                  <a:rPr dirty="0"/>
+                  <a:t> </a:t>
+                </a:r>
+                <a:r>
+                  <a:rPr dirty="0" err="1"/>
+                  <a:t>커지면</a:t>
+                </a:r>
+                <a:r>
+                  <a:rPr dirty="0"/>
+                  <a:t> </a:t>
+                </a:r>
+                <a:r>
+                  <a:rPr b="1" dirty="0" err="1"/>
+                  <a:t>정규분포와</a:t>
+                </a:r>
+                <a:r>
+                  <a:rPr b="1" dirty="0"/>
+                  <a:t> </a:t>
+                </a:r>
+                <a:r>
+                  <a:rPr b="1" dirty="0" err="1"/>
+                  <a:t>거의</a:t>
+                </a:r>
+                <a:r>
+                  <a:rPr b="1" dirty="0"/>
+                  <a:t> </a:t>
+                </a:r>
+                <a:r>
+                  <a:rPr b="1" dirty="0" err="1"/>
+                  <a:t>같아짐</a:t>
+                </a:r>
+                <a:endParaRPr b="1" dirty="0"/>
+              </a:p>
+            </p:txBody>
+          </p:sp>
+        </mc:Choice>
+        <mc:Fallback>
+          <p:sp>
+            <p:nvSpPr>
+              <p:cNvPr id="3" name="Content Placeholder 2"/>
+              <p:cNvSpPr>
+                <a:spLocks noGrp="1" noRot="1" noChangeAspect="1" noMove="1" noResize="1" noEditPoints="1" noAdjustHandles="1" noChangeArrowheads="1" noChangeShapeType="1" noTextEdit="1"/>
+              </p:cNvSpPr>
+              <p:nvPr>
+                <p:ph idx="1"/>
+              </p:nvPr>
+            </p:nvSpPr>
+            <p:spPr>
+              <a:xfrm>
+                <a:off x="740999" y="1860259"/>
+                <a:ext cx="7847518" cy="3143439"/>
+              </a:xfrm>
+              <a:blipFill>
+                <a:blip r:embed="rId2"/>
+                <a:stretch>
+                  <a:fillRect t="-803"/>
+                </a:stretch>
+              </a:blipFill>
+            </p:spPr>
             <p:txBody>
               <a:bodyPr/>
               <a:lstStyle/>
               <a:p>
-                <a:pPr lvl="0" indent="0" marL="0">
-                  <a:spcBef>
-                    <a:spcPts val="3000"/>
-                  </a:spcBef>
-                  <a:buNone/>
-                </a:pPr>
-                <a:r>
-                  <a:rPr b="1"/>
-                  <a:t>새로운 문제</a:t>
-                </a:r>
-              </a:p>
-              <a:p>
-                <a:pPr lvl="0"/>
-                <a:r>
-                  <a:rPr/>
-                  <a:t>1900년대 초 연구자들은 “두 집단 평균 비교” 뿐 아니라 “3개 이상 집단 비교”를 시도</a:t>
-                </a:r>
-              </a:p>
-              <a:p>
-                <a:pPr lvl="0" indent="0" marL="0">
-                  <a:buNone/>
-                </a:pPr>
-                <a14:m>
-                  <m:oMath xmlns:m="http://schemas.openxmlformats.org/officeDocument/2006/math">
-                    <m:r>
-                      <m:t>집</m:t>
-                    </m:r>
-                    <m:r>
-                      <m:t>단</m:t>
-                    </m:r>
-                    <m:r>
-                      <m:t>간</m:t>
-                    </m:r>
-                    <m:r>
-                      <m:t> </m:t>
-                    </m:r>
-                    <m:r>
-                      <m:t>차</m:t>
-                    </m:r>
-                    <m:r>
-                      <m:t>이</m:t>
-                    </m:r>
-                    <m:r>
-                      <m:t> </m:t>
-                    </m:r>
-                    <m:r>
-                      <m:t>v</m:t>
-                    </m:r>
-                    <m:r>
-                      <m:t>s</m:t>
-                    </m:r>
-                    <m:r>
-                      <m:t> </m:t>
-                    </m:r>
-                    <m:r>
-                      <m:t>집</m:t>
-                    </m:r>
-                    <m:r>
-                      <m:t>단</m:t>
-                    </m:r>
-                    <m:r>
-                      <m:t>내</m:t>
-                    </m:r>
-                    <m:r>
-                      <m:t> </m:t>
-                    </m:r>
-                    <m:r>
-                      <m:t>차</m:t>
-                    </m:r>
-                    <m:r>
-                      <m:t>이</m:t>
-                    </m:r>
-                  </m:oMath>
-                </a14:m>
+                <a:r>
+                  <a:rPr lang="en-US">
+                    <a:noFill/>
+                  </a:rPr>
+                  <a:t> </a:t>
+                </a:r>
               </a:p>
             </p:txBody>
           </p:sp>
-        </mc:Choice>
+        </mc:Fallback>
       </mc:AlternateContent>
+      <p:pic>
+        <p:nvPicPr>
+          <p:cNvPr id="4" name="Picture 3">
+            <a:extLst>
+              <a:ext uri="{FF2B5EF4-FFF2-40B4-BE49-F238E27FC236}">
+                <a16:creationId xmlns:a16="http://schemas.microsoft.com/office/drawing/2014/main" id="{A9924761-E403-FE64-1606-5081EB4F9EE5}"/>
+              </a:ext>
+            </a:extLst>
+          </p:cNvPr>
+          <p:cNvPicPr>
+            <a:picLocks noChangeAspect="1"/>
+          </p:cNvPicPr>
+          <p:nvPr/>
+        </p:nvPicPr>
+        <p:blipFill>
+          <a:blip r:embed="rId3"/>
+          <a:stretch>
+            <a:fillRect/>
+          </a:stretch>
+        </p:blipFill>
+        <p:spPr>
+          <a:xfrm>
+            <a:off x="5805665" y="2139924"/>
+            <a:ext cx="2926571" cy="2341257"/>
+          </a:xfrm>
+          <a:prstGeom prst="rect">
+            <a:avLst/>
+          </a:prstGeom>
+        </p:spPr>
+      </p:pic>
     </p:spTree>
   </p:cSld>
+  <p:clrMapOvr>
+    <a:masterClrMapping/>
+  </p:clrMapOvr>
 </p:sld>
 </file>
 
@@ -3561,12 +4087,11 @@
           <a:bodyPr/>
           <a:lstStyle/>
           <a:p>
-            <a:pPr lvl="0" indent="0" marL="0">
+            <a:pPr marL="0" lvl="0" indent="0">
               <a:buNone/>
             </a:pPr>
             <a:r>
-              <a:rPr/>
-              <a:t>F분포</a:t>
+              <a:t>F분포 탄생</a:t>
             </a:r>
           </a:p>
         </p:txBody>
@@ -3588,359 +4113,262 @@
               <a:bodyPr/>
               <a:lstStyle/>
               <a:p>
-                <a:pPr lvl="0" indent="0" marL="0">
+                <a:pPr marL="0" lvl="0" indent="0">
                   <a:spcBef>
                     <a:spcPts val="3000"/>
                   </a:spcBef>
                   <a:buNone/>
                 </a:pPr>
                 <a:r>
-                  <a:rPr b="1"/>
-                  <a:t>발견자</a:t>
-                </a:r>
+                  <a:rPr b="1" dirty="0" err="1"/>
+                  <a:t>새로운</a:t>
+                </a:r>
+                <a:r>
+                  <a:rPr b="1" dirty="0"/>
+                  <a:t> </a:t>
+                </a:r>
+                <a:r>
+                  <a:rPr b="1" dirty="0" err="1"/>
+                  <a:t>문제</a:t>
+                </a:r>
+                <a:endParaRPr b="1" dirty="0"/>
               </a:p>
               <a:p>
                 <a:pPr lvl="0"/>
                 <a:r>
-                  <a:rPr/>
-                  <a:t>Ronald A. Fisher (1890~1962) 가 1920년대 분산비(Variance Ratio) 개념 제안</a:t>
-                </a:r>
+                  <a:rPr dirty="0"/>
+                  <a:t>1900년대 </a:t>
+                </a:r>
+                <a:r>
+                  <a:rPr dirty="0" err="1"/>
+                  <a:t>초</a:t>
+                </a:r>
+                <a:r>
+                  <a:rPr dirty="0"/>
+                  <a:t> </a:t>
+                </a:r>
+                <a:r>
+                  <a:rPr dirty="0" err="1"/>
+                  <a:t>연구자들은</a:t>
+                </a:r>
+                <a:r>
+                  <a:rPr dirty="0"/>
+                  <a:t> “</a:t>
+                </a:r>
+                <a:r>
+                  <a:rPr dirty="0" err="1"/>
+                  <a:t>두</a:t>
+                </a:r>
+                <a:r>
+                  <a:rPr dirty="0"/>
+                  <a:t> </a:t>
+                </a:r>
+                <a:r>
+                  <a:rPr dirty="0" err="1"/>
+                  <a:t>집단</a:t>
+                </a:r>
+                <a:r>
+                  <a:rPr dirty="0"/>
+                  <a:t> </a:t>
+                </a:r>
+                <a:r>
+                  <a:rPr dirty="0" err="1"/>
+                  <a:t>평균</a:t>
+                </a:r>
+                <a:r>
+                  <a:rPr dirty="0"/>
+                  <a:t> </a:t>
+                </a:r>
+                <a:r>
+                  <a:rPr dirty="0" err="1"/>
+                  <a:t>비교</a:t>
+                </a:r>
+                <a:r>
+                  <a:rPr dirty="0"/>
+                  <a:t>” </a:t>
+                </a:r>
+                <a:r>
+                  <a:rPr dirty="0" err="1"/>
+                  <a:t>뿐</a:t>
+                </a:r>
+                <a:r>
+                  <a:rPr dirty="0"/>
+                  <a:t> </a:t>
+                </a:r>
+                <a:r>
+                  <a:rPr dirty="0" err="1"/>
+                  <a:t>아니라</a:t>
+                </a:r>
+                <a:r>
+                  <a:rPr dirty="0"/>
+                  <a:t> “3개 </a:t>
+                </a:r>
+                <a:r>
+                  <a:rPr dirty="0" err="1"/>
+                  <a:t>이상</a:t>
+                </a:r>
+                <a:r>
+                  <a:rPr dirty="0"/>
+                  <a:t> </a:t>
+                </a:r>
+                <a:r>
+                  <a:rPr dirty="0" err="1"/>
+                  <a:t>집단</a:t>
+                </a:r>
+                <a:r>
+                  <a:rPr dirty="0"/>
+                  <a:t> </a:t>
+                </a:r>
+                <a:r>
+                  <a:rPr dirty="0" err="1"/>
+                  <a:t>비교”를</a:t>
+                </a:r>
+                <a:r>
+                  <a:rPr dirty="0"/>
+                  <a:t> </a:t>
+                </a:r>
+                <a:r>
+                  <a:rPr dirty="0" err="1"/>
+                  <a:t>시도</a:t>
+                </a:r>
+                <a:endParaRPr lang="en-US" dirty="0"/>
               </a:p>
               <a:p>
                 <a:pPr lvl="0"/>
-                <a:r>
-                  <a:rPr/>
-                  <a:t>분산들의 비율을 비교하기 위해 </a:t>
-                </a:r>
-                <a14:m>
-                  <m:oMath xmlns:m="http://schemas.openxmlformats.org/officeDocument/2006/math">
-                    <m:f>
-                      <m:fPr>
-                        <m:type m:val="bar"/>
-                      </m:fPr>
-                      <m:num>
-                        <m:r>
-                          <m:t>분</m:t>
-                        </m:r>
-                        <m:r>
-                          <m:t>산</m:t>
-                        </m:r>
-                        <m:r>
-                          <m:t>1</m:t>
-                        </m:r>
-                      </m:num>
-                      <m:den>
-                        <m:r>
-                          <m:t>분</m:t>
-                        </m:r>
-                        <m:r>
-                          <m:t>산</m:t>
-                        </m:r>
-                        <m:r>
-                          <m:t>2</m:t>
-                        </m:r>
-                      </m:den>
-                    </m:f>
-                  </m:oMath>
-                </a14:m>
-                <a:r>
-                  <a:rPr/>
-                  <a:t> 를 연구함</a:t>
-                </a:r>
+                <a:endParaRPr dirty="0"/>
               </a:p>
               <a:p>
-                <a:pPr lvl="0" indent="0" marL="0">
-                  <a:spcBef>
-                    <a:spcPts val="3000"/>
-                  </a:spcBef>
-                  <a:buNone/>
-                </a:pPr>
-                <a:r>
-                  <a:rPr b="1"/>
-                  <a:t>F분포의 개념</a:t>
-                </a:r>
-              </a:p>
-              <a:p>
-                <a:pPr lvl="0"/>
-                <a:r>
-                  <a:rPr/>
-                  <a:t>두 카이제곱 분포의 비율로 만들어지는 분포</a:t>
-                </a:r>
-              </a:p>
-              <a:p>
-                <a:pPr lvl="0" indent="0" marL="0">
+                <a:pPr marL="0" lvl="0" indent="0">
                   <a:buNone/>
                 </a:pPr>
                 <a14:m>
                   <m:oMathPara xmlns:m="http://schemas.openxmlformats.org/officeDocument/2006/math">
-                    <m:oMathParaPr>
-                      <m:jc m:val="center"/>
-                    </m:oMathParaPr>
                     <m:oMath>
                       <m:r>
-                        <m:t>F</m:t>
+                        <a:rPr>
+                          <a:latin typeface="Cambria Math" panose="02040503050406030204" pitchFamily="18" charset="0"/>
+                        </a:rPr>
+                        <m:t>집단간 차이 </m:t>
                       </m:r>
                       <m:r>
-                        <m:rPr>
-                          <m:sty m:val="p"/>
-                        </m:rPr>
-                        <m:t>=</m:t>
-                      </m:r>
-                      <m:f>
-                        <m:fPr>
-                          <m:type m:val="bar"/>
-                        </m:fPr>
-                        <m:num>
-                          <m:sSubSup>
-                            <m:e>
-                              <m:r>
-                                <m:t>χ</m:t>
-                              </m:r>
-                            </m:e>
-                            <m:sub>
-                              <m:r>
-                                <m:t>1</m:t>
-                              </m:r>
-                            </m:sub>
-                            <m:sup>
-                              <m:r>
-                                <m:t>2</m:t>
-                              </m:r>
-                            </m:sup>
-                          </m:sSubSup>
-                          <m:r>
-                            <m:rPr>
-                              <m:sty m:val="p"/>
-                            </m:rPr>
-                            <m:t>/</m:t>
-                          </m:r>
-                          <m:r>
-                            <m:t>d</m:t>
-                          </m:r>
-                          <m:sSub>
-                            <m:e>
-                              <m:r>
-                                <m:t>f</m:t>
-                              </m:r>
-                            </m:e>
-                            <m:sub>
-                              <m:r>
-                                <m:t>1</m:t>
-                              </m:r>
-                            </m:sub>
-                          </m:sSub>
-                        </m:num>
-                        <m:den>
-                          <m:sSubSup>
-                            <m:e>
-                              <m:r>
-                                <m:t>χ</m:t>
-                              </m:r>
-                            </m:e>
-                            <m:sub>
-                              <m:r>
-                                <m:t>2</m:t>
-                              </m:r>
-                            </m:sub>
-                            <m:sup>
-                              <m:r>
-                                <m:t>2</m:t>
-                              </m:r>
-                            </m:sup>
-                          </m:sSubSup>
-                          <m:r>
-                            <m:rPr>
-                              <m:sty m:val="p"/>
-                            </m:rPr>
-                            <m:t>/</m:t>
-                          </m:r>
-                          <m:r>
-                            <m:t>d</m:t>
-                          </m:r>
-                          <m:sSub>
-                            <m:e>
-                              <m:r>
-                                <m:t>f</m:t>
-                              </m:r>
-                            </m:e>
-                            <m:sub>
-                              <m:r>
-                                <m:t>2</m:t>
-                              </m:r>
-                            </m:sub>
-                          </m:sSub>
-                        </m:den>
-                      </m:f>
-                    </m:oMath>
-                  </m:oMathPara>
-                </a14:m>
-              </a:p>
-              <a:p>
-                <a:pPr lvl="0" indent="0" marL="0">
-                  <a:buNone/>
-                </a:pPr>
-                <a:r>
-                  <a:rPr/>
-                  <a:t>즉,</a:t>
-                </a:r>
-              </a:p>
-              <a:p>
-                <a:pPr lvl="0" indent="0" marL="0">
-                  <a:buNone/>
-                </a:pPr>
-                <a14:m>
-                  <m:oMathPara xmlns:m="http://schemas.openxmlformats.org/officeDocument/2006/math">
-                    <m:oMathParaPr>
-                      <m:jc m:val="center"/>
-                    </m:oMathParaPr>
-                    <m:oMath>
-                      <m:r>
-                        <m:t>F</m:t>
+                        <a:rPr>
+                          <a:latin typeface="Cambria Math" panose="02040503050406030204" pitchFamily="18" charset="0"/>
+                        </a:rPr>
+                        <m:t>𝑣𝑠</m:t>
                       </m:r>
                       <m:r>
-                        <m:rPr>
-                          <m:sty m:val="p"/>
-                        </m:rPr>
-                        <m:t>∼</m:t>
-                      </m:r>
-                      <m:r>
-                        <m:t>F</m:t>
-                      </m:r>
-                      <m:r>
-                        <m:rPr>
-                          <m:sty m:val="p"/>
-                        </m:rPr>
-                        <m:t>(</m:t>
-                      </m:r>
-                      <m:r>
-                        <m:t>d</m:t>
-                      </m:r>
-                      <m:sSub>
-                        <m:e>
-                          <m:r>
-                            <m:t>f</m:t>
-                          </m:r>
-                        </m:e>
-                        <m:sub>
-                          <m:r>
-                            <m:t>1</m:t>
-                          </m:r>
-                        </m:sub>
-                      </m:sSub>
-                      <m:r>
-                        <m:rPr>
-                          <m:sty m:val="p"/>
-                        </m:rPr>
-                        <m:t>,</m:t>
-                      </m:r>
-                      <m:r>
-                        <m:t> </m:t>
-                      </m:r>
-                      <m:r>
-                        <m:t>d</m:t>
-                      </m:r>
-                      <m:sSub>
-                        <m:e>
-                          <m:r>
-                            <m:t>f</m:t>
-                          </m:r>
-                        </m:e>
-                        <m:sub>
-                          <m:r>
-                            <m:t>2</m:t>
-                          </m:r>
-                        </m:sub>
-                      </m:sSub>
-                      <m:r>
-                        <m:rPr>
-                          <m:sty m:val="p"/>
-                        </m:rPr>
-                        <m:t>)</m:t>
+                        <a:rPr>
+                          <a:latin typeface="Cambria Math" panose="02040503050406030204" pitchFamily="18" charset="0"/>
+                        </a:rPr>
+                        <m:t> 집단내 차이</m:t>
                       </m:r>
                     </m:oMath>
                   </m:oMathPara>
                 </a14:m>
-              </a:p>
-              <a:p>
-                <a:pPr lvl="0" indent="0" marL="0">
-                  <a:spcBef>
-                    <a:spcPts val="3000"/>
-                  </a:spcBef>
-                  <a:buNone/>
-                </a:pPr>
-                <a:r>
-                  <a:rPr b="1"/>
-                  <a:t>분산분석(ANOVA)</a:t>
-                </a:r>
-              </a:p>
-              <a:p>
-                <a:pPr lvl="0" indent="0" marL="0">
-                  <a:buNone/>
-                </a:pPr>
-                <a14:m>
-                  <m:oMathPara xmlns:m="http://schemas.openxmlformats.org/officeDocument/2006/math">
-                    <m:oMathParaPr>
-                      <m:jc m:val="center"/>
-                    </m:oMathParaPr>
-                    <m:oMath>
-                      <m:r>
-                        <m:t>F</m:t>
-                      </m:r>
-                      <m:r>
-                        <m:rPr>
-                          <m:sty m:val="p"/>
-                        </m:rPr>
-                        <m:t>=</m:t>
-                      </m:r>
-                      <m:f>
-                        <m:fPr>
-                          <m:type m:val="bar"/>
-                        </m:fPr>
-                        <m:num>
-                          <m:r>
-                            <m:t>집</m:t>
-                          </m:r>
-                          <m:r>
-                            <m:t>단</m:t>
-                          </m:r>
-                          <m:r>
-                            <m:t>간</m:t>
-                          </m:r>
-                          <m:r>
-                            <m:t>분</m:t>
-                          </m:r>
-                          <m:r>
-                            <m:t>산</m:t>
-                          </m:r>
-                        </m:num>
-                        <m:den>
-                          <m:r>
-                            <m:t>집</m:t>
-                          </m:r>
-                          <m:r>
-                            <m:t>단</m:t>
-                          </m:r>
-                          <m:r>
-                            <m:t>내</m:t>
-                          </m:r>
-                          <m:r>
-                            <m:t>분</m:t>
-                          </m:r>
-                          <m:r>
-                            <m:t>산</m:t>
-                          </m:r>
-                        </m:den>
-                      </m:f>
-                    </m:oMath>
-                  </m:oMathPara>
-                </a14:m>
+                <a:endParaRPr dirty="0"/>
               </a:p>
             </p:txBody>
           </p:sp>
         </mc:Choice>
+        <mc:Fallback>
+          <p:sp>
+            <p:nvSpPr>
+              <p:cNvPr id="3" name="Content Placeholder 2"/>
+              <p:cNvSpPr>
+                <a:spLocks noGrp="1" noRot="1" noChangeAspect="1" noMove="1" noResize="1" noEditPoints="1" noAdjustHandles="1" noChangeArrowheads="1" noChangeShapeType="1" noTextEdit="1"/>
+              </p:cNvSpPr>
+              <p:nvPr>
+                <p:ph idx="1"/>
+              </p:nvPr>
+            </p:nvSpPr>
+            <p:spPr>
+              <a:blipFill>
+                <a:blip r:embed="rId2"/>
+                <a:stretch>
+                  <a:fillRect l="-485" t="-403"/>
+                </a:stretch>
+              </a:blipFill>
+            </p:spPr>
+            <p:txBody>
+              <a:bodyPr/>
+              <a:lstStyle/>
+              <a:p>
+                <a:r>
+                  <a:rPr lang="en-US">
+                    <a:noFill/>
+                  </a:rPr>
+                  <a:t> </a:t>
+                </a:r>
+              </a:p>
+            </p:txBody>
+          </p:sp>
+        </mc:Fallback>
       </mc:AlternateContent>
+      <p:pic>
+        <p:nvPicPr>
+          <p:cNvPr id="4" name="Picture 3">
+            <a:extLst>
+              <a:ext uri="{FF2B5EF4-FFF2-40B4-BE49-F238E27FC236}">
+                <a16:creationId xmlns:a16="http://schemas.microsoft.com/office/drawing/2014/main" id="{078910A2-D55E-39ED-BCFB-DEF9DE5F70BC}"/>
+              </a:ext>
+            </a:extLst>
+          </p:cNvPr>
+          <p:cNvPicPr>
+            <a:picLocks noChangeAspect="1"/>
+          </p:cNvPicPr>
+          <p:nvPr/>
+        </p:nvPicPr>
+        <p:blipFill>
+          <a:blip r:embed="rId3"/>
+          <a:stretch>
+            <a:fillRect/>
+          </a:stretch>
+        </p:blipFill>
+        <p:spPr>
+          <a:xfrm>
+            <a:off x="1625478" y="3075214"/>
+            <a:ext cx="2755900" cy="1676400"/>
+          </a:xfrm>
+          <a:prstGeom prst="rect">
+            <a:avLst/>
+          </a:prstGeom>
+        </p:spPr>
+      </p:pic>
+      <p:pic>
+        <p:nvPicPr>
+          <p:cNvPr id="5" name="Picture 4">
+            <a:extLst>
+              <a:ext uri="{FF2B5EF4-FFF2-40B4-BE49-F238E27FC236}">
+                <a16:creationId xmlns:a16="http://schemas.microsoft.com/office/drawing/2014/main" id="{C761E75A-6593-2B63-27C7-4E1D85F72D1B}"/>
+              </a:ext>
+            </a:extLst>
+          </p:cNvPr>
+          <p:cNvPicPr>
+            <a:picLocks noChangeAspect="1"/>
+          </p:cNvPicPr>
+          <p:nvPr/>
+        </p:nvPicPr>
+        <p:blipFill>
+          <a:blip r:embed="rId4"/>
+          <a:stretch>
+            <a:fillRect/>
+          </a:stretch>
+        </p:blipFill>
+        <p:spPr>
+          <a:xfrm>
+            <a:off x="5049172" y="3075982"/>
+            <a:ext cx="2219779" cy="1675631"/>
+          </a:xfrm>
+          <a:prstGeom prst="rect">
+            <a:avLst/>
+          </a:prstGeom>
+        </p:spPr>
+      </p:pic>
     </p:spTree>
   </p:cSld>
+  <p:clrMapOvr>
+    <a:masterClrMapping/>
+  </p:clrMapOvr>
 </p:sld>
 </file>
 
@@ -3981,95 +4409,651 @@
           <a:bodyPr/>
           <a:lstStyle/>
           <a:p>
-            <a:pPr lvl="0" indent="0" marL="0">
+            <a:pPr marL="0" lvl="0" indent="0">
               <a:buNone/>
             </a:pPr>
             <a:r>
-              <a:rPr/>
-              <a:t>종합</a:t>
+              <a:t>F분포</a:t>
             </a:r>
           </a:p>
         </p:txBody>
       </p:sp>
-      <p:sp>
-        <p:nvSpPr>
-          <p:cNvPr id="3" name="Content Placeholder 2"/>
-          <p:cNvSpPr>
-            <a:spLocks noGrp="1"/>
-          </p:cNvSpPr>
-          <p:nvPr>
-            <p:ph idx="1"/>
-          </p:nvPr>
-        </p:nvSpPr>
-        <p:spPr/>
-        <p:txBody>
-          <a:bodyPr/>
-          <a:lstStyle/>
-          <a:p>
-            <a:pPr lvl="0"/>
-            <a:r>
-              <a:rPr/>
-              <a:t>베르누이 -&gt; 이항 -&gt; 정규 -&gt; 카이제곱 -&gt; t분포 -&gt; F</a:t>
-            </a:r>
-          </a:p>
-          <a:p>
-            <a:pPr lvl="0"/>
-            <a:r>
-              <a:rPr b="1"/>
-              <a:t>단순한 암기 순서</a:t>
-            </a:r>
-            <a:r>
-              <a:rPr/>
-              <a:t>가 아니라 </a:t>
-            </a:r>
-            <a:r>
-              <a:rPr b="1"/>
-              <a:t>통계학이 해결하려고 했던 문제의 역사</a:t>
-            </a:r>
-            <a:r>
-              <a:rPr/>
-              <a:t>이다</a:t>
-            </a:r>
-          </a:p>
-          <a:p>
-            <a:pPr lvl="0"/>
-            <a:r>
-              <a:rPr/>
-              <a:t>베르누이: 성공/실패</a:t>
-            </a:r>
-          </a:p>
-          <a:p>
-            <a:pPr lvl="0"/>
-            <a:r>
-              <a:rPr/>
-              <a:t>이항: 성공횟수</a:t>
-            </a:r>
-          </a:p>
-          <a:p>
-            <a:pPr lvl="0"/>
-            <a:r>
-              <a:rPr/>
-              <a:t>정규: 평균</a:t>
-            </a:r>
-          </a:p>
-          <a:p>
-            <a:pPr lvl="0"/>
-            <a:r>
-              <a:rPr/>
-              <a:t>카이제곱: 제곱합</a:t>
-            </a:r>
-          </a:p>
-          <a:p>
-            <a:pPr lvl="0"/>
-            <a:r>
-              <a:rPr/>
-              <a:t>F: 분산비</a:t>
-            </a:r>
-          </a:p>
-        </p:txBody>
-      </p:sp>
+      <mc:AlternateContent xmlns:mc="http://schemas.openxmlformats.org/markup-compatibility/2006">
+        <mc:Choice xmlns:a14="http://schemas.microsoft.com/office/drawing/2010/main" Requires="a14">
+          <p:sp>
+            <p:nvSpPr>
+              <p:cNvPr id="3" name="Content Placeholder 2"/>
+              <p:cNvSpPr>
+                <a:spLocks noGrp="1"/>
+              </p:cNvSpPr>
+              <p:nvPr>
+                <p:ph idx="1"/>
+              </p:nvPr>
+            </p:nvSpPr>
+            <p:spPr/>
+            <p:txBody>
+              <a:bodyPr>
+                <a:normAutofit fontScale="92500" lnSpcReduction="10000"/>
+              </a:bodyPr>
+              <a:lstStyle/>
+              <a:p>
+                <a:pPr lvl="0"/>
+                <a:r>
+                  <a:rPr dirty="0"/>
+                  <a:t>Ronald A. Fisher (1890~1962) </a:t>
+                </a:r>
+                <a:r>
+                  <a:rPr dirty="0" err="1"/>
+                  <a:t>가</a:t>
+                </a:r>
+                <a:r>
+                  <a:rPr dirty="0"/>
+                  <a:t> 1920년대 </a:t>
+                </a:r>
+                <a:r>
+                  <a:rPr dirty="0" err="1"/>
+                  <a:t>분산비</a:t>
+                </a:r>
+                <a:r>
+                  <a:rPr dirty="0"/>
+                  <a:t>(Variance Ratio) </a:t>
+                </a:r>
+                <a:r>
+                  <a:rPr dirty="0" err="1"/>
+                  <a:t>개념</a:t>
+                </a:r>
+                <a:r>
+                  <a:rPr dirty="0"/>
+                  <a:t> </a:t>
+                </a:r>
+                <a:r>
+                  <a:rPr dirty="0" err="1"/>
+                  <a:t>제안</a:t>
+                </a:r>
+                <a:endParaRPr dirty="0"/>
+              </a:p>
+              <a:p>
+                <a:pPr lvl="0"/>
+                <a:r>
+                  <a:rPr dirty="0" err="1"/>
+                  <a:t>분산들의</a:t>
+                </a:r>
+                <a:r>
+                  <a:rPr dirty="0"/>
+                  <a:t> </a:t>
+                </a:r>
+                <a:r>
+                  <a:rPr dirty="0" err="1"/>
+                  <a:t>비율을</a:t>
+                </a:r>
+                <a:r>
+                  <a:rPr dirty="0"/>
+                  <a:t> </a:t>
+                </a:r>
+                <a:r>
+                  <a:rPr dirty="0" err="1"/>
+                  <a:t>비교하기</a:t>
+                </a:r>
+                <a:r>
+                  <a:rPr dirty="0"/>
+                  <a:t> </a:t>
+                </a:r>
+                <a:r>
+                  <a:rPr dirty="0" err="1"/>
+                  <a:t>위해</a:t>
+                </a:r>
+                <a:r>
+                  <a:rPr lang="en-US" dirty="0"/>
+                  <a:t> </a:t>
+                </a:r>
+                <a:r>
+                  <a:rPr dirty="0"/>
+                  <a:t> </a:t>
+                </a:r>
+                <a14:m>
+                  <m:oMath xmlns:m="http://schemas.openxmlformats.org/officeDocument/2006/math">
+                    <m:f>
+                      <m:fPr>
+                        <m:ctrlPr>
+                          <a:rPr>
+                            <a:latin typeface="Cambria Math" panose="02040503050406030204" pitchFamily="18" charset="0"/>
+                          </a:rPr>
+                        </m:ctrlPr>
+                      </m:fPr>
+                      <m:num>
+                        <m:r>
+                          <a:rPr>
+                            <a:latin typeface="Cambria Math" panose="02040503050406030204" pitchFamily="18" charset="0"/>
+                          </a:rPr>
+                          <m:t>분산1</m:t>
+                        </m:r>
+                      </m:num>
+                      <m:den>
+                        <m:r>
+                          <a:rPr>
+                            <a:latin typeface="Cambria Math" panose="02040503050406030204" pitchFamily="18" charset="0"/>
+                          </a:rPr>
+                          <m:t>분산2</m:t>
+                        </m:r>
+                      </m:den>
+                    </m:f>
+                  </m:oMath>
+                </a14:m>
+                <a:r>
+                  <a:rPr dirty="0"/>
+                  <a:t> </a:t>
+                </a:r>
+                <a:r>
+                  <a:rPr lang="en-US" dirty="0"/>
+                  <a:t> </a:t>
+                </a:r>
+                <a:r>
+                  <a:rPr dirty="0"/>
+                  <a:t>를 </a:t>
+                </a:r>
+                <a:r>
+                  <a:rPr dirty="0" err="1"/>
+                  <a:t>연구함</a:t>
+                </a:r>
+                <a:endParaRPr dirty="0"/>
+              </a:p>
+              <a:p>
+                <a:pPr marL="0" lvl="0" indent="0">
+                  <a:spcBef>
+                    <a:spcPts val="3000"/>
+                  </a:spcBef>
+                  <a:buNone/>
+                </a:pPr>
+                <a:r>
+                  <a:rPr b="1" dirty="0" err="1"/>
+                  <a:t>F분포의</a:t>
+                </a:r>
+                <a:r>
+                  <a:rPr b="1" dirty="0"/>
+                  <a:t> </a:t>
+                </a:r>
+                <a:r>
+                  <a:rPr b="1" dirty="0" err="1"/>
+                  <a:t>개념</a:t>
+                </a:r>
+                <a:endParaRPr b="1" dirty="0"/>
+              </a:p>
+              <a:p>
+                <a:pPr lvl="0"/>
+                <a:r>
+                  <a:rPr dirty="0" err="1"/>
+                  <a:t>두</a:t>
+                </a:r>
+                <a:r>
+                  <a:rPr dirty="0"/>
+                  <a:t> </a:t>
+                </a:r>
+                <a:r>
+                  <a:rPr dirty="0" err="1"/>
+                  <a:t>카이제곱</a:t>
+                </a:r>
+                <a:r>
+                  <a:rPr dirty="0"/>
+                  <a:t> </a:t>
+                </a:r>
+                <a:r>
+                  <a:rPr dirty="0" err="1"/>
+                  <a:t>분포의</a:t>
+                </a:r>
+                <a:r>
+                  <a:rPr dirty="0"/>
+                  <a:t> </a:t>
+                </a:r>
+                <a:r>
+                  <a:rPr dirty="0" err="1"/>
+                  <a:t>비율로</a:t>
+                </a:r>
+                <a:r>
+                  <a:rPr dirty="0"/>
+                  <a:t> </a:t>
+                </a:r>
+                <a:r>
+                  <a:rPr dirty="0" err="1"/>
+                  <a:t>만들어지는</a:t>
+                </a:r>
+                <a:r>
+                  <a:rPr dirty="0"/>
+                  <a:t> </a:t>
+                </a:r>
+                <a:r>
+                  <a:rPr dirty="0" err="1"/>
+                  <a:t>분포</a:t>
+                </a:r>
+                <a:endParaRPr dirty="0"/>
+              </a:p>
+              <a:p>
+                <a:pPr marL="0" lvl="0" indent="0">
+                  <a:buNone/>
+                </a:pPr>
+                <a14:m>
+                  <m:oMath xmlns:m="http://schemas.openxmlformats.org/officeDocument/2006/math">
+                    <m:r>
+                      <a:rPr>
+                        <a:latin typeface="Cambria Math" panose="02040503050406030204" pitchFamily="18" charset="0"/>
+                      </a:rPr>
+                      <m:t>𝐹</m:t>
+                    </m:r>
+                    <m:r>
+                      <a:rPr>
+                        <a:latin typeface="Cambria Math" panose="02040503050406030204" pitchFamily="18" charset="0"/>
+                      </a:rPr>
+                      <m:t>=</m:t>
+                    </m:r>
+                    <m:f>
+                      <m:fPr>
+                        <m:ctrlPr>
+                          <a:rPr i="1">
+                            <a:latin typeface="Cambria Math" panose="02040503050406030204" pitchFamily="18" charset="0"/>
+                          </a:rPr>
+                        </m:ctrlPr>
+                      </m:fPr>
+                      <m:num>
+                        <m:sSubSup>
+                          <m:sSubSupPr>
+                            <m:ctrlPr>
+                              <a:rPr>
+                                <a:latin typeface="Cambria Math" panose="02040503050406030204" pitchFamily="18" charset="0"/>
+                              </a:rPr>
+                            </m:ctrlPr>
+                          </m:sSubSupPr>
+                          <m:e>
+                            <m:r>
+                              <a:rPr>
+                                <a:latin typeface="Cambria Math" panose="02040503050406030204" pitchFamily="18" charset="0"/>
+                              </a:rPr>
+                              <m:t>𝜒</m:t>
+                            </m:r>
+                          </m:e>
+                          <m:sub>
+                            <m:r>
+                              <a:rPr>
+                                <a:latin typeface="Cambria Math" panose="02040503050406030204" pitchFamily="18" charset="0"/>
+                              </a:rPr>
+                              <m:t>1</m:t>
+                            </m:r>
+                          </m:sub>
+                          <m:sup>
+                            <m:r>
+                              <a:rPr>
+                                <a:latin typeface="Cambria Math" panose="02040503050406030204" pitchFamily="18" charset="0"/>
+                              </a:rPr>
+                              <m:t>2</m:t>
+                            </m:r>
+                          </m:sup>
+                        </m:sSubSup>
+                        <m:r>
+                          <a:rPr>
+                            <a:latin typeface="Cambria Math" panose="02040503050406030204" pitchFamily="18" charset="0"/>
+                          </a:rPr>
+                          <m:t>/</m:t>
+                        </m:r>
+                        <m:r>
+                          <a:rPr>
+                            <a:latin typeface="Cambria Math" panose="02040503050406030204" pitchFamily="18" charset="0"/>
+                          </a:rPr>
+                          <m:t>𝑑</m:t>
+                        </m:r>
+                        <m:sSub>
+                          <m:sSubPr>
+                            <m:ctrlPr>
+                              <a:rPr>
+                                <a:latin typeface="Cambria Math" panose="02040503050406030204" pitchFamily="18" charset="0"/>
+                              </a:rPr>
+                            </m:ctrlPr>
+                          </m:sSubPr>
+                          <m:e>
+                            <m:r>
+                              <a:rPr>
+                                <a:latin typeface="Cambria Math" panose="02040503050406030204" pitchFamily="18" charset="0"/>
+                              </a:rPr>
+                              <m:t>𝑓</m:t>
+                            </m:r>
+                          </m:e>
+                          <m:sub>
+                            <m:r>
+                              <a:rPr>
+                                <a:latin typeface="Cambria Math" panose="02040503050406030204" pitchFamily="18" charset="0"/>
+                              </a:rPr>
+                              <m:t>1</m:t>
+                            </m:r>
+                          </m:sub>
+                        </m:sSub>
+                      </m:num>
+                      <m:den>
+                        <m:sSubSup>
+                          <m:sSubSupPr>
+                            <m:ctrlPr>
+                              <a:rPr>
+                                <a:latin typeface="Cambria Math" panose="02040503050406030204" pitchFamily="18" charset="0"/>
+                              </a:rPr>
+                            </m:ctrlPr>
+                          </m:sSubSupPr>
+                          <m:e>
+                            <m:r>
+                              <a:rPr>
+                                <a:latin typeface="Cambria Math" panose="02040503050406030204" pitchFamily="18" charset="0"/>
+                              </a:rPr>
+                              <m:t>𝜒</m:t>
+                            </m:r>
+                          </m:e>
+                          <m:sub>
+                            <m:r>
+                              <a:rPr>
+                                <a:latin typeface="Cambria Math" panose="02040503050406030204" pitchFamily="18" charset="0"/>
+                              </a:rPr>
+                              <m:t>2</m:t>
+                            </m:r>
+                          </m:sub>
+                          <m:sup>
+                            <m:r>
+                              <a:rPr>
+                                <a:latin typeface="Cambria Math" panose="02040503050406030204" pitchFamily="18" charset="0"/>
+                              </a:rPr>
+                              <m:t>2</m:t>
+                            </m:r>
+                          </m:sup>
+                        </m:sSubSup>
+                        <m:r>
+                          <a:rPr>
+                            <a:latin typeface="Cambria Math" panose="02040503050406030204" pitchFamily="18" charset="0"/>
+                          </a:rPr>
+                          <m:t>/</m:t>
+                        </m:r>
+                        <m:r>
+                          <a:rPr>
+                            <a:latin typeface="Cambria Math" panose="02040503050406030204" pitchFamily="18" charset="0"/>
+                          </a:rPr>
+                          <m:t>𝑑</m:t>
+                        </m:r>
+                        <m:sSub>
+                          <m:sSubPr>
+                            <m:ctrlPr>
+                              <a:rPr>
+                                <a:latin typeface="Cambria Math" panose="02040503050406030204" pitchFamily="18" charset="0"/>
+                              </a:rPr>
+                            </m:ctrlPr>
+                          </m:sSubPr>
+                          <m:e>
+                            <m:r>
+                              <a:rPr>
+                                <a:latin typeface="Cambria Math" panose="02040503050406030204" pitchFamily="18" charset="0"/>
+                              </a:rPr>
+                              <m:t>𝑓</m:t>
+                            </m:r>
+                          </m:e>
+                          <m:sub>
+                            <m:r>
+                              <a:rPr>
+                                <a:latin typeface="Cambria Math" panose="02040503050406030204" pitchFamily="18" charset="0"/>
+                              </a:rPr>
+                              <m:t>2</m:t>
+                            </m:r>
+                          </m:sub>
+                        </m:sSub>
+                      </m:den>
+                    </m:f>
+                  </m:oMath>
+                </a14:m>
+                <a:r>
+                  <a:rPr dirty="0"/>
+                  <a:t> </a:t>
+                </a:r>
+                <a:r>
+                  <a:rPr dirty="0" err="1"/>
+                  <a:t>즉</a:t>
+                </a:r>
+                <a:r>
+                  <a:rPr dirty="0"/>
+                  <a:t>, </a:t>
+                </a:r>
+                <a14:m>
+                  <m:oMath xmlns:m="http://schemas.openxmlformats.org/officeDocument/2006/math">
+                    <m:r>
+                      <a:rPr>
+                        <a:latin typeface="Cambria Math" panose="02040503050406030204" pitchFamily="18" charset="0"/>
+                      </a:rPr>
+                      <m:t>𝐹</m:t>
+                    </m:r>
+                    <m:r>
+                      <a:rPr>
+                        <a:latin typeface="Cambria Math" panose="02040503050406030204" pitchFamily="18" charset="0"/>
+                      </a:rPr>
+                      <m:t>∼</m:t>
+                    </m:r>
+                    <m:r>
+                      <a:rPr>
+                        <a:latin typeface="Cambria Math" panose="02040503050406030204" pitchFamily="18" charset="0"/>
+                      </a:rPr>
+                      <m:t>𝐹</m:t>
+                    </m:r>
+                    <m:d>
+                      <m:dPr>
+                        <m:ctrlPr>
+                          <a:rPr>
+                            <a:latin typeface="Cambria Math" panose="02040503050406030204" pitchFamily="18" charset="0"/>
+                          </a:rPr>
+                        </m:ctrlPr>
+                      </m:dPr>
+                      <m:e>
+                        <m:r>
+                          <a:rPr>
+                            <a:latin typeface="Cambria Math" panose="02040503050406030204" pitchFamily="18" charset="0"/>
+                          </a:rPr>
+                          <m:t>𝑑</m:t>
+                        </m:r>
+                        <m:sSub>
+                          <m:sSubPr>
+                            <m:ctrlPr>
+                              <a:rPr>
+                                <a:latin typeface="Cambria Math" panose="02040503050406030204" pitchFamily="18" charset="0"/>
+                              </a:rPr>
+                            </m:ctrlPr>
+                          </m:sSubPr>
+                          <m:e>
+                            <m:r>
+                              <a:rPr>
+                                <a:latin typeface="Cambria Math" panose="02040503050406030204" pitchFamily="18" charset="0"/>
+                              </a:rPr>
+                              <m:t>𝑓</m:t>
+                            </m:r>
+                          </m:e>
+                          <m:sub>
+                            <m:r>
+                              <a:rPr>
+                                <a:latin typeface="Cambria Math" panose="02040503050406030204" pitchFamily="18" charset="0"/>
+                              </a:rPr>
+                              <m:t>1</m:t>
+                            </m:r>
+                          </m:sub>
+                        </m:sSub>
+                        <m:r>
+                          <a:rPr>
+                            <a:latin typeface="Cambria Math" panose="02040503050406030204" pitchFamily="18" charset="0"/>
+                          </a:rPr>
+                          <m:t>, </m:t>
+                        </m:r>
+                        <m:r>
+                          <a:rPr>
+                            <a:latin typeface="Cambria Math" panose="02040503050406030204" pitchFamily="18" charset="0"/>
+                          </a:rPr>
+                          <m:t>𝑑</m:t>
+                        </m:r>
+                        <m:sSub>
+                          <m:sSubPr>
+                            <m:ctrlPr>
+                              <a:rPr>
+                                <a:latin typeface="Cambria Math" panose="02040503050406030204" pitchFamily="18" charset="0"/>
+                              </a:rPr>
+                            </m:ctrlPr>
+                          </m:sSubPr>
+                          <m:e>
+                            <m:r>
+                              <a:rPr>
+                                <a:latin typeface="Cambria Math" panose="02040503050406030204" pitchFamily="18" charset="0"/>
+                              </a:rPr>
+                              <m:t>𝑓</m:t>
+                            </m:r>
+                          </m:e>
+                          <m:sub>
+                            <m:r>
+                              <a:rPr>
+                                <a:latin typeface="Cambria Math" panose="02040503050406030204" pitchFamily="18" charset="0"/>
+                              </a:rPr>
+                              <m:t>2</m:t>
+                            </m:r>
+                          </m:sub>
+                        </m:sSub>
+                      </m:e>
+                    </m:d>
+                  </m:oMath>
+                </a14:m>
+                <a:endParaRPr dirty="0"/>
+              </a:p>
+              <a:p>
+                <a:pPr marL="0" lvl="0" indent="0">
+                  <a:spcBef>
+                    <a:spcPts val="3000"/>
+                  </a:spcBef>
+                  <a:buNone/>
+                </a:pPr>
+                <a:r>
+                  <a:rPr b="1" dirty="0" err="1"/>
+                  <a:t>분산분석</a:t>
+                </a:r>
+                <a:r>
+                  <a:rPr b="1" dirty="0"/>
+                  <a:t>(ANOVA)</a:t>
+                </a:r>
+              </a:p>
+              <a:p>
+                <a:pPr marL="0" lvl="0" indent="0">
+                  <a:buNone/>
+                </a:pPr>
+                <a14:m>
+                  <m:oMathPara xmlns:m="http://schemas.openxmlformats.org/officeDocument/2006/math">
+                    <m:oMathParaPr>
+                      <m:jc m:val="center"/>
+                    </m:oMathParaPr>
+                    <m:oMath>
+                      <m:r>
+                        <a:rPr>
+                          <a:latin typeface="Cambria Math" panose="02040503050406030204" pitchFamily="18" charset="0"/>
+                        </a:rPr>
+                        <m:t>𝐹</m:t>
+                      </m:r>
+                      <m:r>
+                        <a:rPr>
+                          <a:latin typeface="Cambria Math" panose="02040503050406030204" pitchFamily="18" charset="0"/>
+                        </a:rPr>
+                        <m:t>=</m:t>
+                      </m:r>
+                      <m:f>
+                        <m:fPr>
+                          <m:ctrlPr>
+                            <a:rPr>
+                              <a:latin typeface="Cambria Math" panose="02040503050406030204" pitchFamily="18" charset="0"/>
+                            </a:rPr>
+                          </m:ctrlPr>
+                        </m:fPr>
+                        <m:num>
+                          <m:r>
+                            <a:rPr>
+                              <a:latin typeface="Cambria Math" panose="02040503050406030204" pitchFamily="18" charset="0"/>
+                            </a:rPr>
+                            <m:t>집단간분산</m:t>
+                          </m:r>
+                        </m:num>
+                        <m:den>
+                          <m:r>
+                            <a:rPr>
+                              <a:latin typeface="Cambria Math" panose="02040503050406030204" pitchFamily="18" charset="0"/>
+                            </a:rPr>
+                            <m:t>집단내분산</m:t>
+                          </m:r>
+                        </m:den>
+                      </m:f>
+                    </m:oMath>
+                  </m:oMathPara>
+                </a14:m>
+                <a:endParaRPr b="1" dirty="0"/>
+              </a:p>
+            </p:txBody>
+          </p:sp>
+        </mc:Choice>
+        <mc:Fallback>
+          <p:sp>
+            <p:nvSpPr>
+              <p:cNvPr id="3" name="Content Placeholder 2"/>
+              <p:cNvSpPr>
+                <a:spLocks noGrp="1" noRot="1" noChangeAspect="1" noMove="1" noResize="1" noEditPoints="1" noAdjustHandles="1" noChangeArrowheads="1" noChangeShapeType="1" noTextEdit="1"/>
+              </p:cNvSpPr>
+              <p:nvPr>
+                <p:ph idx="1"/>
+              </p:nvPr>
+            </p:nvSpPr>
+            <p:spPr>
+              <a:blipFill>
+                <a:blip r:embed="rId2"/>
+                <a:stretch>
+                  <a:fillRect l="-324" t="-1210" b="-1210"/>
+                </a:stretch>
+              </a:blipFill>
+            </p:spPr>
+            <p:txBody>
+              <a:bodyPr/>
+              <a:lstStyle/>
+              <a:p>
+                <a:r>
+                  <a:rPr lang="en-US">
+                    <a:noFill/>
+                  </a:rPr>
+                  <a:t> </a:t>
+                </a:r>
+              </a:p>
+            </p:txBody>
+          </p:sp>
+        </mc:Fallback>
+      </mc:AlternateContent>
+      <p:pic>
+        <p:nvPicPr>
+          <p:cNvPr id="4" name="Picture 3">
+            <a:extLst>
+              <a:ext uri="{FF2B5EF4-FFF2-40B4-BE49-F238E27FC236}">
+                <a16:creationId xmlns:a16="http://schemas.microsoft.com/office/drawing/2014/main" id="{5D0FDC6B-433F-B488-3941-01CCE162AB28}"/>
+              </a:ext>
+            </a:extLst>
+          </p:cNvPr>
+          <p:cNvPicPr>
+            <a:picLocks noChangeAspect="1"/>
+          </p:cNvPicPr>
+          <p:nvPr/>
+        </p:nvPicPr>
+        <p:blipFill>
+          <a:blip r:embed="rId3"/>
+          <a:stretch>
+            <a:fillRect/>
+          </a:stretch>
+        </p:blipFill>
+        <p:spPr>
+          <a:xfrm>
+            <a:off x="5788886" y="2187480"/>
+            <a:ext cx="2960129" cy="2783560"/>
+          </a:xfrm>
+          <a:prstGeom prst="rect">
+            <a:avLst/>
+          </a:prstGeom>
+        </p:spPr>
+      </p:pic>
     </p:spTree>
   </p:cSld>
+  <p:clrMapOvr>
+    <a:masterClrMapping/>
+  </p:clrMapOvr>
 </p:sld>
 </file>
 
@@ -4110,12 +5094,11 @@
           <a:bodyPr/>
           <a:lstStyle/>
           <a:p>
-            <a:pPr lvl="0" indent="0" marL="0">
+            <a:pPr marL="0" lvl="0" indent="0">
               <a:buNone/>
             </a:pPr>
             <a:r>
-              <a:rPr/>
-              <a:t>참고자료</a:t>
+              <a:t>종합</a:t>
             </a:r>
           </a:p>
         </p:txBody>
@@ -4135,198 +5118,526 @@
           <a:bodyPr/>
           <a:lstStyle/>
           <a:p>
-            <a:pPr lvl="0" indent="0" marL="0">
-              <a:buNone/>
-            </a:pPr>
-            <a:r>
-              <a:rPr/>
-              <a:t>확률분포의 발전</a:t>
-            </a:r>
-          </a:p>
-          <a:p>
-            <a:pPr lvl="0" indent="0" marL="0">
-              <a:buNone/>
-            </a:pPr>
-            <a:r>
-              <a:rPr/>
-              <a:t>베르누이</a:t>
-            </a:r>
-          </a:p>
-          <a:p>
-            <a:pPr lvl="0" indent="0" marL="0">
-              <a:buNone/>
-            </a:pPr>
-            <a:r>
-              <a:rPr/>
-              <a:t>   ↓</a:t>
-            </a:r>
-          </a:p>
-          <a:p>
-            <a:pPr lvl="0" indent="0" marL="0">
-              <a:buNone/>
-            </a:pPr>
-            <a:r>
-              <a:rPr/>
-              <a:t>이항</a:t>
-            </a:r>
-          </a:p>
-          <a:p>
-            <a:pPr lvl="0" indent="0" marL="0">
-              <a:buNone/>
-            </a:pPr>
-            <a:r>
-              <a:rPr/>
-              <a:t>   ↓</a:t>
-            </a:r>
-          </a:p>
-          <a:p>
-            <a:pPr lvl="0" indent="0" marL="0">
-              <a:buNone/>
-            </a:pPr>
-            <a:r>
-              <a:rPr/>
-              <a:t>정규</a:t>
-            </a:r>
-          </a:p>
-          <a:p>
-            <a:pPr lvl="0" indent="0" marL="0">
-              <a:buNone/>
-            </a:pPr>
-            <a:r>
-              <a:rPr/>
-              <a:t>   ├──→ 카이제곱</a:t>
-            </a:r>
-          </a:p>
-          <a:p>
-            <a:pPr lvl="0" indent="0" marL="0">
-              <a:buNone/>
-            </a:pPr>
-            <a:r>
-              <a:rPr/>
-              <a:t>   │          ↓</a:t>
-            </a:r>
-          </a:p>
-          <a:p>
-            <a:pPr lvl="0" indent="0" marL="0">
-              <a:buNone/>
-            </a:pPr>
-            <a:r>
-              <a:rPr/>
-              <a:t>   │         F</a:t>
-            </a:r>
-          </a:p>
-          <a:p>
-            <a:pPr lvl="0" indent="0" marL="0">
-              <a:buNone/>
-            </a:pPr>
-            <a:r>
-              <a:rPr/>
-              <a:t>   │</a:t>
-            </a:r>
-          </a:p>
-          <a:p>
-            <a:pPr lvl="0" indent="0" marL="0">
-              <a:buNone/>
-            </a:pPr>
-            <a:r>
-              <a:rPr/>
-              <a:t>   └──→ t</a:t>
-            </a:r>
-          </a:p>
-          <a:p>
-            <a:pPr lvl="0" indent="0" marL="0">
-              <a:buNone/>
-            </a:pPr>
-            <a:r>
-              <a:rPr/>
-              <a:t>통계분석의 발전</a:t>
-            </a:r>
-          </a:p>
-          <a:p>
-            <a:pPr lvl="0" indent="0" marL="0">
-              <a:buNone/>
-            </a:pPr>
-            <a:r>
-              <a:rPr/>
-              <a:t>회귀분석</a:t>
-            </a:r>
-          </a:p>
-          <a:p>
-            <a:pPr lvl="0" indent="0" marL="0">
-              <a:buNone/>
-            </a:pPr>
-            <a:r>
-              <a:rPr/>
-              <a:t>   ├──→ t-test</a:t>
-            </a:r>
-          </a:p>
-          <a:p>
-            <a:pPr lvl="0" indent="0" marL="0">
-              <a:buNone/>
-            </a:pPr>
-            <a:r>
-              <a:rPr/>
-              <a:t>   └──→ ANOVA</a:t>
-            </a:r>
-          </a:p>
-          <a:p>
-            <a:pPr lvl="0" indent="0" marL="0">
-              <a:buNone/>
-            </a:pPr>
-            <a:r>
-              <a:rPr/>
-              <a:t>현대 통계학</a:t>
-            </a:r>
-          </a:p>
-          <a:p>
-            <a:pPr lvl="0" indent="0" marL="0">
-              <a:buNone/>
-            </a:pPr>
-            <a:r>
-              <a:rPr/>
-              <a:t>            일반선형모형(GLM)</a:t>
-            </a:r>
-          </a:p>
-          <a:p>
-            <a:pPr lvl="0" indent="0" marL="0">
-              <a:buNone/>
-            </a:pPr>
-            <a:r>
-              <a:rPr/>
-              <a:t>                    │</a:t>
-            </a:r>
-          </a:p>
-          <a:p>
-            <a:pPr lvl="0" indent="0" marL="0">
-              <a:buNone/>
-            </a:pPr>
-            <a:r>
-              <a:rPr/>
-              <a:t>       ┌────────┬────────┐</a:t>
-            </a:r>
-          </a:p>
-          <a:p>
-            <a:pPr lvl="0" indent="0" marL="0">
-              <a:buNone/>
-            </a:pPr>
-            <a:r>
-              <a:rPr/>
-              <a:t>       ▼        ▼        ▼</a:t>
-            </a:r>
-          </a:p>
-          <a:p>
-            <a:pPr lvl="0" indent="0" marL="0">
-              <a:buNone/>
-            </a:pPr>
-            <a:r>
-              <a:rPr/>
-              <a:t>    t-test   ANOVA   회귀분석</a:t>
+            <a:pPr lvl="0"/>
+            <a:r>
+              <a:t>베르누이 -&gt; 이항 -&gt; 정규 -&gt; 카이제곱 -&gt; t분포 -&gt; F</a:t>
+            </a:r>
+          </a:p>
+          <a:p>
+            <a:pPr lvl="0"/>
+            <a:r>
+              <a:rPr b="1"/>
+              <a:t>단순한 암기 순서</a:t>
+            </a:r>
+            <a:r>
+              <a:t>가 아니라 </a:t>
+            </a:r>
+            <a:r>
+              <a:rPr b="1"/>
+              <a:t>통계학이 해결하려고 했던 문제의 역사</a:t>
+            </a:r>
+            <a:r>
+              <a:t>이다 </a:t>
+            </a:r>
+          </a:p>
+          <a:p>
+            <a:pPr lvl="0"/>
+            <a:r>
+              <a:t>베르누이: 성공/실패</a:t>
+            </a:r>
+          </a:p>
+          <a:p>
+            <a:pPr lvl="0"/>
+            <a:r>
+              <a:t>이항: 성공횟수</a:t>
+            </a:r>
+          </a:p>
+          <a:p>
+            <a:pPr lvl="0"/>
+            <a:r>
+              <a:t>정규: 평균</a:t>
+            </a:r>
+          </a:p>
+          <a:p>
+            <a:pPr lvl="0"/>
+            <a:r>
+              <a:t>카이제곱: 제곱합</a:t>
+            </a:r>
+          </a:p>
+          <a:p>
+            <a:pPr lvl="0"/>
+            <a:r>
+              <a:t>F: 분산비</a:t>
             </a:r>
           </a:p>
         </p:txBody>
       </p:sp>
     </p:spTree>
   </p:cSld>
+  <p:clrMapOvr>
+    <a:masterClrMapping/>
+  </p:clrMapOvr>
+</p:sld>
+</file>
+
+<file path=ppt/slides/slide14.xml><?xml version="1.0" encoding="utf-8"?>
+<p:sld xmlns:a="http://schemas.openxmlformats.org/drawingml/2006/main" xmlns:r="http://schemas.openxmlformats.org/officeDocument/2006/relationships" xmlns:p="http://schemas.openxmlformats.org/presentationml/2006/main">
+  <p:cSld>
+    <p:spTree>
+      <p:nvGrpSpPr>
+        <p:cNvPr id="1" name=""/>
+        <p:cNvGrpSpPr/>
+        <p:nvPr/>
+      </p:nvGrpSpPr>
+      <p:grpSpPr>
+        <a:xfrm>
+          <a:off x="0" y="0"/>
+          <a:ext cx="0" cy="0"/>
+          <a:chOff x="0" y="0"/>
+          <a:chExt cx="0" cy="0"/>
+        </a:xfrm>
+      </p:grpSpPr>
+      <p:sp>
+        <p:nvSpPr>
+          <p:cNvPr id="3" name="Content Placeholder 2"/>
+          <p:cNvSpPr>
+            <a:spLocks noGrp="1"/>
+          </p:cNvSpPr>
+          <p:nvPr>
+            <p:ph idx="1"/>
+          </p:nvPr>
+        </p:nvSpPr>
+        <p:spPr>
+          <a:xfrm>
+            <a:off x="724670" y="1533682"/>
+            <a:ext cx="7847518" cy="3143439"/>
+          </a:xfrm>
+        </p:spPr>
+        <p:txBody>
+          <a:bodyPr>
+            <a:normAutofit/>
+          </a:bodyPr>
+          <a:lstStyle/>
+          <a:p>
+            <a:r>
+              <a:rPr dirty="0" err="1"/>
+              <a:t>확률분포의</a:t>
+            </a:r>
+            <a:r>
+              <a:rPr dirty="0"/>
+              <a:t> </a:t>
+            </a:r>
+            <a:r>
+              <a:rPr dirty="0" err="1"/>
+              <a:t>발전</a:t>
+            </a:r>
+            <a:endParaRPr lang="en-US" dirty="0"/>
+          </a:p>
+          <a:p>
+            <a:pPr marL="0" lvl="0" indent="0">
+              <a:buNone/>
+            </a:pPr>
+            <a:endParaRPr dirty="0"/>
+          </a:p>
+          <a:p>
+            <a:pPr marL="0" lvl="0" indent="0">
+              <a:buNone/>
+            </a:pPr>
+            <a:r>
+              <a:rPr dirty="0" err="1"/>
+              <a:t>베르누이</a:t>
+            </a:r>
+            <a:r>
+              <a:rPr dirty="0"/>
+              <a:t>    </a:t>
+            </a:r>
+            <a:endParaRPr lang="en-US" dirty="0"/>
+          </a:p>
+          <a:p>
+            <a:pPr marL="0" lvl="0" indent="0">
+              <a:buNone/>
+            </a:pPr>
+            <a:r>
+              <a:rPr lang="en-US" dirty="0"/>
+              <a:t>     </a:t>
+            </a:r>
+            <a:r>
+              <a:rPr dirty="0"/>
+              <a:t>↓ </a:t>
+            </a:r>
+            <a:endParaRPr lang="en-US" dirty="0"/>
+          </a:p>
+          <a:p>
+            <a:pPr marL="0" lvl="0" indent="0">
+              <a:buNone/>
+            </a:pPr>
+            <a:r>
+              <a:rPr lang="en-US" dirty="0"/>
+              <a:t>   </a:t>
+            </a:r>
+            <a:r>
+              <a:rPr dirty="0" err="1"/>
+              <a:t>이항</a:t>
+            </a:r>
+            <a:r>
+              <a:rPr dirty="0"/>
+              <a:t>    </a:t>
+            </a:r>
+            <a:endParaRPr lang="en-US" dirty="0"/>
+          </a:p>
+          <a:p>
+            <a:pPr marL="0" lvl="0" indent="0">
+              <a:buNone/>
+            </a:pPr>
+            <a:r>
+              <a:rPr lang="en-US" dirty="0"/>
+              <a:t>     </a:t>
+            </a:r>
+            <a:r>
+              <a:rPr dirty="0"/>
+              <a:t>↓ </a:t>
+            </a:r>
+            <a:r>
+              <a:rPr lang="en-US" dirty="0"/>
+              <a:t> </a:t>
+            </a:r>
+          </a:p>
+          <a:p>
+            <a:pPr marL="0" lvl="0" indent="0">
+              <a:buNone/>
+            </a:pPr>
+            <a:r>
+              <a:rPr lang="en-US" dirty="0"/>
+              <a:t>    </a:t>
+            </a:r>
+            <a:r>
+              <a:rPr dirty="0" err="1"/>
+              <a:t>정규</a:t>
+            </a:r>
+            <a:r>
+              <a:rPr dirty="0"/>
+              <a:t>    ├──→ </a:t>
+            </a:r>
+            <a:r>
+              <a:rPr dirty="0" err="1"/>
+              <a:t>카이제곱</a:t>
+            </a:r>
+            <a:r>
+              <a:rPr dirty="0"/>
+              <a:t> </a:t>
+            </a:r>
+            <a:endParaRPr lang="en-US" dirty="0"/>
+          </a:p>
+          <a:p>
+            <a:pPr marL="0" lvl="0" indent="0">
+              <a:buNone/>
+            </a:pPr>
+            <a:r>
+              <a:rPr lang="en-US" dirty="0"/>
+              <a:t>     </a:t>
+            </a:r>
+            <a:r>
+              <a:rPr dirty="0"/>
+              <a:t>│       ↓</a:t>
+            </a:r>
+            <a:endParaRPr lang="en-US" dirty="0"/>
+          </a:p>
+          <a:p>
+            <a:pPr marL="0" lvl="0" indent="0">
+              <a:buNone/>
+            </a:pPr>
+            <a:r>
+              <a:rPr lang="en-US" dirty="0"/>
+              <a:t> </a:t>
+            </a:r>
+            <a:r>
+              <a:rPr dirty="0"/>
+              <a:t>    │         F</a:t>
+            </a:r>
+            <a:endParaRPr lang="en-US" dirty="0"/>
+          </a:p>
+          <a:p>
+            <a:pPr marL="0" lvl="0" indent="0">
+              <a:buNone/>
+            </a:pPr>
+            <a:r>
+              <a:rPr lang="en-US" dirty="0"/>
+              <a:t> </a:t>
+            </a:r>
+            <a:r>
+              <a:rPr dirty="0"/>
+              <a:t>    └──→ t</a:t>
+            </a:r>
+          </a:p>
+        </p:txBody>
+      </p:sp>
+      <p:sp>
+        <p:nvSpPr>
+          <p:cNvPr id="5" name="TextBox 4">
+            <a:extLst>
+              <a:ext uri="{FF2B5EF4-FFF2-40B4-BE49-F238E27FC236}">
+                <a16:creationId xmlns:a16="http://schemas.microsoft.com/office/drawing/2014/main" id="{0B3FC6D1-23AF-C9AF-20FE-AB079FEA387E}"/>
+              </a:ext>
+            </a:extLst>
+          </p:cNvPr>
+          <p:cNvSpPr txBox="1"/>
+          <p:nvPr/>
+        </p:nvSpPr>
+        <p:spPr>
+          <a:xfrm>
+            <a:off x="4572000" y="1566342"/>
+            <a:ext cx="4572000" cy="1323439"/>
+          </a:xfrm>
+          <a:prstGeom prst="rect">
+            <a:avLst/>
+          </a:prstGeom>
+          <a:noFill/>
+        </p:spPr>
+        <p:txBody>
+          <a:bodyPr wrap="square">
+            <a:spAutoFit/>
+          </a:bodyPr>
+          <a:lstStyle/>
+          <a:p>
+            <a:pPr marL="285750" lvl="0" indent="-285750">
+              <a:buFont typeface="Arial" panose="020B0604020202020204" pitchFamily="34" charset="0"/>
+              <a:buChar char="•"/>
+            </a:pPr>
+            <a:r>
+              <a:rPr lang="ko-KR" altLang="en-US" sz="1600" spc="-150" dirty="0">
+                <a:latin typeface="ChosunilboNM" panose="02030304000000000000" pitchFamily="18" charset="-128"/>
+                <a:ea typeface="ChosunilboNM" panose="02030304000000000000" pitchFamily="18" charset="-128"/>
+              </a:rPr>
+              <a:t>통계분석의 발전</a:t>
+            </a:r>
+          </a:p>
+          <a:p>
+            <a:pPr marL="0" lvl="0" indent="0">
+              <a:buNone/>
+            </a:pPr>
+            <a:endParaRPr lang="en-US" altLang="ko-KR" sz="1600" spc="-150" dirty="0">
+              <a:latin typeface="ChosunilboNM" panose="02030304000000000000" pitchFamily="18" charset="-128"/>
+              <a:ea typeface="ChosunilboNM" panose="02030304000000000000" pitchFamily="18" charset="-128"/>
+            </a:endParaRPr>
+          </a:p>
+          <a:p>
+            <a:pPr marL="0" lvl="0" indent="0">
+              <a:buNone/>
+            </a:pPr>
+            <a:r>
+              <a:rPr lang="ko-KR" altLang="en-US" sz="1600" spc="-150" dirty="0">
+                <a:latin typeface="ChosunilboNM" panose="02030304000000000000" pitchFamily="18" charset="-128"/>
+                <a:ea typeface="ChosunilboNM" panose="02030304000000000000" pitchFamily="18" charset="-128"/>
+              </a:rPr>
+              <a:t>회귀분석</a:t>
+            </a:r>
+          </a:p>
+          <a:p>
+            <a:pPr marL="0" lvl="0" indent="0">
+              <a:buNone/>
+            </a:pPr>
+            <a:r>
+              <a:rPr lang="ko-KR" altLang="en-US" sz="1600" spc="-150" dirty="0">
+                <a:latin typeface="ChosunilboNM" panose="02030304000000000000" pitchFamily="18" charset="-128"/>
+                <a:ea typeface="ChosunilboNM" panose="02030304000000000000" pitchFamily="18" charset="-128"/>
+              </a:rPr>
+              <a:t>   ├──→ </a:t>
+            </a:r>
+            <a:r>
+              <a:rPr lang="en-GB" sz="1600" spc="-150" dirty="0">
+                <a:latin typeface="ChosunilboNM" panose="02030304000000000000" pitchFamily="18" charset="-128"/>
+                <a:ea typeface="ChosunilboNM" panose="02030304000000000000" pitchFamily="18" charset="-128"/>
+              </a:rPr>
+              <a:t>t-test </a:t>
+            </a:r>
+          </a:p>
+          <a:p>
+            <a:pPr marL="0" lvl="0" indent="0">
+              <a:buNone/>
+            </a:pPr>
+            <a:r>
+              <a:rPr lang="en-GB" sz="1600" spc="-150" dirty="0">
+                <a:latin typeface="ChosunilboNM" panose="02030304000000000000" pitchFamily="18" charset="-128"/>
+                <a:ea typeface="ChosunilboNM" panose="02030304000000000000" pitchFamily="18" charset="-128"/>
+              </a:rPr>
+              <a:t>   └──→ ANOVA</a:t>
+            </a:r>
+          </a:p>
+        </p:txBody>
+      </p:sp>
+      <p:sp>
+        <p:nvSpPr>
+          <p:cNvPr id="7" name="TextBox 6">
+            <a:extLst>
+              <a:ext uri="{FF2B5EF4-FFF2-40B4-BE49-F238E27FC236}">
+                <a16:creationId xmlns:a16="http://schemas.microsoft.com/office/drawing/2014/main" id="{3F96DAE0-079F-AB7E-8DE8-0E6FD26B46E8}"/>
+              </a:ext>
+            </a:extLst>
+          </p:cNvPr>
+          <p:cNvSpPr txBox="1"/>
+          <p:nvPr/>
+        </p:nvSpPr>
+        <p:spPr>
+          <a:xfrm>
+            <a:off x="4572000" y="3122973"/>
+            <a:ext cx="4572000" cy="1815882"/>
+          </a:xfrm>
+          <a:prstGeom prst="rect">
+            <a:avLst/>
+          </a:prstGeom>
+          <a:noFill/>
+        </p:spPr>
+        <p:txBody>
+          <a:bodyPr wrap="square">
+            <a:spAutoFit/>
+          </a:bodyPr>
+          <a:lstStyle/>
+          <a:p>
+            <a:pPr marL="285750" lvl="0" indent="-285750">
+              <a:buFont typeface="Arial" panose="020B0604020202020204" pitchFamily="34" charset="0"/>
+              <a:buChar char="•"/>
+            </a:pPr>
+            <a:r>
+              <a:rPr lang="ko-KR" altLang="en-US" sz="1600" spc="-150" dirty="0">
+                <a:latin typeface="ChosunilboNM" panose="02030304000000000000" pitchFamily="18" charset="-128"/>
+                <a:ea typeface="ChosunilboNM" panose="02030304000000000000" pitchFamily="18" charset="-128"/>
+              </a:rPr>
+              <a:t>현대 통계학</a:t>
+            </a:r>
+          </a:p>
+          <a:p>
+            <a:pPr marL="0" lvl="0" indent="0">
+              <a:buNone/>
+            </a:pPr>
+            <a:endParaRPr lang="en-US" altLang="ko-KR" sz="1600" spc="-150" dirty="0">
+              <a:latin typeface="ChosunilboNM" panose="02030304000000000000" pitchFamily="18" charset="-128"/>
+              <a:ea typeface="ChosunilboNM" panose="02030304000000000000" pitchFamily="18" charset="-128"/>
+            </a:endParaRPr>
+          </a:p>
+          <a:p>
+            <a:pPr marL="0" lvl="0" indent="0">
+              <a:buNone/>
+            </a:pPr>
+            <a:r>
+              <a:rPr lang="ko-KR" altLang="en-US" sz="1600" spc="-150" dirty="0">
+                <a:latin typeface="ChosunilboNM" panose="02030304000000000000" pitchFamily="18" charset="-128"/>
+                <a:ea typeface="ChosunilboNM" panose="02030304000000000000" pitchFamily="18" charset="-128"/>
+              </a:rPr>
+              <a:t>            일반선형모형</a:t>
+            </a:r>
+            <a:r>
+              <a:rPr lang="en-US" altLang="ko-KR" sz="1600" spc="-150" dirty="0">
+                <a:latin typeface="ChosunilboNM" panose="02030304000000000000" pitchFamily="18" charset="-128"/>
+                <a:ea typeface="ChosunilboNM" panose="02030304000000000000" pitchFamily="18" charset="-128"/>
+              </a:rPr>
+              <a:t>(</a:t>
+            </a:r>
+            <a:r>
+              <a:rPr lang="en-GB" sz="1600" spc="-150" dirty="0">
+                <a:latin typeface="ChosunilboNM" panose="02030304000000000000" pitchFamily="18" charset="-128"/>
+                <a:ea typeface="ChosunilboNM" panose="02030304000000000000" pitchFamily="18" charset="-128"/>
+              </a:rPr>
+              <a:t>GLM)</a:t>
+            </a:r>
+          </a:p>
+          <a:p>
+            <a:pPr marL="0" lvl="0" indent="0">
+              <a:buNone/>
+            </a:pPr>
+            <a:r>
+              <a:rPr lang="en-GB" sz="1600" spc="-150" dirty="0">
+                <a:latin typeface="ChosunilboNM" panose="02030304000000000000" pitchFamily="18" charset="-128"/>
+                <a:ea typeface="ChosunilboNM" panose="02030304000000000000" pitchFamily="18" charset="-128"/>
+              </a:rPr>
+              <a:t>                    │</a:t>
+            </a:r>
+          </a:p>
+          <a:p>
+            <a:pPr marL="0" lvl="0" indent="0">
+              <a:buNone/>
+            </a:pPr>
+            <a:r>
+              <a:rPr lang="en-GB" sz="1600" spc="-150" dirty="0">
+                <a:latin typeface="ChosunilboNM" panose="02030304000000000000" pitchFamily="18" charset="-128"/>
+                <a:ea typeface="ChosunilboNM" panose="02030304000000000000" pitchFamily="18" charset="-128"/>
+              </a:rPr>
+              <a:t>┌────┬─────┐        </a:t>
+            </a:r>
+          </a:p>
+          <a:p>
+            <a:pPr marL="0" lvl="0" indent="0">
+              <a:buNone/>
+            </a:pPr>
+            <a:r>
+              <a:rPr lang="en-GB" sz="1600" spc="-150" dirty="0">
+                <a:latin typeface="ChosunilboNM" panose="02030304000000000000" pitchFamily="18" charset="-128"/>
+                <a:ea typeface="ChosunilboNM" panose="02030304000000000000" pitchFamily="18" charset="-128"/>
+              </a:rPr>
+              <a:t>▼                ▼                   ▼</a:t>
+            </a:r>
+          </a:p>
+          <a:p>
+            <a:pPr marL="0" lvl="0" indent="0">
+              <a:buNone/>
+            </a:pPr>
+            <a:r>
+              <a:rPr lang="en-GB" sz="1600" spc="-150" dirty="0">
+                <a:latin typeface="ChosunilboNM" panose="02030304000000000000" pitchFamily="18" charset="-128"/>
+                <a:ea typeface="ChosunilboNM" panose="02030304000000000000" pitchFamily="18" charset="-128"/>
+              </a:rPr>
+              <a:t> t-test       ANOVA       </a:t>
+            </a:r>
+            <a:r>
+              <a:rPr lang="ko-KR" altLang="en-US" sz="1600" spc="-150" dirty="0">
+                <a:latin typeface="ChosunilboNM" panose="02030304000000000000" pitchFamily="18" charset="-128"/>
+                <a:ea typeface="ChosunilboNM" panose="02030304000000000000" pitchFamily="18" charset="-128"/>
+              </a:rPr>
+              <a:t>회귀분석</a:t>
+            </a:r>
+          </a:p>
+        </p:txBody>
+      </p:sp>
+    </p:spTree>
+  </p:cSld>
+  <p:clrMapOvr>
+    <a:masterClrMapping/>
+  </p:clrMapOvr>
+</p:sld>
+</file>
+
+<file path=ppt/slides/slide15.xml><?xml version="1.0" encoding="utf-8"?>
+<p:sld xmlns:a="http://schemas.openxmlformats.org/drawingml/2006/main" xmlns:r="http://schemas.openxmlformats.org/officeDocument/2006/relationships" xmlns:p="http://schemas.openxmlformats.org/presentationml/2006/main">
+  <p:cSld>
+    <p:spTree>
+      <p:nvGrpSpPr>
+        <p:cNvPr id="1" name="">
+          <a:extLst>
+            <a:ext uri="{FF2B5EF4-FFF2-40B4-BE49-F238E27FC236}">
+              <a16:creationId xmlns:a16="http://schemas.microsoft.com/office/drawing/2014/main" id="{303F2977-019F-16B4-36DB-0EC242A33E0F}"/>
+            </a:ext>
+          </a:extLst>
+        </p:cNvPr>
+        <p:cNvGrpSpPr/>
+        <p:nvPr/>
+      </p:nvGrpSpPr>
+      <p:grpSpPr>
+        <a:xfrm>
+          <a:off x="0" y="0"/>
+          <a:ext cx="0" cy="0"/>
+          <a:chOff x="0" y="0"/>
+          <a:chExt cx="0" cy="0"/>
+        </a:xfrm>
+      </p:grpSpPr>
+    </p:spTree>
+    <p:extLst>
+      <p:ext uri="{BB962C8B-B14F-4D97-AF65-F5344CB8AC3E}">
+        <p14:creationId xmlns:p14="http://schemas.microsoft.com/office/powerpoint/2010/main" val="3249937439"/>
+      </p:ext>
+    </p:extLst>
+  </p:cSld>
+  <p:clrMapOvr>
+    <a:masterClrMapping/>
+  </p:clrMapOvr>
 </p:sld>
 </file>
 
@@ -4367,11 +5678,10 @@
           <a:bodyPr/>
           <a:lstStyle/>
           <a:p>
-            <a:pPr lvl="0" indent="0" marL="0">
+            <a:pPr marL="0" lvl="0" indent="0">
               <a:buNone/>
             </a:pPr>
             <a:r>
-              <a:rPr/>
               <a:t>Section 03 | 통계학의 분포</a:t>
             </a:r>
           </a:p>
@@ -4379,6 +5689,9 @@
       </p:sp>
     </p:spTree>
   </p:cSld>
+  <p:clrMapOvr>
+    <a:masterClrMapping/>
+  </p:clrMapOvr>
 </p:sld>
 </file>
 
@@ -4419,11 +5732,10 @@
           <a:bodyPr/>
           <a:lstStyle/>
           <a:p>
-            <a:pPr lvl="0" indent="0" marL="0">
+            <a:pPr marL="0" lvl="0" indent="0">
               <a:buNone/>
             </a:pPr>
             <a:r>
-              <a:rPr/>
               <a:t>통계에서 왜 분포를 배우는가?</a:t>
             </a:r>
           </a:p>
@@ -4439,58 +5751,335 @@
             <p:ph idx="1"/>
           </p:nvPr>
         </p:nvSpPr>
-        <p:spPr/>
+        <p:spPr>
+          <a:xfrm>
+            <a:off x="724669" y="1745956"/>
+            <a:ext cx="8262811" cy="3143439"/>
+          </a:xfrm>
+        </p:spPr>
         <p:txBody>
-          <a:bodyPr/>
+          <a:bodyPr>
+            <a:normAutofit/>
+          </a:bodyPr>
           <a:lstStyle/>
           <a:p>
+            <a:pPr lvl="0">
+              <a:lnSpc>
+                <a:spcPct val="150000"/>
+              </a:lnSpc>
+            </a:pPr>
+            <a:r>
+              <a:rPr dirty="0" err="1"/>
+              <a:t>왜</a:t>
+            </a:r>
+            <a:r>
+              <a:rPr dirty="0"/>
+              <a:t> </a:t>
+            </a:r>
+            <a:r>
+              <a:rPr dirty="0" err="1"/>
+              <a:t>확률분포를</a:t>
+            </a:r>
+            <a:r>
+              <a:rPr dirty="0"/>
+              <a:t> </a:t>
+            </a:r>
+            <a:r>
+              <a:rPr dirty="0" err="1"/>
+              <a:t>알아야</a:t>
+            </a:r>
+            <a:r>
+              <a:rPr dirty="0"/>
+              <a:t> </a:t>
+            </a:r>
+            <a:r>
+              <a:rPr dirty="0" err="1"/>
+              <a:t>할까</a:t>
+            </a:r>
+            <a:r>
+              <a:rPr dirty="0"/>
+              <a:t>?</a:t>
+            </a:r>
+          </a:p>
+          <a:p>
+            <a:pPr lvl="0">
+              <a:lnSpc>
+                <a:spcPct val="150000"/>
+              </a:lnSpc>
+            </a:pPr>
+            <a:r>
+              <a:rPr dirty="0" err="1"/>
+              <a:t>우리가</a:t>
+            </a:r>
+            <a:r>
+              <a:rPr dirty="0"/>
+              <a:t> </a:t>
+            </a:r>
+            <a:r>
+              <a:rPr dirty="0" err="1"/>
+              <a:t>수집하는</a:t>
+            </a:r>
+            <a:r>
+              <a:rPr dirty="0"/>
+              <a:t> </a:t>
+            </a:r>
+            <a:r>
+              <a:rPr dirty="0" err="1"/>
+              <a:t>데이터는</a:t>
+            </a:r>
+            <a:r>
+              <a:rPr dirty="0"/>
+              <a:t> </a:t>
+            </a:r>
+            <a:r>
+              <a:rPr dirty="0" err="1"/>
+              <a:t>모두</a:t>
+            </a:r>
+            <a:r>
+              <a:rPr dirty="0"/>
+              <a:t> </a:t>
+            </a:r>
+            <a:r>
+              <a:rPr dirty="0" err="1"/>
+              <a:t>불확실성을</a:t>
+            </a:r>
+            <a:r>
+              <a:rPr dirty="0"/>
+              <a:t> </a:t>
+            </a:r>
+            <a:r>
+              <a:rPr dirty="0" err="1"/>
+              <a:t>가</a:t>
+            </a:r>
+            <a:r>
+              <a:rPr lang="ko-KR" altLang="en-US" dirty="0"/>
+              <a:t>짐</a:t>
+            </a:r>
+            <a:endParaRPr dirty="0"/>
+          </a:p>
+          <a:p>
             <a:pPr lvl="0"/>
             <a:r>
-              <a:rPr/>
-              <a:t>왜 확률분포를 알아야 할까?</a:t>
-            </a:r>
-          </a:p>
-          <a:p>
-            <a:pPr lvl="0"/>
-            <a:r>
-              <a:rPr/>
-              <a:t>우리가 수집하는 데이터는 모두 불확실성을 가진다</a:t>
-            </a:r>
-          </a:p>
-          <a:p>
-            <a:pPr lvl="0"/>
-            <a:r>
-              <a:rPr/>
-              <a:t>예시: - 동전 던지기 - 시험 점수 - 키와 몸무게 - 운동 중재 효과</a:t>
-            </a:r>
-          </a:p>
-          <a:p>
-            <a:pPr lvl="0"/>
-            <a:r>
-              <a:rPr/>
-              <a:t>통계학은 “</a:t>
-            </a:r>
-            <a:r>
-              <a:rPr b="1"/>
-              <a:t>무작위로 발생하는 데이터를 수학적으로 설명하는 학문</a:t>
-            </a:r>
-            <a:r>
-              <a:rPr/>
-              <a:t>” 이며,  그 설명의 핵심 도구가 </a:t>
-            </a:r>
-            <a:r>
-              <a:rPr b="1"/>
+              <a:rPr dirty="0" err="1"/>
+              <a:t>예시</a:t>
+            </a:r>
+            <a:r>
+              <a:rPr dirty="0"/>
+              <a:t>: </a:t>
+            </a:r>
+            <a:br>
+              <a:rPr lang="en-US" dirty="0"/>
+            </a:br>
+            <a:r>
+              <a:rPr dirty="0"/>
+              <a:t>- </a:t>
+            </a:r>
+            <a:r>
+              <a:rPr dirty="0" err="1"/>
+              <a:t>동전</a:t>
+            </a:r>
+            <a:r>
+              <a:rPr dirty="0"/>
+              <a:t> </a:t>
+            </a:r>
+            <a:r>
+              <a:rPr dirty="0" err="1"/>
+              <a:t>던지기</a:t>
+            </a:r>
+            <a:r>
+              <a:rPr dirty="0"/>
+              <a:t>  </a:t>
+            </a:r>
+            <a:br>
+              <a:rPr lang="en-US" dirty="0"/>
+            </a:br>
+            <a:r>
+              <a:rPr dirty="0"/>
+              <a:t>- </a:t>
+            </a:r>
+            <a:r>
+              <a:rPr dirty="0" err="1"/>
+              <a:t>시험</a:t>
+            </a:r>
+            <a:r>
+              <a:rPr dirty="0"/>
+              <a:t> </a:t>
+            </a:r>
+            <a:r>
+              <a:rPr dirty="0" err="1"/>
+              <a:t>점수</a:t>
+            </a:r>
+            <a:r>
+              <a:rPr dirty="0"/>
+              <a:t>  </a:t>
+            </a:r>
+            <a:br>
+              <a:rPr lang="en-US" dirty="0"/>
+            </a:br>
+            <a:r>
+              <a:rPr dirty="0"/>
+              <a:t>- </a:t>
+            </a:r>
+            <a:r>
+              <a:rPr dirty="0" err="1"/>
+              <a:t>키와</a:t>
+            </a:r>
+            <a:r>
+              <a:rPr dirty="0"/>
+              <a:t> </a:t>
+            </a:r>
+            <a:r>
+              <a:rPr dirty="0" err="1"/>
+              <a:t>몸무게</a:t>
+            </a:r>
+            <a:r>
+              <a:rPr dirty="0"/>
+              <a:t> </a:t>
+            </a:r>
+            <a:br>
+              <a:rPr lang="en-US" dirty="0"/>
+            </a:br>
+            <a:r>
+              <a:rPr dirty="0"/>
+              <a:t>- </a:t>
+            </a:r>
+            <a:r>
+              <a:rPr dirty="0" err="1"/>
+              <a:t>운동</a:t>
+            </a:r>
+            <a:r>
+              <a:rPr dirty="0"/>
+              <a:t> </a:t>
+            </a:r>
+            <a:r>
+              <a:rPr dirty="0" err="1"/>
+              <a:t>중재</a:t>
+            </a:r>
+            <a:r>
+              <a:rPr dirty="0"/>
+              <a:t> </a:t>
+            </a:r>
+            <a:r>
+              <a:rPr dirty="0" err="1"/>
+              <a:t>효과</a:t>
+            </a:r>
+            <a:endParaRPr dirty="0"/>
+          </a:p>
+          <a:p>
+            <a:pPr lvl="0">
+              <a:lnSpc>
+                <a:spcPct val="150000"/>
+              </a:lnSpc>
+            </a:pPr>
+            <a:r>
+              <a:rPr dirty="0" err="1"/>
+              <a:t>통계학은</a:t>
+            </a:r>
+            <a:r>
+              <a:rPr dirty="0"/>
+              <a:t> “</a:t>
+            </a:r>
+            <a:r>
+              <a:rPr b="1" dirty="0" err="1"/>
+              <a:t>무작위로</a:t>
+            </a:r>
+            <a:r>
+              <a:rPr b="1" dirty="0"/>
+              <a:t> </a:t>
+            </a:r>
+            <a:r>
+              <a:rPr b="1" dirty="0" err="1"/>
+              <a:t>발생하는</a:t>
+            </a:r>
+            <a:r>
+              <a:rPr b="1" dirty="0"/>
+              <a:t> </a:t>
+            </a:r>
+            <a:r>
+              <a:rPr b="1" dirty="0" err="1"/>
+              <a:t>데이터를</a:t>
+            </a:r>
+            <a:r>
+              <a:rPr b="1" dirty="0"/>
+              <a:t> </a:t>
+            </a:r>
+            <a:r>
+              <a:rPr b="1" dirty="0" err="1"/>
+              <a:t>수학적으로</a:t>
+            </a:r>
+            <a:r>
+              <a:rPr b="1" dirty="0"/>
+              <a:t> </a:t>
+            </a:r>
+            <a:r>
+              <a:rPr b="1" dirty="0" err="1"/>
+              <a:t>설명하는</a:t>
+            </a:r>
+            <a:r>
+              <a:rPr b="1" dirty="0"/>
+              <a:t> </a:t>
+            </a:r>
+            <a:r>
+              <a:rPr b="1" dirty="0" err="1"/>
+              <a:t>학문</a:t>
+            </a:r>
+            <a:r>
+              <a:rPr dirty="0"/>
+              <a:t>” </a:t>
+            </a:r>
+            <a:r>
+              <a:rPr dirty="0" err="1"/>
+              <a:t>이며</a:t>
+            </a:r>
+            <a:r>
+              <a:rPr dirty="0"/>
+              <a:t>,  </a:t>
+            </a:r>
+            <a:r>
+              <a:rPr dirty="0" err="1"/>
+              <a:t>그</a:t>
+            </a:r>
+            <a:r>
+              <a:rPr dirty="0"/>
+              <a:t> </a:t>
+            </a:r>
+            <a:r>
+              <a:rPr dirty="0" err="1"/>
+              <a:t>설명의</a:t>
+            </a:r>
+            <a:r>
+              <a:rPr dirty="0"/>
+              <a:t> </a:t>
+            </a:r>
+            <a:r>
+              <a:rPr dirty="0" err="1"/>
+              <a:t>핵심</a:t>
+            </a:r>
+            <a:r>
+              <a:rPr dirty="0"/>
+              <a:t> </a:t>
+            </a:r>
+            <a:r>
+              <a:rPr dirty="0" err="1"/>
+              <a:t>도구가</a:t>
+            </a:r>
+            <a:r>
+              <a:rPr dirty="0"/>
+              <a:t> </a:t>
+            </a:r>
+            <a:r>
+              <a:rPr b="1" dirty="0" err="1"/>
               <a:t>확률분포</a:t>
             </a:r>
-            <a:r>
-              <a:rPr/>
-              <a:t>이다.</a:t>
-            </a:r>
+            <a:endParaRPr dirty="0"/>
           </a:p>
         </p:txBody>
       </p:sp>
     </p:spTree>
   </p:cSld>
+  <p:clrMapOvr>
+    <a:masterClrMapping/>
+  </p:clrMapOvr>
 </p:sld>
 </file>
 
@@ -4526,33 +6115,192 @@
           <a:bodyPr/>
           <a:lstStyle/>
           <a:p>
-            <a:pPr lvl="0" indent="0" marL="0">
-              <a:buNone/>
-            </a:pPr>
-            <a:r>
-              <a:rPr/>
-              <a:t>(분포 계보 그림)</a:t>
-            </a:r>
-          </a:p>
-          <a:p>
             <a:pPr lvl="0"/>
-            <a:r>
-              <a:rPr/>
-              <a:t>모든 분포는 서로 독립적인 것이 아니라 “</a:t>
-            </a:r>
-            <a:r>
-              <a:rPr b="1"/>
-              <a:t>이전 분포에서 발전한 결과</a:t>
-            </a:r>
-            <a:r>
-              <a:rPr/>
+            <a:endParaRPr lang="en-US" dirty="0"/>
+          </a:p>
+          <a:p>
+            <a:pPr lvl="0"/>
+            <a:endParaRPr lang="en-US" dirty="0"/>
+          </a:p>
+          <a:p>
+            <a:pPr lvl="0"/>
+            <a:endParaRPr lang="en-US" dirty="0"/>
+          </a:p>
+          <a:p>
+            <a:pPr lvl="0"/>
+            <a:endParaRPr lang="en-US" dirty="0"/>
+          </a:p>
+          <a:p>
+            <a:pPr lvl="0"/>
+            <a:endParaRPr lang="en-US" dirty="0"/>
+          </a:p>
+          <a:p>
+            <a:pPr lvl="0"/>
+            <a:endParaRPr lang="en-US" dirty="0"/>
+          </a:p>
+          <a:p>
+            <a:pPr lvl="0"/>
+            <a:endParaRPr lang="en-US" dirty="0"/>
+          </a:p>
+          <a:p>
+            <a:pPr lvl="0"/>
+            <a:endParaRPr lang="en-US" dirty="0"/>
+          </a:p>
+          <a:p>
+            <a:pPr lvl="0"/>
+            <a:endParaRPr lang="en-US" dirty="0"/>
+          </a:p>
+          <a:p>
+            <a:pPr lvl="0"/>
+            <a:r>
+              <a:rPr dirty="0" err="1"/>
+              <a:t>모든</a:t>
+            </a:r>
+            <a:r>
+              <a:rPr dirty="0"/>
+              <a:t> </a:t>
+            </a:r>
+            <a:r>
+              <a:rPr dirty="0" err="1"/>
+              <a:t>분포는</a:t>
+            </a:r>
+            <a:r>
+              <a:rPr dirty="0"/>
+              <a:t> </a:t>
+            </a:r>
+            <a:r>
+              <a:rPr dirty="0" err="1"/>
+              <a:t>서로</a:t>
+            </a:r>
+            <a:r>
+              <a:rPr dirty="0"/>
+              <a:t> </a:t>
+            </a:r>
+            <a:r>
+              <a:rPr dirty="0" err="1"/>
+              <a:t>독립적인</a:t>
+            </a:r>
+            <a:r>
+              <a:rPr dirty="0"/>
+              <a:t> </a:t>
+            </a:r>
+            <a:r>
+              <a:rPr dirty="0" err="1"/>
+              <a:t>것이</a:t>
+            </a:r>
+            <a:r>
+              <a:rPr dirty="0"/>
+              <a:t> </a:t>
+            </a:r>
+            <a:r>
+              <a:rPr dirty="0" err="1"/>
+              <a:t>아니라</a:t>
+            </a:r>
+            <a:r>
+              <a:rPr dirty="0"/>
+              <a:t> “</a:t>
+            </a:r>
+            <a:r>
+              <a:rPr b="1" dirty="0" err="1"/>
+              <a:t>이전</a:t>
+            </a:r>
+            <a:r>
+              <a:rPr b="1" dirty="0"/>
+              <a:t> </a:t>
+            </a:r>
+            <a:r>
+              <a:rPr b="1" dirty="0" err="1"/>
+              <a:t>분포에서</a:t>
+            </a:r>
+            <a:r>
+              <a:rPr b="1" dirty="0"/>
+              <a:t> </a:t>
+            </a:r>
+            <a:r>
+              <a:rPr b="1" dirty="0" err="1"/>
+              <a:t>발전한</a:t>
+            </a:r>
+            <a:r>
+              <a:rPr b="1" dirty="0"/>
+              <a:t> </a:t>
+            </a:r>
+            <a:r>
+              <a:rPr b="1" dirty="0" err="1"/>
+              <a:t>결과</a:t>
+            </a:r>
+            <a:r>
+              <a:rPr dirty="0" err="1"/>
               <a:t>”이다</a:t>
             </a:r>
+            <a:endParaRPr dirty="0"/>
           </a:p>
         </p:txBody>
       </p:sp>
+      <p:pic>
+        <p:nvPicPr>
+          <p:cNvPr id="2" name="Picture 1">
+            <a:extLst>
+              <a:ext uri="{FF2B5EF4-FFF2-40B4-BE49-F238E27FC236}">
+                <a16:creationId xmlns:a16="http://schemas.microsoft.com/office/drawing/2014/main" id="{411E7A68-057D-2E21-EE9B-151D8A4258E3}"/>
+              </a:ext>
+            </a:extLst>
+          </p:cNvPr>
+          <p:cNvPicPr>
+            <a:picLocks noChangeAspect="1"/>
+          </p:cNvPicPr>
+          <p:nvPr/>
+        </p:nvPicPr>
+        <p:blipFill>
+          <a:blip r:embed="rId2"/>
+          <a:stretch>
+            <a:fillRect/>
+          </a:stretch>
+        </p:blipFill>
+        <p:spPr>
+          <a:xfrm>
+            <a:off x="724670" y="1463084"/>
+            <a:ext cx="2800349" cy="2800349"/>
+          </a:xfrm>
+          <a:prstGeom prst="rect">
+            <a:avLst/>
+          </a:prstGeom>
+        </p:spPr>
+      </p:pic>
+      <p:pic>
+        <p:nvPicPr>
+          <p:cNvPr id="4" name="Picture 3">
+            <a:extLst>
+              <a:ext uri="{FF2B5EF4-FFF2-40B4-BE49-F238E27FC236}">
+                <a16:creationId xmlns:a16="http://schemas.microsoft.com/office/drawing/2014/main" id="{616B2F97-D4C4-46C3-8F10-46F8D499F225}"/>
+              </a:ext>
+            </a:extLst>
+          </p:cNvPr>
+          <p:cNvPicPr>
+            <a:picLocks noChangeAspect="1"/>
+          </p:cNvPicPr>
+          <p:nvPr/>
+        </p:nvPicPr>
+        <p:blipFill>
+          <a:blip r:embed="rId3"/>
+          <a:stretch>
+            <a:fillRect/>
+          </a:stretch>
+        </p:blipFill>
+        <p:spPr>
+          <a:xfrm>
+            <a:off x="3633902" y="1463084"/>
+            <a:ext cx="5297823" cy="2800349"/>
+          </a:xfrm>
+          <a:prstGeom prst="rect">
+            <a:avLst/>
+          </a:prstGeom>
+        </p:spPr>
+      </p:pic>
     </p:spTree>
   </p:cSld>
+  <p:clrMapOvr>
+    <a:masterClrMapping/>
+  </p:clrMapOvr>
 </p:sld>
 </file>
 
@@ -4593,11 +6341,10 @@
           <a:bodyPr/>
           <a:lstStyle/>
           <a:p>
-            <a:pPr lvl="0" indent="0" marL="0">
+            <a:pPr marL="0" lvl="0" indent="0">
               <a:buNone/>
             </a:pPr>
             <a:r>
-              <a:rPr/>
               <a:t>베르누이 분포</a:t>
             </a:r>
           </a:p>
@@ -4617,55 +6364,215 @@
             </p:nvSpPr>
             <p:spPr/>
             <p:txBody>
-              <a:bodyPr/>
+              <a:bodyPr>
+                <a:normAutofit/>
+              </a:bodyPr>
               <a:lstStyle/>
               <a:p>
-                <a:pPr lvl="0" indent="0" marL="0">
-                  <a:spcBef>
-                    <a:spcPts val="3000"/>
-                  </a:spcBef>
-                  <a:buNone/>
-                </a:pPr>
-                <a:r>
-                  <a:rPr b="1"/>
-                  <a:t>발견자</a:t>
+                <a:pPr lvl="0"/>
+                <a:r>
+                  <a:rPr dirty="0"/>
+                  <a:t>Jacob Bernoulli (1655 ~ 1705, </a:t>
+                </a:r>
+                <a:r>
+                  <a:rPr dirty="0" err="1"/>
+                  <a:t>스위스</a:t>
+                </a:r>
+                <a:r>
+                  <a:rPr dirty="0"/>
+                  <a:t> </a:t>
+                </a:r>
+                <a:r>
+                  <a:rPr dirty="0" err="1"/>
+                  <a:t>수학자</a:t>
+                </a:r>
+                <a:r>
+                  <a:rPr dirty="0"/>
+                  <a:t>)</a:t>
                 </a:r>
               </a:p>
               <a:p>
                 <a:pPr lvl="0"/>
                 <a:r>
-                  <a:rPr/>
-                  <a:t>Jacob Bernoulli (1655 ~ 1705, 스위스 수학자)</a:t>
-                </a:r>
+                  <a:rPr dirty="0"/>
+                  <a:t>1680년대~1705년 </a:t>
+                </a:r>
+                <a:r>
+                  <a:rPr dirty="0" err="1"/>
+                  <a:t>사이에</a:t>
+                </a:r>
+                <a:r>
+                  <a:rPr dirty="0"/>
+                  <a:t> </a:t>
+                </a:r>
+                <a:r>
+                  <a:rPr dirty="0" err="1"/>
+                  <a:t>연구가</a:t>
+                </a:r>
+                <a:r>
+                  <a:rPr dirty="0"/>
+                  <a:t> </a:t>
+                </a:r>
+                <a:r>
+                  <a:rPr dirty="0" err="1"/>
+                  <a:t>진행되었으며</a:t>
+                </a:r>
+                <a:r>
+                  <a:rPr dirty="0"/>
+                  <a:t>, </a:t>
+                </a:r>
+                <a:r>
+                  <a:rPr dirty="0" err="1"/>
+                  <a:t>대표</a:t>
+                </a:r>
+                <a:r>
+                  <a:rPr dirty="0"/>
+                  <a:t> </a:t>
+                </a:r>
+                <a:r>
+                  <a:rPr dirty="0" err="1"/>
+                  <a:t>저서</a:t>
+                </a:r>
+                <a:r>
+                  <a:rPr dirty="0"/>
+                  <a:t> 《Ars </a:t>
+                </a:r>
+                <a:r>
+                  <a:rPr dirty="0" err="1"/>
+                  <a:t>Conjectandi》는</a:t>
+                </a:r>
+                <a:r>
+                  <a:rPr dirty="0"/>
+                  <a:t> </a:t>
+                </a:r>
+                <a:r>
+                  <a:rPr dirty="0" err="1"/>
+                  <a:t>사후인</a:t>
+                </a:r>
+                <a:r>
+                  <a:rPr dirty="0"/>
+                  <a:t> 1713년에 </a:t>
+                </a:r>
+                <a:r>
+                  <a:rPr dirty="0" err="1"/>
+                  <a:t>출판되며</a:t>
+                </a:r>
+                <a:r>
+                  <a:rPr dirty="0"/>
+                  <a:t> </a:t>
+                </a:r>
+                <a:r>
+                  <a:rPr dirty="0" err="1"/>
+                  <a:t>확률론의</a:t>
+                </a:r>
+                <a:r>
+                  <a:rPr dirty="0"/>
+                  <a:t> </a:t>
+                </a:r>
+                <a:r>
+                  <a:rPr dirty="0" err="1"/>
+                  <a:t>기초가</a:t>
+                </a:r>
+                <a:r>
+                  <a:rPr dirty="0"/>
+                  <a:t> </a:t>
+                </a:r>
+                <a:r>
+                  <a:rPr dirty="0" err="1"/>
+                  <a:t>체계화됨</a:t>
+                </a:r>
+                <a:endParaRPr dirty="0"/>
               </a:p>
               <a:p>
                 <a:pPr lvl="0"/>
                 <a:r>
-                  <a:rPr/>
-                  <a:t>1680년대~1705년 사이에 연구가 진행되었으며, 대표 저서 《Ars Conjectandi》는 사후인 1713년에 출판되며 확률론의 기초가 체계화됨</a:t>
-                </a:r>
+                  <a:rPr dirty="0" err="1"/>
+                  <a:t>당시</a:t>
+                </a:r>
+                <a:r>
+                  <a:rPr dirty="0"/>
+                  <a:t> </a:t>
+                </a:r>
+                <a:r>
+                  <a:rPr dirty="0" err="1"/>
+                  <a:t>유럽에서는</a:t>
+                </a:r>
+                <a:r>
+                  <a:rPr dirty="0"/>
+                  <a:t> </a:t>
+                </a:r>
+                <a:r>
+                  <a:rPr dirty="0" err="1"/>
+                  <a:t>도박</a:t>
+                </a:r>
+                <a:r>
+                  <a:rPr dirty="0"/>
+                  <a:t>, </a:t>
+                </a:r>
+                <a:r>
+                  <a:rPr dirty="0" err="1"/>
+                  <a:t>주사위</a:t>
+                </a:r>
+                <a:r>
+                  <a:rPr dirty="0"/>
+                  <a:t>, </a:t>
+                </a:r>
+                <a:r>
+                  <a:rPr dirty="0" err="1"/>
+                  <a:t>카드게임의</a:t>
+                </a:r>
+                <a:r>
+                  <a:rPr dirty="0"/>
+                  <a:t> </a:t>
+                </a:r>
+                <a:r>
+                  <a:rPr dirty="0" err="1"/>
+                  <a:t>승률을</a:t>
+                </a:r>
+                <a:r>
+                  <a:rPr dirty="0"/>
+                  <a:t> </a:t>
+                </a:r>
+                <a:r>
+                  <a:rPr dirty="0" err="1"/>
+                  <a:t>계산하려는</a:t>
+                </a:r>
+                <a:r>
+                  <a:rPr dirty="0"/>
+                  <a:t> </a:t>
+                </a:r>
+                <a:r>
+                  <a:rPr dirty="0" err="1"/>
+                  <a:t>관심이</a:t>
+                </a:r>
+                <a:r>
+                  <a:rPr dirty="0"/>
+                  <a:t> </a:t>
+                </a:r>
+                <a:r>
+                  <a:rPr dirty="0" err="1"/>
+                  <a:t>매우</a:t>
+                </a:r>
+                <a:r>
+                  <a:rPr dirty="0"/>
+                  <a:t> </a:t>
+                </a:r>
+                <a:r>
+                  <a:rPr dirty="0" err="1"/>
+                  <a:t>컸음</a:t>
+                </a:r>
+                <a:endParaRPr dirty="0"/>
               </a:p>
               <a:p>
-                <a:pPr lvl="0"/>
-                <a:r>
-                  <a:rPr/>
-                  <a:t>당시 유럽에서는 도박, 주사위, 카드게임의 승률을 계산하려는 관심이 매우 컸음</a:t>
-                </a:r>
+                <a:pPr marL="0" lvl="0" indent="0">
+                  <a:buNone/>
+                </a:pPr>
+                <a:endParaRPr lang="en-US" dirty="0">
+                  <a:latin typeface="Cambria Math" panose="02040503050406030204" pitchFamily="18" charset="0"/>
+                </a:endParaRPr>
               </a:p>
               <a:p>
-                <a:pPr lvl="0" indent="0" marL="0">
-                  <a:spcBef>
-                    <a:spcPts val="3000"/>
-                  </a:spcBef>
-                  <a:buNone/>
-                </a:pPr>
-                <a:r>
-                  <a:rPr b="1"/>
-                  <a:t>베르누이분포</a:t>
-                </a:r>
-              </a:p>
-              <a:p>
-                <a:pPr lvl="0" indent="0" marL="0">
+                <a:pPr marL="0" lvl="0" indent="0">
                   <a:buNone/>
                 </a:pPr>
                 <a14:m>
@@ -4675,123 +6582,241 @@
                     </m:oMathParaPr>
                     <m:oMath>
                       <m:r>
-                        <m:t>P</m:t>
+                        <a:rPr>
+                          <a:latin typeface="Cambria Math" panose="02040503050406030204" pitchFamily="18" charset="0"/>
+                        </a:rPr>
+                        <m:t>𝑃</m:t>
                       </m:r>
+                      <m:d>
+                        <m:dPr>
+                          <m:ctrlPr>
+                            <a:rPr>
+                              <a:latin typeface="Cambria Math" panose="02040503050406030204" pitchFamily="18" charset="0"/>
+                            </a:rPr>
+                          </m:ctrlPr>
+                        </m:dPr>
+                        <m:e>
+                          <m:r>
+                            <a:rPr>
+                              <a:latin typeface="Cambria Math" panose="02040503050406030204" pitchFamily="18" charset="0"/>
+                            </a:rPr>
+                            <m:t>𝑋</m:t>
+                          </m:r>
+                          <m:r>
+                            <a:rPr>
+                              <a:latin typeface="Cambria Math" panose="02040503050406030204" pitchFamily="18" charset="0"/>
+                            </a:rPr>
+                            <m:t>=1</m:t>
+                          </m:r>
+                        </m:e>
+                      </m:d>
                       <m:r>
-                        <m:rPr>
-                          <m:sty m:val="p"/>
-                        </m:rPr>
-                        <m:t>(</m:t>
-                      </m:r>
-                      <m:r>
-                        <m:t>X</m:t>
-                      </m:r>
-                      <m:r>
-                        <m:rPr>
-                          <m:sty m:val="p"/>
-                        </m:rPr>
+                        <a:rPr>
+                          <a:latin typeface="Cambria Math" panose="02040503050406030204" pitchFamily="18" charset="0"/>
+                        </a:rPr>
                         <m:t>=</m:t>
                       </m:r>
                       <m:r>
-                        <m:t>1</m:t>
+                        <a:rPr>
+                          <a:latin typeface="Cambria Math" panose="02040503050406030204" pitchFamily="18" charset="0"/>
+                        </a:rPr>
+                        <m:t>𝑝</m:t>
                       </m:r>
                       <m:r>
-                        <m:rPr>
-                          <m:sty m:val="p"/>
-                        </m:rPr>
-                        <m:t>)</m:t>
+                        <a:rPr>
+                          <a:latin typeface="Cambria Math" panose="02040503050406030204" pitchFamily="18" charset="0"/>
+                        </a:rPr>
+                        <m:t>, </m:t>
                       </m:r>
                       <m:r>
-                        <m:rPr>
-                          <m:sty m:val="p"/>
-                        </m:rPr>
-                        <m:t>=</m:t>
+                        <a:rPr>
+                          <a:latin typeface="Cambria Math" panose="02040503050406030204" pitchFamily="18" charset="0"/>
+                        </a:rPr>
+                        <m:t>𝑃</m:t>
+                      </m:r>
+                      <m:d>
+                        <m:dPr>
+                          <m:ctrlPr>
+                            <a:rPr>
+                              <a:latin typeface="Cambria Math" panose="02040503050406030204" pitchFamily="18" charset="0"/>
+                            </a:rPr>
+                          </m:ctrlPr>
+                        </m:dPr>
+                        <m:e>
+                          <m:r>
+                            <a:rPr>
+                              <a:latin typeface="Cambria Math" panose="02040503050406030204" pitchFamily="18" charset="0"/>
+                            </a:rPr>
+                            <m:t>𝑋</m:t>
+                          </m:r>
+                          <m:r>
+                            <a:rPr>
+                              <a:latin typeface="Cambria Math" panose="02040503050406030204" pitchFamily="18" charset="0"/>
+                            </a:rPr>
+                            <m:t>=0</m:t>
+                          </m:r>
+                        </m:e>
+                      </m:d>
+                      <m:r>
+                        <a:rPr>
+                          <a:latin typeface="Cambria Math" panose="02040503050406030204" pitchFamily="18" charset="0"/>
+                        </a:rPr>
+                        <m:t>=1−</m:t>
                       </m:r>
                       <m:r>
-                        <m:t>p</m:t>
-                      </m:r>
-                      <m:r>
-                        <m:rPr>
-                          <m:sty m:val="p"/>
-                        </m:rPr>
-                        <m:t>,</m:t>
-                      </m:r>
-                      <m:r>
-                        <m:t> </m:t>
-                      </m:r>
-                      <m:r>
-                        <m:t>P</m:t>
-                      </m:r>
-                      <m:r>
-                        <m:rPr>
-                          <m:sty m:val="p"/>
-                        </m:rPr>
-                        <m:t>(</m:t>
-                      </m:r>
-                      <m:r>
-                        <m:t>X</m:t>
-                      </m:r>
-                      <m:r>
-                        <m:rPr>
-                          <m:sty m:val="p"/>
-                        </m:rPr>
-                        <m:t>=</m:t>
-                      </m:r>
-                      <m:r>
-                        <m:t>0</m:t>
-                      </m:r>
-                      <m:r>
-                        <m:rPr>
-                          <m:sty m:val="p"/>
-                        </m:rPr>
-                        <m:t>)</m:t>
-                      </m:r>
-                      <m:r>
-                        <m:rPr>
-                          <m:sty m:val="p"/>
-                        </m:rPr>
-                        <m:t>=</m:t>
-                      </m:r>
-                      <m:r>
-                        <m:t>1</m:t>
-                      </m:r>
-                      <m:r>
-                        <m:rPr>
-                          <m:sty m:val="p"/>
-                        </m:rPr>
-                        <m:t>−</m:t>
-                      </m:r>
-                      <m:r>
-                        <m:t>p</m:t>
+                        <a:rPr>
+                          <a:latin typeface="Cambria Math" panose="02040503050406030204" pitchFamily="18" charset="0"/>
+                        </a:rPr>
+                        <m:t>𝑝</m:t>
                       </m:r>
                     </m:oMath>
                   </m:oMathPara>
                 </a14:m>
+                <a:endParaRPr dirty="0"/>
               </a:p>
               <a:p>
-                <a:pPr lvl="0" indent="0" marL="0">
-                  <a:buNone/>
-                </a:pPr>
-                <a:r>
-                  <a:rPr/>
-                  <a:t>- 성공/실패 시행(Bernoulli Trial) - 대수의 법칙 - 반복 시행의 확률</a:t>
-                </a:r>
+                <a:pPr lvl="0"/>
+                <a:endParaRPr lang="en-US" dirty="0"/>
               </a:p>
               <a:p>
-                <a:pPr lvl="0" indent="0" marL="0">
-                  <a:buNone/>
-                </a:pPr>
-                <a:r>
-                  <a:rPr/>
-                  <a:t>(베르누이 분포 그림)</a:t>
-                </a:r>
+                <a:pPr lvl="0"/>
+                <a:r>
+                  <a:rPr dirty="0" err="1"/>
+                  <a:t>성공</a:t>
+                </a:r>
+                <a:r>
+                  <a:rPr dirty="0"/>
+                  <a:t>/</a:t>
+                </a:r>
+                <a:r>
+                  <a:rPr dirty="0" err="1"/>
+                  <a:t>실패</a:t>
+                </a:r>
+                <a:r>
+                  <a:rPr dirty="0"/>
+                  <a:t> </a:t>
+                </a:r>
+                <a:r>
+                  <a:rPr dirty="0" err="1"/>
+                  <a:t>시행</a:t>
+                </a:r>
+                <a:r>
+                  <a:rPr dirty="0"/>
+                  <a:t>(Bernoulli Trial)</a:t>
+                </a:r>
+              </a:p>
+              <a:p>
+                <a:pPr lvl="0"/>
+                <a:r>
+                  <a:rPr dirty="0" err="1"/>
+                  <a:t>대수의</a:t>
+                </a:r>
+                <a:r>
+                  <a:rPr dirty="0"/>
+                  <a:t> </a:t>
+                </a:r>
+                <a:r>
+                  <a:rPr dirty="0" err="1"/>
+                  <a:t>법칙</a:t>
+                </a:r>
+                <a:endParaRPr dirty="0"/>
+              </a:p>
+              <a:p>
+                <a:pPr lvl="0"/>
+                <a:r>
+                  <a:rPr dirty="0" err="1"/>
+                  <a:t>반복</a:t>
+                </a:r>
+                <a:r>
+                  <a:rPr dirty="0"/>
+                  <a:t> </a:t>
+                </a:r>
+                <a:r>
+                  <a:rPr dirty="0" err="1"/>
+                  <a:t>시행의</a:t>
+                </a:r>
+                <a:r>
+                  <a:rPr dirty="0"/>
+                  <a:t> </a:t>
+                </a:r>
+                <a:r>
+                  <a:rPr dirty="0" err="1"/>
+                  <a:t>확률</a:t>
+                </a:r>
+                <a:endParaRPr dirty="0"/>
               </a:p>
             </p:txBody>
           </p:sp>
         </mc:Choice>
+        <mc:Fallback>
+          <p:sp>
+            <p:nvSpPr>
+              <p:cNvPr id="3" name="Content Placeholder 2"/>
+              <p:cNvSpPr>
+                <a:spLocks noGrp="1" noRot="1" noChangeAspect="1" noMove="1" noResize="1" noEditPoints="1" noAdjustHandles="1" noChangeArrowheads="1" noChangeShapeType="1" noTextEdit="1"/>
+              </p:cNvSpPr>
+              <p:nvPr>
+                <p:ph idx="1"/>
+              </p:nvPr>
+            </p:nvSpPr>
+            <p:spPr>
+              <a:blipFill>
+                <a:blip r:embed="rId2"/>
+                <a:stretch>
+                  <a:fillRect l="-324" t="-403"/>
+                </a:stretch>
+              </a:blipFill>
+            </p:spPr>
+            <p:txBody>
+              <a:bodyPr/>
+              <a:lstStyle/>
+              <a:p>
+                <a:r>
+                  <a:rPr lang="en-US">
+                    <a:noFill/>
+                  </a:rPr>
+                  <a:t> </a:t>
+                </a:r>
+              </a:p>
+            </p:txBody>
+          </p:sp>
+        </mc:Fallback>
       </mc:AlternateContent>
+      <p:pic>
+        <p:nvPicPr>
+          <p:cNvPr id="4" name="Picture 3">
+            <a:extLst>
+              <a:ext uri="{FF2B5EF4-FFF2-40B4-BE49-F238E27FC236}">
+                <a16:creationId xmlns:a16="http://schemas.microsoft.com/office/drawing/2014/main" id="{EB8F91EA-6A76-530E-B234-8D37432DA72C}"/>
+              </a:ext>
+            </a:extLst>
+          </p:cNvPr>
+          <p:cNvPicPr>
+            <a:picLocks noChangeAspect="1"/>
+          </p:cNvPicPr>
+          <p:nvPr/>
+        </p:nvPicPr>
+        <p:blipFill>
+          <a:blip r:embed="rId3"/>
+          <a:stretch>
+            <a:fillRect/>
+          </a:stretch>
+        </p:blipFill>
+        <p:spPr>
+          <a:xfrm>
+            <a:off x="6237516" y="3038823"/>
+            <a:ext cx="2721429" cy="1850572"/>
+          </a:xfrm>
+          <a:prstGeom prst="rect">
+            <a:avLst/>
+          </a:prstGeom>
+        </p:spPr>
+      </p:pic>
     </p:spTree>
   </p:cSld>
+  <p:clrMapOvr>
+    <a:masterClrMapping/>
+  </p:clrMapOvr>
 </p:sld>
 </file>
 
@@ -4832,11 +6857,10 @@
           <a:bodyPr/>
           <a:lstStyle/>
           <a:p>
-            <a:pPr lvl="0" indent="0" marL="0">
+            <a:pPr marL="0" lvl="0" indent="0">
               <a:buNone/>
             </a:pPr>
             <a:r>
-              <a:rPr/>
               <a:t>이항분포</a:t>
             </a:r>
           </a:p>
@@ -4859,45 +6883,141 @@
               <a:bodyPr/>
               <a:lstStyle/>
               <a:p>
-                <a:pPr lvl="0" indent="0" marL="0">
-                  <a:spcBef>
-                    <a:spcPts val="3000"/>
-                  </a:spcBef>
-                  <a:buNone/>
-                </a:pPr>
-                <a:r>
-                  <a:rPr b="1"/>
-                  <a:t>발견자</a:t>
-                </a:r>
+                <a:pPr lvl="0"/>
+                <a:r>
+                  <a:rPr dirty="0"/>
+                  <a:t>Jacob </a:t>
+                </a:r>
+                <a:r>
+                  <a:rPr dirty="0" err="1"/>
+                  <a:t>Bernoulli의</a:t>
+                </a:r>
+                <a:r>
+                  <a:rPr dirty="0"/>
+                  <a:t> </a:t>
+                </a:r>
+                <a:r>
+                  <a:rPr dirty="0" err="1"/>
+                  <a:t>연구를</a:t>
+                </a:r>
+                <a:r>
+                  <a:rPr dirty="0"/>
+                  <a:t> </a:t>
+                </a:r>
+                <a:r>
+                  <a:rPr dirty="0" err="1"/>
+                  <a:t>바탕으로</a:t>
+                </a:r>
+                <a:r>
+                  <a:rPr dirty="0"/>
+                  <a:t> </a:t>
+                </a:r>
+                <a:r>
+                  <a:rPr dirty="0" err="1"/>
+                  <a:t>발전하였으며</a:t>
+                </a:r>
+                <a:r>
+                  <a:rPr dirty="0"/>
+                  <a:t>, </a:t>
+                </a:r>
+                <a:r>
+                  <a:rPr dirty="0" err="1"/>
+                  <a:t>이후</a:t>
+                </a:r>
+                <a:r>
+                  <a:rPr dirty="0"/>
+                  <a:t> Abraham de </a:t>
+                </a:r>
+                <a:r>
+                  <a:rPr dirty="0" err="1"/>
+                  <a:t>Moivre가</a:t>
+                </a:r>
+                <a:r>
+                  <a:rPr dirty="0"/>
+                  <a:t> </a:t>
+                </a:r>
+                <a:r>
+                  <a:rPr dirty="0" err="1"/>
+                  <a:t>체계적으로</a:t>
+                </a:r>
+                <a:r>
+                  <a:rPr dirty="0"/>
+                  <a:t> </a:t>
+                </a:r>
+                <a:r>
+                  <a:rPr dirty="0" err="1"/>
+                  <a:t>다룸</a:t>
+                </a:r>
+                <a:endParaRPr dirty="0"/>
               </a:p>
               <a:p>
                 <a:pPr lvl="0"/>
                 <a:r>
-                  <a:rPr/>
-                  <a:t>Jacob Bernoulli의 연구를 바탕으로 발전하였으며, 이후 Abraham de Moivre가 체계적으로 다룸</a:t>
-                </a:r>
+                  <a:rPr dirty="0"/>
+                  <a:t>18세기 </a:t>
+                </a:r>
+                <a:r>
+                  <a:rPr dirty="0" err="1"/>
+                  <a:t>초반</a:t>
+                </a:r>
+                <a:r>
+                  <a:rPr dirty="0"/>
+                  <a:t> (1700년대) </a:t>
+                </a:r>
+                <a:r>
+                  <a:rPr dirty="0" err="1"/>
+                  <a:t>에</a:t>
+                </a:r>
+                <a:r>
+                  <a:rPr dirty="0"/>
+                  <a:t> </a:t>
+                </a:r>
+                <a:r>
+                  <a:rPr dirty="0" err="1"/>
+                  <a:t>이항분포를</a:t>
+                </a:r>
+                <a:r>
+                  <a:rPr dirty="0"/>
+                  <a:t> </a:t>
+                </a:r>
+                <a:r>
+                  <a:rPr dirty="0" err="1"/>
+                  <a:t>정의하였으며</a:t>
+                </a:r>
+                <a:r>
+                  <a:rPr dirty="0"/>
+                  <a:t> </a:t>
+                </a:r>
+                <a:r>
+                  <a:rPr dirty="0" err="1"/>
+                  <a:t>추후</a:t>
+                </a:r>
+                <a:r>
+                  <a:rPr dirty="0"/>
+                  <a:t> </a:t>
+                </a:r>
+                <a:r>
+                  <a:rPr dirty="0" err="1"/>
+                  <a:t>정규분포로</a:t>
+                </a:r>
+                <a:r>
+                  <a:rPr dirty="0"/>
+                  <a:t> </a:t>
+                </a:r>
+                <a:r>
+                  <a:rPr dirty="0" err="1"/>
+                  <a:t>발전</a:t>
+                </a:r>
+                <a:endParaRPr lang="en-US" dirty="0"/>
               </a:p>
               <a:p>
                 <a:pPr lvl="0"/>
-                <a:r>
-                  <a:rPr/>
-                  <a:t>18세기 초반 (1700년대) 에 이항분포를 정의하였으며 추후 정규분포로 발전</a:t>
-                </a:r>
+                <a:endParaRPr dirty="0"/>
               </a:p>
               <a:p>
-                <a:pPr lvl="0" indent="0" marL="0">
-                  <a:spcBef>
-                    <a:spcPts val="3000"/>
-                  </a:spcBef>
+                <a:pPr marL="0" lvl="0" indent="0">
                   <a:buNone/>
                 </a:pPr>
-                <a:r>
-                  <a:rPr b="1"/>
-                  <a:t>이항분포</a:t>
-                </a:r>
-              </a:p>
-              <a:p>
-                <a:pPr lvl="0"/>
                 <a14:m>
                   <m:oMathPara xmlns:m="http://schemas.openxmlformats.org/officeDocument/2006/math">
                     <m:oMathParaPr>
@@ -4905,88 +7025,356 @@
                     </m:oMathParaPr>
                     <m:oMath>
                       <m:r>
-                        <m:t>X</m:t>
+                        <a:rPr>
+                          <a:latin typeface="Cambria Math" panose="02040503050406030204" pitchFamily="18" charset="0"/>
+                        </a:rPr>
+                        <m:t>𝑋</m:t>
                       </m:r>
                       <m:r>
-                        <m:rPr>
-                          <m:sty m:val="p"/>
-                        </m:rPr>
+                        <a:rPr>
+                          <a:latin typeface="Cambria Math" panose="02040503050406030204" pitchFamily="18" charset="0"/>
+                        </a:rPr>
                         <m:t>∼</m:t>
                       </m:r>
                       <m:r>
-                        <m:t>B</m:t>
+                        <a:rPr>
+                          <a:latin typeface="Cambria Math" panose="02040503050406030204" pitchFamily="18" charset="0"/>
+                        </a:rPr>
+                        <m:t>𝐵</m:t>
                       </m:r>
-                      <m:r>
-                        <m:rPr>
-                          <m:sty m:val="p"/>
-                        </m:rPr>
-                        <m:t>(</m:t>
-                      </m:r>
-                      <m:r>
-                        <m:t>n</m:t>
-                      </m:r>
-                      <m:r>
-                        <m:rPr>
-                          <m:sty m:val="p"/>
-                        </m:rPr>
-                        <m:t>,</m:t>
-                      </m:r>
-                      <m:r>
-                        <m:t>p</m:t>
-                      </m:r>
-                      <m:r>
-                        <m:rPr>
-                          <m:sty m:val="p"/>
-                        </m:rPr>
-                        <m:t>)</m:t>
-                      </m:r>
+                      <m:d>
+                        <m:dPr>
+                          <m:ctrlPr>
+                            <a:rPr>
+                              <a:latin typeface="Cambria Math" panose="02040503050406030204" pitchFamily="18" charset="0"/>
+                            </a:rPr>
+                          </m:ctrlPr>
+                        </m:dPr>
+                        <m:e>
+                          <m:r>
+                            <a:rPr>
+                              <a:latin typeface="Cambria Math" panose="02040503050406030204" pitchFamily="18" charset="0"/>
+                            </a:rPr>
+                            <m:t>𝑛</m:t>
+                          </m:r>
+                          <m:r>
+                            <a:rPr>
+                              <a:latin typeface="Cambria Math" panose="02040503050406030204" pitchFamily="18" charset="0"/>
+                            </a:rPr>
+                            <m:t>,</m:t>
+                          </m:r>
+                          <m:r>
+                            <a:rPr>
+                              <a:latin typeface="Cambria Math" panose="02040503050406030204" pitchFamily="18" charset="0"/>
+                            </a:rPr>
+                            <m:t>𝑝</m:t>
+                          </m:r>
+                        </m:e>
+                      </m:d>
                     </m:oMath>
                   </m:oMathPara>
                 </a14:m>
+                <a:endParaRPr dirty="0"/>
+              </a:p>
+              <a:p>
+                <a:pPr marL="0" lvl="0" indent="0">
+                  <a:spcBef>
+                    <a:spcPts val="3000"/>
+                  </a:spcBef>
+                  <a:buNone/>
+                </a:pPr>
+                <a:r>
+                  <a:rPr b="1" dirty="0" err="1"/>
+                  <a:t>왜</a:t>
+                </a:r>
+                <a:r>
+                  <a:rPr b="1" dirty="0"/>
+                  <a:t> </a:t>
+                </a:r>
+                <a:r>
+                  <a:rPr b="1" dirty="0" err="1"/>
+                  <a:t>필요했을까</a:t>
+                </a:r>
+                <a:r>
+                  <a:rPr b="1" dirty="0"/>
+                  <a:t>?</a:t>
+                </a:r>
               </a:p>
               <a:p>
                 <a:pPr lvl="0"/>
                 <a:r>
-                  <a:rPr/>
-                  <a:t>### 왜 필요했을까?</a:t>
+                  <a:rPr dirty="0" err="1"/>
+                  <a:t>한</a:t>
+                </a:r>
+                <a:r>
+                  <a:rPr dirty="0"/>
+                  <a:t> </a:t>
+                </a:r>
+                <a:r>
+                  <a:rPr dirty="0" err="1"/>
+                  <a:t>성공할</a:t>
+                </a:r>
+                <a:r>
+                  <a:rPr dirty="0"/>
+                  <a:t> </a:t>
+                </a:r>
+                <a:r>
+                  <a:rPr dirty="0" err="1"/>
+                  <a:t>확률</a:t>
+                </a:r>
+                <a:r>
+                  <a:rPr dirty="0"/>
+                  <a:t>? -&gt; 100번 </a:t>
+                </a:r>
+                <a:r>
+                  <a:rPr dirty="0" err="1"/>
+                  <a:t>중</a:t>
+                </a:r>
+                <a:r>
+                  <a:rPr dirty="0"/>
+                  <a:t> </a:t>
+                </a:r>
+                <a:r>
+                  <a:rPr dirty="0" err="1"/>
+                  <a:t>몇</a:t>
+                </a:r>
+                <a:r>
+                  <a:rPr dirty="0"/>
+                  <a:t> </a:t>
+                </a:r>
+                <a:r>
+                  <a:rPr dirty="0" err="1"/>
+                  <a:t>번</a:t>
+                </a:r>
+                <a:r>
+                  <a:rPr dirty="0"/>
+                  <a:t> </a:t>
+                </a:r>
+                <a:r>
+                  <a:rPr dirty="0" err="1"/>
+                  <a:t>성공할까</a:t>
+                </a:r>
+                <a:r>
+                  <a:rPr dirty="0"/>
+                  <a:t>?</a:t>
                 </a:r>
               </a:p>
               <a:p>
                 <a:pPr lvl="0"/>
                 <a:r>
-                  <a:rPr/>
-                  <a:t>한 성공할 확률? -&gt; 100번 중 몇 번 성공할까?</a:t>
-                </a:r>
+                  <a:rPr dirty="0" err="1"/>
+                  <a:t>베르누이</a:t>
+                </a:r>
+                <a:r>
+                  <a:rPr dirty="0"/>
+                  <a:t> </a:t>
+                </a:r>
+                <a:r>
+                  <a:rPr dirty="0" err="1"/>
+                  <a:t>시행을</a:t>
+                </a:r>
+                <a:r>
+                  <a:rPr dirty="0"/>
+                  <a:t> </a:t>
+                </a:r>
+                <a:r>
+                  <a:rPr dirty="0" err="1"/>
+                  <a:t>여러</a:t>
+                </a:r>
+                <a:r>
+                  <a:rPr dirty="0"/>
+                  <a:t> </a:t>
+                </a:r>
+                <a:r>
+                  <a:rPr dirty="0" err="1"/>
+                  <a:t>번</a:t>
+                </a:r>
+                <a:r>
+                  <a:rPr dirty="0"/>
+                  <a:t> </a:t>
+                </a:r>
+                <a:r>
+                  <a:rPr dirty="0" err="1"/>
+                  <a:t>반복했을</a:t>
+                </a:r>
+                <a:r>
+                  <a:rPr dirty="0"/>
+                  <a:t> </a:t>
+                </a:r>
+                <a:r>
+                  <a:rPr dirty="0" err="1"/>
+                  <a:t>때</a:t>
+                </a:r>
+                <a:r>
+                  <a:rPr dirty="0"/>
+                  <a:t> </a:t>
+                </a:r>
+                <a:r>
+                  <a:rPr dirty="0" err="1"/>
+                  <a:t>성공</a:t>
+                </a:r>
+                <a:r>
+                  <a:rPr dirty="0"/>
+                  <a:t> </a:t>
+                </a:r>
+                <a:r>
+                  <a:rPr dirty="0" err="1"/>
+                  <a:t>횟수의</a:t>
+                </a:r>
+                <a:r>
+                  <a:rPr dirty="0"/>
+                  <a:t> </a:t>
+                </a:r>
+                <a:r>
+                  <a:rPr dirty="0" err="1"/>
+                  <a:t>분포</a:t>
+                </a:r>
+                <a:endParaRPr dirty="0"/>
               </a:p>
               <a:p>
                 <a:pPr lvl="0"/>
                 <a:r>
-                  <a:rPr/>
-                  <a:t>베르누이 시행을 여러 번 반복했을 때 성공 횟수의 분포</a:t>
-                </a:r>
-              </a:p>
-              <a:p>
-                <a:pPr lvl="0"/>
-                <a:r>
-                  <a:rPr/>
-                  <a:t>예) - 동전 20번 던졌을 때 앞면 개수 - 자유투 10번 성공 횟수</a:t>
-                </a:r>
-              </a:p>
-              <a:p>
-                <a:pPr lvl="0" indent="0" marL="0">
-                  <a:buNone/>
-                </a:pPr>
-                <a:r>
-                  <a:rPr/>
-                  <a:t>(이항분포 그림)</a:t>
-                </a:r>
+                  <a:rPr dirty="0" err="1"/>
+                  <a:t>예</a:t>
+                </a:r>
+                <a:r>
+                  <a:rPr dirty="0"/>
+                  <a:t>) - </a:t>
+                </a:r>
+                <a:r>
+                  <a:rPr dirty="0" err="1"/>
+                  <a:t>동전</a:t>
+                </a:r>
+                <a:r>
+                  <a:rPr dirty="0"/>
+                  <a:t> 20번 </a:t>
+                </a:r>
+                <a:r>
+                  <a:rPr dirty="0" err="1"/>
+                  <a:t>던졌을</a:t>
+                </a:r>
+                <a:r>
+                  <a:rPr dirty="0"/>
+                  <a:t> </a:t>
+                </a:r>
+                <a:r>
+                  <a:rPr dirty="0" err="1"/>
+                  <a:t>때</a:t>
+                </a:r>
+                <a:r>
+                  <a:rPr dirty="0"/>
+                  <a:t> </a:t>
+                </a:r>
+                <a:r>
+                  <a:rPr dirty="0" err="1"/>
+                  <a:t>앞면</a:t>
+                </a:r>
+                <a:r>
+                  <a:rPr dirty="0"/>
+                  <a:t> </a:t>
+                </a:r>
+                <a:r>
+                  <a:rPr dirty="0" err="1"/>
+                  <a:t>개수</a:t>
+                </a:r>
+                <a:r>
+                  <a:rPr dirty="0"/>
+                  <a:t> - </a:t>
+                </a:r>
+                <a:r>
+                  <a:rPr dirty="0" err="1"/>
+                  <a:t>자유투</a:t>
+                </a:r>
+                <a:r>
+                  <a:rPr dirty="0"/>
+                  <a:t> 10번 </a:t>
+                </a:r>
+                <a:r>
+                  <a:rPr dirty="0" err="1"/>
+                  <a:t>성공</a:t>
+                </a:r>
+                <a:r>
+                  <a:rPr dirty="0"/>
+                  <a:t> </a:t>
+                </a:r>
+                <a:r>
+                  <a:rPr dirty="0" err="1"/>
+                  <a:t>횟수</a:t>
+                </a:r>
+                <a:endParaRPr dirty="0"/>
               </a:p>
             </p:txBody>
           </p:sp>
         </mc:Choice>
+        <mc:Fallback>
+          <p:sp>
+            <p:nvSpPr>
+              <p:cNvPr id="3" name="Content Placeholder 2"/>
+              <p:cNvSpPr>
+                <a:spLocks noGrp="1" noRot="1" noChangeAspect="1" noMove="1" noResize="1" noEditPoints="1" noAdjustHandles="1" noChangeArrowheads="1" noChangeShapeType="1" noTextEdit="1"/>
+              </p:cNvSpPr>
+              <p:nvPr>
+                <p:ph idx="1"/>
+              </p:nvPr>
+            </p:nvSpPr>
+            <p:spPr>
+              <a:blipFill>
+                <a:blip r:embed="rId2"/>
+                <a:stretch>
+                  <a:fillRect l="-485" t="-403"/>
+                </a:stretch>
+              </a:blipFill>
+            </p:spPr>
+            <p:txBody>
+              <a:bodyPr/>
+              <a:lstStyle/>
+              <a:p>
+                <a:r>
+                  <a:rPr lang="en-US">
+                    <a:noFill/>
+                  </a:rPr>
+                  <a:t> </a:t>
+                </a:r>
+              </a:p>
+            </p:txBody>
+          </p:sp>
+        </mc:Fallback>
       </mc:AlternateContent>
+      <p:pic>
+        <p:nvPicPr>
+          <p:cNvPr id="4" name="Picture 3">
+            <a:extLst>
+              <a:ext uri="{FF2B5EF4-FFF2-40B4-BE49-F238E27FC236}">
+                <a16:creationId xmlns:a16="http://schemas.microsoft.com/office/drawing/2014/main" id="{B437CE5D-093E-A99E-64F0-922AD93708AF}"/>
+              </a:ext>
+            </a:extLst>
+          </p:cNvPr>
+          <p:cNvPicPr>
+            <a:picLocks noChangeAspect="1"/>
+          </p:cNvPicPr>
+          <p:nvPr/>
+        </p:nvPicPr>
+        <p:blipFill>
+          <a:blip r:embed="rId3"/>
+          <a:stretch>
+            <a:fillRect/>
+          </a:stretch>
+        </p:blipFill>
+        <p:spPr>
+          <a:xfrm>
+            <a:off x="6289222" y="2895600"/>
+            <a:ext cx="2476500" cy="1638300"/>
+          </a:xfrm>
+          <a:prstGeom prst="rect">
+            <a:avLst/>
+          </a:prstGeom>
+        </p:spPr>
+      </p:pic>
     </p:spTree>
   </p:cSld>
+  <p:clrMapOvr>
+    <a:masterClrMapping/>
+  </p:clrMapOvr>
 </p:sld>
 </file>
 
@@ -5007,6 +7395,36 @@
           <a:chExt cx="0" cy="0"/>
         </a:xfrm>
       </p:grpSpPr>
+      <p:pic>
+        <p:nvPicPr>
+          <p:cNvPr id="4" name="Picture 3">
+            <a:extLst>
+              <a:ext uri="{FF2B5EF4-FFF2-40B4-BE49-F238E27FC236}">
+                <a16:creationId xmlns:a16="http://schemas.microsoft.com/office/drawing/2014/main" id="{B3E5833F-0657-A76E-A79E-780B07FC43CD}"/>
+              </a:ext>
+            </a:extLst>
+          </p:cNvPr>
+          <p:cNvPicPr>
+            <a:picLocks noChangeAspect="1"/>
+          </p:cNvPicPr>
+          <p:nvPr/>
+        </p:nvPicPr>
+        <p:blipFill>
+          <a:blip r:embed="rId2"/>
+          <a:stretch>
+            <a:fillRect/>
+          </a:stretch>
+        </p:blipFill>
+        <p:spPr>
+          <a:xfrm>
+            <a:off x="6340234" y="2234303"/>
+            <a:ext cx="2518014" cy="1371601"/>
+          </a:xfrm>
+          <a:prstGeom prst="rect">
+            <a:avLst/>
+          </a:prstGeom>
+        </p:spPr>
+      </p:pic>
       <p:sp>
         <p:nvSpPr>
           <p:cNvPr id="2" name="Title 1"/>
@@ -5027,11 +7445,10 @@
           <a:bodyPr/>
           <a:lstStyle/>
           <a:p>
-            <a:pPr lvl="0" indent="0" marL="0">
+            <a:pPr marL="0" lvl="0" indent="0">
               <a:buNone/>
             </a:pPr>
             <a:r>
-              <a:rPr/>
               <a:t>정규분포</a:t>
             </a:r>
           </a:p>
@@ -5051,55 +7468,247 @@
             </p:nvSpPr>
             <p:spPr/>
             <p:txBody>
-              <a:bodyPr/>
+              <a:bodyPr>
+                <a:normAutofit/>
+              </a:bodyPr>
               <a:lstStyle/>
               <a:p>
-                <a:pPr lvl="0" indent="0" marL="0">
-                  <a:spcBef>
-                    <a:spcPts val="3000"/>
-                  </a:spcBef>
-                  <a:buNone/>
-                </a:pPr>
-                <a:r>
-                  <a:rPr b="1"/>
-                  <a:t>발견자</a:t>
-                </a:r>
+                <a:pPr lvl="0"/>
+                <a:r>
+                  <a:rPr dirty="0"/>
+                  <a:t>Abraham de </a:t>
+                </a:r>
+                <a:r>
+                  <a:rPr dirty="0" err="1"/>
+                  <a:t>Moivre가</a:t>
+                </a:r>
+                <a:r>
+                  <a:rPr dirty="0"/>
+                  <a:t> 1733년에 </a:t>
+                </a:r>
+                <a:r>
+                  <a:rPr dirty="0" err="1"/>
+                  <a:t>이항분포의</a:t>
+                </a:r>
+                <a:r>
+                  <a:rPr dirty="0"/>
+                  <a:t> </a:t>
+                </a:r>
+                <a:r>
+                  <a:rPr dirty="0" err="1"/>
+                  <a:t>근사곡선을</a:t>
+                </a:r>
+                <a:r>
+                  <a:rPr dirty="0"/>
+                  <a:t> </a:t>
+                </a:r>
+                <a:r>
+                  <a:rPr dirty="0" err="1"/>
+                  <a:t>발견하였고</a:t>
+                </a:r>
+                <a:r>
+                  <a:rPr dirty="0"/>
+                  <a:t>, </a:t>
+                </a:r>
+                <a:r>
+                  <a:rPr dirty="0" err="1"/>
+                  <a:t>이후</a:t>
+                </a:r>
+                <a:r>
+                  <a:rPr dirty="0"/>
+                  <a:t> Carl Friedrich </a:t>
+                </a:r>
+                <a:r>
+                  <a:rPr dirty="0" err="1"/>
+                  <a:t>Gauss가</a:t>
+                </a:r>
+                <a:r>
+                  <a:rPr dirty="0"/>
+                  <a:t> </a:t>
+                </a:r>
+                <a:br>
+                  <a:rPr lang="en-US" dirty="0"/>
+                </a:br>
+                <a:r>
+                  <a:rPr dirty="0"/>
+                  <a:t>1809년 </a:t>
+                </a:r>
+                <a:r>
+                  <a:rPr dirty="0" err="1"/>
+                  <a:t>측정오차</a:t>
+                </a:r>
+                <a:r>
+                  <a:rPr dirty="0"/>
+                  <a:t> </a:t>
+                </a:r>
+                <a:r>
+                  <a:rPr dirty="0" err="1"/>
+                  <a:t>연구에서</a:t>
+                </a:r>
+                <a:r>
+                  <a:rPr dirty="0"/>
+                  <a:t> </a:t>
+                </a:r>
+                <a:r>
+                  <a:rPr dirty="0" err="1"/>
+                  <a:t>활용</a:t>
+                </a:r>
+                <a:endParaRPr dirty="0"/>
               </a:p>
               <a:p>
                 <a:pPr lvl="0"/>
                 <a:r>
-                  <a:rPr/>
-                  <a:t>Abraham de Moivre가 1733년에 이항분포의 근사곡선을 발견하였고, 이후 Carl Friedrich Gauss가 1809년 측정오차 연구에서 활용</a:t>
-                </a:r>
+                  <a:rPr dirty="0" err="1"/>
+                  <a:t>도박</a:t>
+                </a:r>
+                <a:r>
+                  <a:rPr dirty="0"/>
+                  <a:t> </a:t>
+                </a:r>
+                <a:r>
+                  <a:rPr dirty="0" err="1"/>
+                  <a:t>문제를</a:t>
+                </a:r>
+                <a:r>
+                  <a:rPr dirty="0"/>
+                  <a:t> </a:t>
+                </a:r>
+                <a:r>
+                  <a:rPr dirty="0" err="1"/>
+                  <a:t>계산하기</a:t>
+                </a:r>
+                <a:r>
+                  <a:rPr dirty="0"/>
+                  <a:t> </a:t>
+                </a:r>
+                <a:r>
+                  <a:rPr dirty="0" err="1"/>
+                  <a:t>쉽게</a:t>
+                </a:r>
+                <a:r>
+                  <a:rPr dirty="0"/>
+                  <a:t> </a:t>
+                </a:r>
+                <a:r>
+                  <a:rPr dirty="0" err="1"/>
+                  <a:t>만들기</a:t>
+                </a:r>
+                <a:r>
+                  <a:rPr dirty="0"/>
+                  <a:t> </a:t>
+                </a:r>
+                <a:r>
+                  <a:rPr dirty="0" err="1"/>
+                  <a:t>위해</a:t>
+                </a:r>
+                <a:r>
+                  <a:rPr dirty="0"/>
+                  <a:t> </a:t>
+                </a:r>
+                <a:r>
+                  <a:rPr dirty="0" err="1"/>
+                  <a:t>처음</a:t>
+                </a:r>
+                <a:r>
+                  <a:rPr dirty="0"/>
+                  <a:t> </a:t>
+                </a:r>
+                <a:r>
+                  <a:rPr dirty="0" err="1"/>
+                  <a:t>등장</a:t>
+                </a:r>
+                <a:endParaRPr dirty="0"/>
               </a:p>
               <a:p>
                 <a:pPr lvl="0"/>
                 <a:r>
-                  <a:rPr/>
-                  <a:t>도박 문제를 계산하기 쉽게 만들기 위해 처음 등장</a:t>
-                </a:r>
+                  <a:rPr dirty="0" err="1"/>
+                  <a:t>이후</a:t>
+                </a:r>
+                <a:r>
+                  <a:rPr dirty="0"/>
+                  <a:t> </a:t>
+                </a:r>
+                <a:r>
+                  <a:rPr dirty="0" err="1"/>
+                  <a:t>천문학에서</a:t>
+                </a:r>
+                <a:r>
+                  <a:rPr dirty="0"/>
+                  <a:t> </a:t>
+                </a:r>
+                <a:r>
+                  <a:rPr dirty="0" err="1"/>
+                  <a:t>관측</a:t>
+                </a:r>
+                <a:r>
+                  <a:rPr dirty="0"/>
+                  <a:t> </a:t>
+                </a:r>
+                <a:r>
+                  <a:rPr dirty="0" err="1"/>
+                  <a:t>오차</a:t>
+                </a:r>
+                <a:r>
+                  <a:rPr dirty="0"/>
+                  <a:t>, </a:t>
+                </a:r>
+                <a:r>
+                  <a:rPr dirty="0" err="1"/>
+                  <a:t>측정</a:t>
+                </a:r>
+                <a:r>
+                  <a:rPr dirty="0"/>
+                  <a:t> </a:t>
+                </a:r>
+                <a:r>
+                  <a:rPr dirty="0" err="1"/>
+                  <a:t>오차</a:t>
+                </a:r>
+                <a:r>
+                  <a:rPr dirty="0"/>
+                  <a:t> </a:t>
+                </a:r>
+                <a:r>
+                  <a:rPr dirty="0" err="1"/>
+                  <a:t>를</a:t>
+                </a:r>
+                <a:r>
+                  <a:rPr dirty="0"/>
+                  <a:t> </a:t>
+                </a:r>
+                <a:r>
+                  <a:rPr dirty="0" err="1"/>
+                  <a:t>설명하기</a:t>
+                </a:r>
+                <a:r>
+                  <a:rPr dirty="0"/>
+                  <a:t> </a:t>
+                </a:r>
+                <a:r>
+                  <a:rPr dirty="0" err="1"/>
+                  <a:t>위해</a:t>
+                </a:r>
+                <a:r>
+                  <a:rPr dirty="0"/>
+                  <a:t> </a:t>
+                </a:r>
+                <a:r>
+                  <a:rPr dirty="0" err="1"/>
+                  <a:t>사용</a:t>
+                </a:r>
+                <a:endParaRPr dirty="0"/>
               </a:p>
               <a:p>
-                <a:pPr lvl="0"/>
-                <a:r>
-                  <a:rPr/>
-                  <a:t>이후 천문학에서 관측 오차, 측정 오차 를 설명하기 위해 사용</a:t>
-                </a:r>
+                <a:pPr marL="0" lvl="0" indent="0">
+                  <a:buNone/>
+                </a:pPr>
+                <a:endParaRPr lang="en-US" dirty="0">
+                  <a:latin typeface="Cambria Math" panose="02040503050406030204" pitchFamily="18" charset="0"/>
+                </a:endParaRPr>
               </a:p>
               <a:p>
-                <a:pPr lvl="0" indent="0" marL="0">
-                  <a:spcBef>
-                    <a:spcPts val="3000"/>
-                  </a:spcBef>
-                  <a:buNone/>
-                </a:pPr>
-                <a:r>
-                  <a:rPr b="1"/>
-                  <a:t>정규분포</a:t>
-                </a:r>
-              </a:p>
-              <a:p>
-                <a:pPr lvl="0" indent="0" marL="0">
+                <a:pPr marL="0" lvl="0" indent="0">
                   <a:buNone/>
                 </a:pPr>
                 <a14:m>
@@ -5109,78 +7718,331 @@
                     </m:oMathParaPr>
                     <m:oMath>
                       <m:r>
-                        <m:t>X</m:t>
+                        <a:rPr>
+                          <a:latin typeface="Cambria Math" panose="02040503050406030204" pitchFamily="18" charset="0"/>
+                        </a:rPr>
+                        <m:t>𝑋</m:t>
                       </m:r>
                       <m:r>
-                        <m:rPr>
-                          <m:sty m:val="p"/>
-                        </m:rPr>
+                        <a:rPr>
+                          <a:latin typeface="Cambria Math" panose="02040503050406030204" pitchFamily="18" charset="0"/>
+                        </a:rPr>
                         <m:t>∼</m:t>
                       </m:r>
                       <m:r>
-                        <m:t>N</m:t>
+                        <a:rPr>
+                          <a:latin typeface="Cambria Math" panose="02040503050406030204" pitchFamily="18" charset="0"/>
+                        </a:rPr>
+                        <m:t>𝑁</m:t>
                       </m:r>
-                      <m:r>
-                        <m:rPr>
-                          <m:sty m:val="p"/>
-                        </m:rPr>
-                        <m:t>(</m:t>
-                      </m:r>
-                      <m:r>
-                        <m:t>μ</m:t>
-                      </m:r>
-                      <m:r>
-                        <m:rPr>
-                          <m:sty m:val="p"/>
-                        </m:rPr>
-                        <m:t>,</m:t>
-                      </m:r>
-                      <m:sSup>
+                      <m:d>
+                        <m:dPr>
+                          <m:ctrlPr>
+                            <a:rPr>
+                              <a:latin typeface="Cambria Math" panose="02040503050406030204" pitchFamily="18" charset="0"/>
+                            </a:rPr>
+                          </m:ctrlPr>
+                        </m:dPr>
                         <m:e>
                           <m:r>
-                            <m:t>σ</m:t>
+                            <a:rPr>
+                              <a:latin typeface="Cambria Math" panose="02040503050406030204" pitchFamily="18" charset="0"/>
+                            </a:rPr>
+                            <m:t>𝜇</m:t>
                           </m:r>
+                          <m:r>
+                            <a:rPr>
+                              <a:latin typeface="Cambria Math" panose="02040503050406030204" pitchFamily="18" charset="0"/>
+                            </a:rPr>
+                            <m:t>,</m:t>
+                          </m:r>
+                          <m:sSup>
+                            <m:sSupPr>
+                              <m:ctrlPr>
+                                <a:rPr>
+                                  <a:latin typeface="Cambria Math" panose="02040503050406030204" pitchFamily="18" charset="0"/>
+                                </a:rPr>
+                              </m:ctrlPr>
+                            </m:sSupPr>
+                            <m:e>
+                              <m:r>
+                                <a:rPr>
+                                  <a:latin typeface="Cambria Math" panose="02040503050406030204" pitchFamily="18" charset="0"/>
+                                </a:rPr>
+                                <m:t>𝜎</m:t>
+                              </m:r>
+                            </m:e>
+                            <m:sup>
+                              <m:r>
+                                <a:rPr>
+                                  <a:latin typeface="Cambria Math" panose="02040503050406030204" pitchFamily="18" charset="0"/>
+                                </a:rPr>
+                                <m:t>2</m:t>
+                              </m:r>
+                            </m:sup>
+                          </m:sSup>
                         </m:e>
-                        <m:sup>
-                          <m:r>
-                            <m:t>2</m:t>
-                          </m:r>
-                        </m:sup>
-                      </m:sSup>
-                      <m:r>
-                        <m:rPr>
-                          <m:sty m:val="p"/>
-                        </m:rPr>
-                        <m:t>)</m:t>
-                      </m:r>
+                      </m:d>
                     </m:oMath>
                   </m:oMathPara>
                 </a14:m>
+                <a:endParaRPr dirty="0"/>
               </a:p>
               <a:p>
-                <a:pPr lvl="0" indent="0" marL="0">
+                <a:pPr lvl="0"/>
+                <a:endParaRPr lang="en-US" dirty="0"/>
+              </a:p>
+              <a:p>
+                <a:pPr lvl="0"/>
+                <a:r>
+                  <a:rPr dirty="0" err="1"/>
+                  <a:t>평균</a:t>
+                </a:r>
+                <a:r>
+                  <a:rPr dirty="0"/>
+                  <a:t> </a:t>
+                </a:r>
+                <a:r>
+                  <a:rPr dirty="0" err="1"/>
+                  <a:t>근처</a:t>
+                </a:r>
+                <a:r>
+                  <a:rPr dirty="0"/>
+                  <a:t> </a:t>
+                </a:r>
+                <a:r>
+                  <a:rPr dirty="0" err="1"/>
+                  <a:t>값이</a:t>
+                </a:r>
+                <a:r>
+                  <a:rPr dirty="0"/>
+                  <a:t> </a:t>
+                </a:r>
+                <a:r>
+                  <a:rPr dirty="0" err="1"/>
+                  <a:t>가장</a:t>
+                </a:r>
+                <a:r>
+                  <a:rPr dirty="0"/>
+                  <a:t> </a:t>
+                </a:r>
+                <a:r>
+                  <a:rPr dirty="0" err="1"/>
+                  <a:t>많이</a:t>
+                </a:r>
+                <a:r>
+                  <a:rPr dirty="0"/>
+                  <a:t> </a:t>
+                </a:r>
+                <a:r>
+                  <a:rPr dirty="0" err="1"/>
+                  <a:t>나타나고</a:t>
+                </a:r>
+                <a:r>
+                  <a:rPr dirty="0"/>
+                  <a:t> </a:t>
+                </a:r>
+                <a:r>
+                  <a:rPr dirty="0" err="1"/>
+                  <a:t>양쪽으로</a:t>
+                </a:r>
+                <a:r>
+                  <a:rPr dirty="0"/>
+                  <a:t> </a:t>
+                </a:r>
+                <a:r>
+                  <a:rPr dirty="0" err="1"/>
+                  <a:t>갈수록</a:t>
+                </a:r>
+                <a:r>
+                  <a:rPr dirty="0"/>
+                  <a:t> </a:t>
+                </a:r>
+                <a:r>
+                  <a:rPr dirty="0" err="1"/>
+                  <a:t>빈도가</a:t>
+                </a:r>
+                <a:r>
+                  <a:rPr dirty="0"/>
+                  <a:t> </a:t>
+                </a:r>
+                <a:r>
+                  <a:rPr dirty="0" err="1"/>
+                  <a:t>감소하는</a:t>
+                </a:r>
+                <a:r>
+                  <a:rPr dirty="0"/>
+                  <a:t> </a:t>
+                </a:r>
+                <a:r>
+                  <a:rPr dirty="0" err="1"/>
+                  <a:t>분포</a:t>
+                </a:r>
+                <a:endParaRPr dirty="0"/>
+              </a:p>
+              <a:p>
+                <a:pPr lvl="0"/>
+                <a:r>
+                  <a:rPr dirty="0" err="1"/>
+                  <a:t>많은</a:t>
+                </a:r>
+                <a:r>
+                  <a:rPr dirty="0"/>
+                  <a:t> </a:t>
+                </a:r>
+                <a:r>
+                  <a:rPr dirty="0" err="1"/>
+                  <a:t>자연현상이</a:t>
+                </a:r>
+                <a:r>
+                  <a:rPr dirty="0"/>
+                  <a:t> </a:t>
+                </a:r>
+                <a:r>
+                  <a:rPr dirty="0" err="1"/>
+                  <a:t>정규분포를</a:t>
+                </a:r>
+                <a:r>
+                  <a:rPr dirty="0"/>
+                  <a:t> </a:t>
+                </a:r>
+                <a:r>
+                  <a:rPr dirty="0" err="1"/>
+                  <a:t>따름</a:t>
+                </a:r>
+                <a:r>
+                  <a:rPr dirty="0"/>
+                  <a:t> (</a:t>
+                </a:r>
+                <a:r>
+                  <a:rPr dirty="0" err="1"/>
+                  <a:t>키</a:t>
+                </a:r>
+                <a:r>
+                  <a:rPr dirty="0"/>
+                  <a:t>, </a:t>
+                </a:r>
+                <a:r>
+                  <a:rPr dirty="0" err="1"/>
+                  <a:t>몸무게</a:t>
+                </a:r>
+                <a:r>
+                  <a:rPr dirty="0"/>
+                  <a:t>, </a:t>
+                </a:r>
+                <a:r>
+                  <a:rPr dirty="0" err="1"/>
+                  <a:t>혈압</a:t>
+                </a:r>
+                <a:r>
+                  <a:rPr dirty="0"/>
+                  <a:t>, </a:t>
+                </a:r>
+                <a:r>
+                  <a:rPr dirty="0" err="1"/>
+                  <a:t>측정오차</a:t>
+                </a:r>
+                <a:r>
+                  <a:rPr dirty="0"/>
+                  <a:t>)</a:t>
+                </a:r>
+              </a:p>
+              <a:p>
+                <a:pPr lvl="0"/>
+                <a:r>
+                  <a:rPr dirty="0" err="1"/>
+                  <a:t>사실상</a:t>
+                </a:r>
+                <a:r>
+                  <a:rPr dirty="0"/>
+                  <a:t> </a:t>
+                </a:r>
+                <a:r>
+                  <a:rPr dirty="0" err="1"/>
+                  <a:t>대부분은</a:t>
+                </a:r>
+                <a:r>
+                  <a:rPr dirty="0"/>
+                  <a:t> </a:t>
+                </a:r>
+                <a:r>
+                  <a:rPr dirty="0" err="1"/>
+                  <a:t>정규분위</a:t>
+                </a:r>
+                <a:r>
+                  <a:rPr dirty="0"/>
+                  <a:t> </a:t>
+                </a:r>
+                <a:r>
+                  <a:rPr dirty="0" err="1"/>
+                  <a:t>위에</a:t>
+                </a:r>
+                <a:r>
+                  <a:rPr dirty="0"/>
+                  <a:t> </a:t>
+                </a:r>
+                <a:r>
+                  <a:rPr dirty="0" err="1"/>
+                  <a:t>세워져</a:t>
+                </a:r>
+                <a:r>
+                  <a:rPr dirty="0"/>
+                  <a:t> </a:t>
+                </a:r>
+                <a:r>
+                  <a:rPr dirty="0" err="1"/>
+                  <a:t>있음</a:t>
+                </a:r>
+                <a:endParaRPr dirty="0"/>
+              </a:p>
+              <a:p>
+                <a:pPr marL="0" lvl="0" indent="0">
                   <a:buNone/>
                 </a:pPr>
-                <a:r>
-                  <a:rPr/>
-                  <a:t>- 평균 근처 값이 가장 많이 나타나고 양쪽으로 갈수록 빈도가 감소하는 분포 - 많은 자연현상이 정규분포를 따름 (키, 몸무게, 혈압, 측정오차) - 사실상 대부분은 정규분위 위에 세워져 있음</a:t>
-                </a:r>
-              </a:p>
-              <a:p>
-                <a:pPr lvl="0" indent="0" marL="0">
-                  <a:buNone/>
-                </a:pPr>
-                <a:r>
-                  <a:rPr/>
-                  <a:t>(정규분포 그림)</a:t>
-                </a:r>
+                <a:endParaRPr dirty="0"/>
               </a:p>
             </p:txBody>
           </p:sp>
         </mc:Choice>
+        <mc:Fallback>
+          <p:sp>
+            <p:nvSpPr>
+              <p:cNvPr id="3" name="Content Placeholder 2"/>
+              <p:cNvSpPr>
+                <a:spLocks noGrp="1" noRot="1" noChangeAspect="1" noMove="1" noResize="1" noEditPoints="1" noAdjustHandles="1" noChangeArrowheads="1" noChangeShapeType="1" noTextEdit="1"/>
+              </p:cNvSpPr>
+              <p:nvPr>
+                <p:ph idx="1"/>
+              </p:nvPr>
+            </p:nvSpPr>
+            <p:spPr>
+              <a:blipFill>
+                <a:blip r:embed="rId3"/>
+                <a:stretch>
+                  <a:fillRect l="-324" t="-403"/>
+                </a:stretch>
+              </a:blipFill>
+            </p:spPr>
+            <p:txBody>
+              <a:bodyPr/>
+              <a:lstStyle/>
+              <a:p>
+                <a:r>
+                  <a:rPr lang="en-US">
+                    <a:noFill/>
+                  </a:rPr>
+                  <a:t> </a:t>
+                </a:r>
+              </a:p>
+            </p:txBody>
+          </p:sp>
+        </mc:Fallback>
       </mc:AlternateContent>
     </p:spTree>
   </p:cSld>
+  <p:clrMapOvr>
+    <a:masterClrMapping/>
+  </p:clrMapOvr>
 </p:sld>
 </file>
 
@@ -5221,11 +8083,10 @@
           <a:bodyPr/>
           <a:lstStyle/>
           <a:p>
-            <a:pPr lvl="0" indent="0" marL="0">
+            <a:pPr marL="0" lvl="0" indent="0">
               <a:buNone/>
             </a:pPr>
             <a:r>
-              <a:rPr/>
               <a:t>카이제곱 분포</a:t>
             </a:r>
           </a:p>
@@ -5248,52 +8109,171 @@
               <a:bodyPr/>
               <a:lstStyle/>
               <a:p>
-                <a:pPr lvl="0" indent="0" marL="0">
-                  <a:spcBef>
-                    <a:spcPts val="3000"/>
-                  </a:spcBef>
-                  <a:buNone/>
-                </a:pPr>
-                <a:r>
-                  <a:rPr b="1"/>
-                  <a:t>발견자</a:t>
-                </a:r>
+                <a:pPr lvl="0"/>
+                <a:r>
+                  <a:rPr dirty="0"/>
+                  <a:t>Karl Pearson (1857~1936) </a:t>
+                </a:r>
+                <a:r>
+                  <a:rPr dirty="0" err="1"/>
+                  <a:t>이</a:t>
+                </a:r>
+                <a:r>
+                  <a:rPr dirty="0"/>
+                  <a:t> 1900년에 </a:t>
+                </a:r>
+                <a:r>
+                  <a:rPr dirty="0" err="1"/>
+                  <a:t>발표</a:t>
+                </a:r>
+                <a:endParaRPr dirty="0"/>
               </a:p>
               <a:p>
                 <a:pPr lvl="0"/>
                 <a:r>
-                  <a:rPr/>
-                  <a:t>Karl Pearson (1857~1936) 이 1900년에 발표</a:t>
-                </a:r>
+                  <a:rPr dirty="0" err="1"/>
+                  <a:t>질문이</a:t>
+                </a:r>
+                <a:r>
+                  <a:rPr dirty="0"/>
+                  <a:t> </a:t>
+                </a:r>
+                <a:r>
+                  <a:rPr dirty="0" err="1"/>
+                  <a:t>바뀌었음</a:t>
+                </a:r>
+                <a:endParaRPr dirty="0"/>
+              </a:p>
+              <a:p>
+                <a:pPr lvl="1"/>
+                <a:r>
+                  <a:rPr dirty="0" err="1"/>
+                  <a:t>평균은</a:t>
+                </a:r>
+                <a:r>
+                  <a:rPr dirty="0"/>
+                  <a:t> </a:t>
+                </a:r>
+                <a:r>
+                  <a:rPr dirty="0" err="1"/>
+                  <a:t>알겠다</a:t>
+                </a:r>
+                <a:r>
+                  <a:rPr dirty="0"/>
+                  <a:t> -&gt; </a:t>
+                </a:r>
+                <a:r>
+                  <a:rPr dirty="0" err="1"/>
+                  <a:t>자료가</a:t>
+                </a:r>
+                <a:r>
+                  <a:rPr dirty="0"/>
+                  <a:t> </a:t>
+                </a:r>
+                <a:r>
+                  <a:rPr dirty="0" err="1"/>
+                  <a:t>얼마나</a:t>
+                </a:r>
+                <a:r>
+                  <a:rPr dirty="0"/>
+                  <a:t> </a:t>
+                </a:r>
+                <a:r>
+                  <a:rPr dirty="0" err="1"/>
+                  <a:t>흩어져</a:t>
+                </a:r>
+                <a:r>
+                  <a:rPr dirty="0"/>
+                  <a:t> </a:t>
+                </a:r>
+                <a:r>
+                  <a:rPr dirty="0" err="1"/>
+                  <a:t>있는가</a:t>
+                </a:r>
+                <a:r>
+                  <a:rPr dirty="0"/>
+                  <a:t>? -&gt; </a:t>
+                </a:r>
+                <a:r>
+                  <a:rPr dirty="0" err="1"/>
+                  <a:t>분산을</a:t>
+                </a:r>
+                <a:r>
+                  <a:rPr dirty="0"/>
+                  <a:t> </a:t>
+                </a:r>
+                <a:r>
+                  <a:rPr dirty="0" err="1"/>
+                  <a:t>검정하고</a:t>
+                </a:r>
+                <a:r>
+                  <a:rPr dirty="0"/>
+                  <a:t> </a:t>
+                </a:r>
+                <a:r>
+                  <a:rPr dirty="0" err="1"/>
+                  <a:t>싶다</a:t>
+                </a:r>
+                <a:endParaRPr dirty="0"/>
               </a:p>
               <a:p>
                 <a:pPr lvl="0"/>
                 <a:r>
-                  <a:rPr/>
-                  <a:t>질문이 바뀌었음 - 평균은 알겠다 -&gt; 자료가 얼마나 흩어져 있는가? -&gt; 분산을 검정하고 싶다</a:t>
-                </a:r>
+                  <a:rPr dirty="0" err="1"/>
+                  <a:t>아이디어</a:t>
+                </a:r>
+                <a:r>
+                  <a:rPr dirty="0"/>
+                  <a:t>: </a:t>
+                </a:r>
+                <a:r>
+                  <a:rPr dirty="0" err="1"/>
+                  <a:t>정규분포</a:t>
+                </a:r>
+                <a:r>
+                  <a:rPr dirty="0"/>
+                  <a:t> </a:t>
+                </a:r>
+                <a:r>
+                  <a:rPr dirty="0" err="1"/>
+                  <a:t>값을</a:t>
+                </a:r>
+                <a:r>
+                  <a:rPr dirty="0"/>
+                  <a:t> </a:t>
+                </a:r>
+                <a:r>
+                  <a:rPr dirty="0" err="1"/>
+                  <a:t>제곱하면</a:t>
+                </a:r>
+                <a:r>
+                  <a:rPr dirty="0"/>
+                  <a:t> </a:t>
+                </a:r>
+                <a:r>
+                  <a:rPr dirty="0" err="1"/>
+                  <a:t>음수가</a:t>
+                </a:r>
+                <a:r>
+                  <a:rPr dirty="0"/>
+                  <a:t> </a:t>
+                </a:r>
+                <a:r>
+                  <a:rPr dirty="0" err="1"/>
+                  <a:t>사라진다</a:t>
+                </a:r>
+                <a:r>
+                  <a:rPr dirty="0"/>
+                  <a:t>!!!!!</a:t>
+                </a:r>
+                <a:endParaRPr lang="en-US" dirty="0"/>
               </a:p>
               <a:p>
                 <a:pPr lvl="0"/>
-                <a:r>
-                  <a:rPr/>
-                  <a:t>아이디어: 정규분포 값을 제곱하면 음수가 사라진다!!!!!</a:t>
-                </a:r>
+                <a:endParaRPr dirty="0"/>
               </a:p>
               <a:p>
-                <a:pPr lvl="0" indent="0" marL="0">
-                  <a:spcBef>
-                    <a:spcPts val="3000"/>
-                  </a:spcBef>
-                  <a:buNone/>
-                </a:pPr>
-                <a:r>
-                  <a:rPr b="1"/>
-                  <a:t>카이제곱분포</a:t>
-                </a:r>
-              </a:p>
-              <a:p>
-                <a:pPr lvl="0" indent="0" marL="0">
+                <a:pPr marL="0" lvl="0" indent="0">
                   <a:buNone/>
                 </a:pPr>
                 <a14:m>
@@ -5303,94 +8283,143 @@
                     </m:oMathParaPr>
                     <m:oMath>
                       <m:sSup>
+                        <m:sSupPr>
+                          <m:ctrlPr>
+                            <a:rPr>
+                              <a:latin typeface="Cambria Math" panose="02040503050406030204" pitchFamily="18" charset="0"/>
+                            </a:rPr>
+                          </m:ctrlPr>
+                        </m:sSupPr>
                         <m:e>
                           <m:r>
-                            <m:t>χ</m:t>
+                            <a:rPr>
+                              <a:latin typeface="Cambria Math" panose="02040503050406030204" pitchFamily="18" charset="0"/>
+                            </a:rPr>
+                            <m:t>𝜒</m:t>
                           </m:r>
                         </m:e>
                         <m:sup>
                           <m:r>
+                            <a:rPr>
+                              <a:latin typeface="Cambria Math" panose="02040503050406030204" pitchFamily="18" charset="0"/>
+                            </a:rPr>
                             <m:t>2</m:t>
                           </m:r>
                         </m:sup>
                       </m:sSup>
                       <m:r>
-                        <m:rPr>
-                          <m:sty m:val="p"/>
-                        </m:rPr>
+                        <a:rPr>
+                          <a:latin typeface="Cambria Math" panose="02040503050406030204" pitchFamily="18" charset="0"/>
+                        </a:rPr>
                         <m:t>=</m:t>
                       </m:r>
                       <m:sSubSup>
+                        <m:sSubSupPr>
+                          <m:ctrlPr>
+                            <a:rPr>
+                              <a:latin typeface="Cambria Math" panose="02040503050406030204" pitchFamily="18" charset="0"/>
+                            </a:rPr>
+                          </m:ctrlPr>
+                        </m:sSubSupPr>
                         <m:e>
                           <m:r>
-                            <m:t>Z</m:t>
+                            <a:rPr>
+                              <a:latin typeface="Cambria Math" panose="02040503050406030204" pitchFamily="18" charset="0"/>
+                            </a:rPr>
+                            <m:t>𝑍</m:t>
                           </m:r>
                         </m:e>
                         <m:sub>
                           <m:r>
+                            <a:rPr>
+                              <a:latin typeface="Cambria Math" panose="02040503050406030204" pitchFamily="18" charset="0"/>
+                            </a:rPr>
                             <m:t>1</m:t>
                           </m:r>
                         </m:sub>
                         <m:sup>
                           <m:r>
+                            <a:rPr>
+                              <a:latin typeface="Cambria Math" panose="02040503050406030204" pitchFamily="18" charset="0"/>
+                            </a:rPr>
                             <m:t>2</m:t>
                           </m:r>
                         </m:sup>
                       </m:sSubSup>
                       <m:r>
-                        <m:rPr>
-                          <m:sty m:val="p"/>
-                        </m:rPr>
+                        <a:rPr>
+                          <a:latin typeface="Cambria Math" panose="02040503050406030204" pitchFamily="18" charset="0"/>
+                        </a:rPr>
                         <m:t>+</m:t>
                       </m:r>
                       <m:sSubSup>
+                        <m:sSubSupPr>
+                          <m:ctrlPr>
+                            <a:rPr>
+                              <a:latin typeface="Cambria Math" panose="02040503050406030204" pitchFamily="18" charset="0"/>
+                            </a:rPr>
+                          </m:ctrlPr>
+                        </m:sSubSupPr>
                         <m:e>
                           <m:r>
-                            <m:t>Z</m:t>
+                            <a:rPr>
+                              <a:latin typeface="Cambria Math" panose="02040503050406030204" pitchFamily="18" charset="0"/>
+                            </a:rPr>
+                            <m:t>𝑍</m:t>
                           </m:r>
                         </m:e>
                         <m:sub>
                           <m:r>
+                            <a:rPr>
+                              <a:latin typeface="Cambria Math" panose="02040503050406030204" pitchFamily="18" charset="0"/>
+                            </a:rPr>
                             <m:t>2</m:t>
                           </m:r>
                         </m:sub>
                         <m:sup>
                           <m:r>
+                            <a:rPr>
+                              <a:latin typeface="Cambria Math" panose="02040503050406030204" pitchFamily="18" charset="0"/>
+                            </a:rPr>
                             <m:t>2</m:t>
                           </m:r>
                         </m:sup>
                       </m:sSubSup>
                       <m:r>
-                        <m:rPr>
-                          <m:sty m:val="p"/>
-                        </m:rPr>
-                        <m:t>+</m:t>
-                      </m:r>
-                      <m:r>
-                        <m:rPr>
-                          <m:sty m:val="p"/>
-                        </m:rPr>
-                        <m:t>⋯</m:t>
-                      </m:r>
-                      <m:r>
-                        <m:rPr>
-                          <m:sty m:val="p"/>
-                        </m:rPr>
-                        <m:t>+</m:t>
+                        <a:rPr>
+                          <a:latin typeface="Cambria Math" panose="02040503050406030204" pitchFamily="18" charset="0"/>
+                        </a:rPr>
+                        <m:t>+⋯+</m:t>
                       </m:r>
                       <m:sSubSup>
+                        <m:sSubSupPr>
+                          <m:ctrlPr>
+                            <a:rPr>
+                              <a:latin typeface="Cambria Math" panose="02040503050406030204" pitchFamily="18" charset="0"/>
+                            </a:rPr>
+                          </m:ctrlPr>
+                        </m:sSubSupPr>
                         <m:e>
                           <m:r>
-                            <m:t>Z</m:t>
+                            <a:rPr>
+                              <a:latin typeface="Cambria Math" panose="02040503050406030204" pitchFamily="18" charset="0"/>
+                            </a:rPr>
+                            <m:t>𝑍</m:t>
                           </m:r>
                         </m:e>
                         <m:sub>
                           <m:r>
-                            <m:t>k</m:t>
+                            <a:rPr>
+                              <a:latin typeface="Cambria Math" panose="02040503050406030204" pitchFamily="18" charset="0"/>
+                            </a:rPr>
+                            <m:t>𝑘</m:t>
                           </m:r>
                         </m:sub>
                         <m:sup>
                           <m:r>
+                            <a:rPr>
+                              <a:latin typeface="Cambria Math" panose="02040503050406030204" pitchFamily="18" charset="0"/>
+                            </a:rPr>
                             <m:t>2</m:t>
                           </m:r>
                         </m:sup>
@@ -5398,18 +8427,20 @@
                     </m:oMath>
                   </m:oMathPara>
                 </a14:m>
+                <a:endParaRPr dirty="0"/>
               </a:p>
               <a:p>
-                <a:pPr lvl="0" indent="0" marL="0">
+                <a:pPr marL="0" lvl="0" indent="0">
                   <a:buNone/>
                 </a:pPr>
                 <a:r>
-                  <a:rPr/>
+                  <a:rPr dirty="0" err="1"/>
                   <a:t>여기서</a:t>
                 </a:r>
+                <a:endParaRPr dirty="0"/>
               </a:p>
               <a:p>
-                <a:pPr lvl="0" indent="0" marL="0">
+                <a:pPr marL="0" lvl="0" indent="0">
                   <a:buNone/>
                 </a:pPr>
                 <a14:m>
@@ -5419,102 +8450,228 @@
                     </m:oMathParaPr>
                     <m:oMath>
                       <m:sSub>
+                        <m:sSubPr>
+                          <m:ctrlPr>
+                            <a:rPr>
+                              <a:latin typeface="Cambria Math" panose="02040503050406030204" pitchFamily="18" charset="0"/>
+                            </a:rPr>
+                          </m:ctrlPr>
+                        </m:sSubPr>
                         <m:e>
                           <m:r>
-                            <m:t>Z</m:t>
+                            <a:rPr>
+                              <a:latin typeface="Cambria Math" panose="02040503050406030204" pitchFamily="18" charset="0"/>
+                            </a:rPr>
+                            <m:t>𝑍</m:t>
                           </m:r>
                         </m:e>
                         <m:sub>
                           <m:r>
-                            <m:t>i</m:t>
+                            <a:rPr>
+                              <a:latin typeface="Cambria Math" panose="02040503050406030204" pitchFamily="18" charset="0"/>
+                            </a:rPr>
+                            <m:t>𝑖</m:t>
                           </m:r>
                         </m:sub>
                       </m:sSub>
                       <m:r>
-                        <m:rPr>
-                          <m:sty m:val="p"/>
-                        </m:rPr>
+                        <a:rPr>
+                          <a:latin typeface="Cambria Math" panose="02040503050406030204" pitchFamily="18" charset="0"/>
+                        </a:rPr>
                         <m:t>=</m:t>
                       </m:r>
                       <m:r>
-                        <m:t>N</m:t>
+                        <a:rPr>
+                          <a:latin typeface="Cambria Math" panose="02040503050406030204" pitchFamily="18" charset="0"/>
+                        </a:rPr>
+                        <m:t>𝑁</m:t>
                       </m:r>
-                      <m:r>
-                        <m:rPr>
-                          <m:sty m:val="p"/>
-                        </m:rPr>
-                        <m:t>(</m:t>
-                      </m:r>
-                      <m:r>
-                        <m:t>0</m:t>
-                      </m:r>
-                      <m:r>
-                        <m:rPr>
-                          <m:sty m:val="p"/>
-                        </m:rPr>
-                        <m:t>,</m:t>
-                      </m:r>
-                      <m:r>
-                        <m:t>1</m:t>
-                      </m:r>
-                      <m:r>
-                        <m:rPr>
-                          <m:sty m:val="p"/>
-                        </m:rPr>
-                        <m:t>)</m:t>
-                      </m:r>
+                      <m:d>
+                        <m:dPr>
+                          <m:ctrlPr>
+                            <a:rPr>
+                              <a:latin typeface="Cambria Math" panose="02040503050406030204" pitchFamily="18" charset="0"/>
+                            </a:rPr>
+                          </m:ctrlPr>
+                        </m:dPr>
+                        <m:e>
+                          <m:r>
+                            <a:rPr>
+                              <a:latin typeface="Cambria Math" panose="02040503050406030204" pitchFamily="18" charset="0"/>
+                            </a:rPr>
+                            <m:t>0,1</m:t>
+                          </m:r>
+                        </m:e>
+                      </m:d>
                     </m:oMath>
                   </m:oMathPara>
                 </a14:m>
+                <a:endParaRPr dirty="0"/>
               </a:p>
               <a:p>
-                <a:pPr lvl="0" indent="0" marL="0">
-                  <a:buNone/>
-                </a:pPr>
-                <a:r>
-                  <a:rPr/>
-                  <a:t>- 표본정규분포를 제곱해서 만든 분포로 </a:t>
-                </a:r>
-                <a:r>
-                  <a:rPr b="1"/>
-                  <a:t>분산 검정</a:t>
-                </a:r>
-                <a:r>
-                  <a:rPr/>
+                <a:pPr lvl="0"/>
+                <a:r>
+                  <a:rPr dirty="0" err="1"/>
+                  <a:t>표본정규분포를</a:t>
+                </a:r>
+                <a:r>
+                  <a:rPr dirty="0"/>
+                  <a:t> </a:t>
+                </a:r>
+                <a:r>
+                  <a:rPr dirty="0" err="1"/>
+                  <a:t>제곱해서</a:t>
+                </a:r>
+                <a:r>
+                  <a:rPr dirty="0"/>
+                  <a:t> </a:t>
+                </a:r>
+                <a:r>
+                  <a:rPr dirty="0" err="1"/>
+                  <a:t>만든</a:t>
+                </a:r>
+                <a:r>
+                  <a:rPr dirty="0"/>
+                  <a:t> </a:t>
+                </a:r>
+                <a:r>
+                  <a:rPr dirty="0" err="1"/>
+                  <a:t>분포로</a:t>
+                </a:r>
+                <a:r>
+                  <a:rPr dirty="0"/>
+                  <a:t> </a:t>
+                </a:r>
+                <a:r>
+                  <a:rPr b="1" dirty="0" err="1"/>
+                  <a:t>분산</a:t>
+                </a:r>
+                <a:r>
+                  <a:rPr b="1" dirty="0"/>
+                  <a:t> </a:t>
+                </a:r>
+                <a:r>
+                  <a:rPr b="1" dirty="0" err="1"/>
+                  <a:t>검정</a:t>
+                </a:r>
+                <a:r>
+                  <a:rPr dirty="0"/>
                   <a:t>, </a:t>
                 </a:r>
                 <a:r>
-                  <a:rPr b="1"/>
-                  <a:t>적합도 검정</a:t>
-                </a:r>
-                <a:r>
-                  <a:rPr/>
+                  <a:rPr b="1" dirty="0" err="1"/>
+                  <a:t>적합도</a:t>
+                </a:r>
+                <a:r>
+                  <a:rPr b="1" dirty="0"/>
+                  <a:t> </a:t>
+                </a:r>
+                <a:r>
+                  <a:rPr b="1" dirty="0" err="1"/>
+                  <a:t>검정</a:t>
+                </a:r>
+                <a:r>
+                  <a:rPr dirty="0"/>
                   <a:t>, </a:t>
                 </a:r>
                 <a:r>
-                  <a:rPr b="1"/>
-                  <a:t>독립성 검정</a:t>
-                </a:r>
-                <a:r>
-                  <a:rPr/>
-                  <a:t>에 사용</a:t>
-                </a:r>
-              </a:p>
-              <a:p>
-                <a:pPr lvl="0" indent="0" marL="0">
-                  <a:buNone/>
-                </a:pPr>
-                <a:r>
-                  <a:rPr/>
-                  <a:t>(카이제곱분포 그림)</a:t>
-                </a:r>
+                  <a:rPr b="1" dirty="0" err="1"/>
+                  <a:t>독립성</a:t>
+                </a:r>
+                <a:r>
+                  <a:rPr b="1" dirty="0"/>
+                  <a:t> </a:t>
+                </a:r>
+                <a:r>
+                  <a:rPr b="1" dirty="0" err="1"/>
+                  <a:t>검정</a:t>
+                </a:r>
+                <a:r>
+                  <a:rPr dirty="0" err="1"/>
+                  <a:t>에</a:t>
+                </a:r>
+                <a:r>
+                  <a:rPr dirty="0"/>
+                  <a:t> </a:t>
+                </a:r>
+                <a:r>
+                  <a:rPr dirty="0" err="1"/>
+                  <a:t>사용</a:t>
+                </a:r>
+                <a:endParaRPr dirty="0"/>
               </a:p>
             </p:txBody>
           </p:sp>
         </mc:Choice>
+        <mc:Fallback>
+          <p:sp>
+            <p:nvSpPr>
+              <p:cNvPr id="3" name="Content Placeholder 2"/>
+              <p:cNvSpPr>
+                <a:spLocks noGrp="1" noRot="1" noChangeAspect="1" noMove="1" noResize="1" noEditPoints="1" noAdjustHandles="1" noChangeArrowheads="1" noChangeShapeType="1" noTextEdit="1"/>
+              </p:cNvSpPr>
+              <p:nvPr>
+                <p:ph idx="1"/>
+              </p:nvPr>
+            </p:nvSpPr>
+            <p:spPr>
+              <a:blipFill>
+                <a:blip r:embed="rId2"/>
+                <a:stretch>
+                  <a:fillRect l="-485" t="-403"/>
+                </a:stretch>
+              </a:blipFill>
+            </p:spPr>
+            <p:txBody>
+              <a:bodyPr/>
+              <a:lstStyle/>
+              <a:p>
+                <a:r>
+                  <a:rPr lang="en-US">
+                    <a:noFill/>
+                  </a:rPr>
+                  <a:t> </a:t>
+                </a:r>
+              </a:p>
+            </p:txBody>
+          </p:sp>
+        </mc:Fallback>
       </mc:AlternateContent>
+      <p:pic>
+        <p:nvPicPr>
+          <p:cNvPr id="5" name="Picture 4">
+            <a:extLst>
+              <a:ext uri="{FF2B5EF4-FFF2-40B4-BE49-F238E27FC236}">
+                <a16:creationId xmlns:a16="http://schemas.microsoft.com/office/drawing/2014/main" id="{626BDA16-F18A-0C66-92BD-A817E048C97B}"/>
+              </a:ext>
+            </a:extLst>
+          </p:cNvPr>
+          <p:cNvPicPr>
+            <a:picLocks noChangeAspect="1"/>
+          </p:cNvPicPr>
+          <p:nvPr/>
+        </p:nvPicPr>
+        <p:blipFill>
+          <a:blip r:embed="rId3"/>
+          <a:stretch>
+            <a:fillRect/>
+          </a:stretch>
+        </p:blipFill>
+        <p:spPr>
+          <a:xfrm>
+            <a:off x="6341773" y="2759745"/>
+            <a:ext cx="2361048" cy="1191767"/>
+          </a:xfrm>
+          <a:prstGeom prst="rect">
+            <a:avLst/>
+          </a:prstGeom>
+        </p:spPr>
+      </p:pic>
     </p:spTree>
   </p:cSld>
+  <p:clrMapOvr>
+    <a:masterClrMapping/>
+  </p:clrMapOvr>
 </p:sld>
 </file>
 
@@ -5555,429 +8712,390 @@
           <a:bodyPr/>
           <a:lstStyle/>
           <a:p>
-            <a:pPr lvl="0" indent="0" marL="0">
+            <a:pPr marL="0" lvl="0" indent="0">
               <a:buNone/>
             </a:pPr>
             <a:r>
-              <a:rPr/>
               <a:t>t분포</a:t>
             </a:r>
           </a:p>
         </p:txBody>
       </p:sp>
-      <mc:AlternateContent xmlns:mc="http://schemas.openxmlformats.org/markup-compatibility/2006">
-        <mc:Choice xmlns:a14="http://schemas.microsoft.com/office/drawing/2010/main" Requires="a14">
-          <p:sp>
-            <p:nvSpPr>
-              <p:cNvPr id="3" name="Content Placeholder 2"/>
-              <p:cNvSpPr>
-                <a:spLocks noGrp="1"/>
-              </p:cNvSpPr>
-              <p:nvPr>
-                <p:ph idx="1"/>
-              </p:nvPr>
-            </p:nvSpPr>
-            <p:spPr/>
-            <p:txBody>
-              <a:bodyPr/>
-              <a:lstStyle/>
-              <a:p>
-                <a:pPr lvl="0" indent="0" marL="0">
-                  <a:spcBef>
-                    <a:spcPts val="3000"/>
-                  </a:spcBef>
-                  <a:buNone/>
-                </a:pPr>
-                <a:r>
-                  <a:rPr b="1"/>
-                  <a:t>발견자</a:t>
-                </a:r>
-              </a:p>
-              <a:p>
-                <a:pPr lvl="0"/>
-                <a:r>
-                  <a:rPr/>
-                  <a:t>William Sealy Gosset (1876~1937) 이 필명 Student 를 사용하여 발표하면서 Student’s t Distribution 이라고 함</a:t>
-                </a:r>
-              </a:p>
-              <a:p>
-                <a:pPr lvl="0"/>
-                <a:r>
-                  <a:rPr/>
-                  <a:t>당시 Gosset이 근무하던 Guinness(맥주회사) 에서 품질검사를 수행하던 중 표본이 너무 작아 정규분포를 따르지 않는 문제를 발견</a:t>
-                </a:r>
-              </a:p>
-              <a:p>
-                <a:pPr lvl="0"/>
-                <a:r>
-                  <a:rPr/>
-                  <a:t>정규분포는 표본이 충분히 많을 때 좋은 성질을 가짐</a:t>
-                </a:r>
-              </a:p>
-              <a:p>
-                <a:pPr lvl="0"/>
-                <a:r>
-                  <a:rPr/>
-                  <a:t>그러나 소표본 상황에서는 오차가 커지는 문제가 발생함</a:t>
-                </a:r>
-              </a:p>
-              <a:p>
-                <a:pPr lvl="0" indent="0" marL="0">
-                  <a:spcBef>
-                    <a:spcPts val="3000"/>
-                  </a:spcBef>
-                  <a:buNone/>
-                </a:pPr>
-                <a:r>
-                  <a:rPr b="1"/>
-                  <a:t>t분포의 정의</a:t>
-                </a:r>
-              </a:p>
-              <a:p>
-                <a:pPr lvl="0" indent="0" marL="0">
-                  <a:buNone/>
-                </a:pPr>
-                <a:r>
-                  <a:rPr/>
-                  <a:t>표본정규분포</a:t>
-                </a:r>
-              </a:p>
-              <a:p>
-                <a:pPr lvl="0" indent="0" marL="0">
-                  <a:buNone/>
-                </a:pPr>
-                <a14:m>
-                  <m:oMathPara xmlns:m="http://schemas.openxmlformats.org/officeDocument/2006/math">
-                    <m:oMathParaPr>
-                      <m:jc m:val="center"/>
-                    </m:oMathParaPr>
-                    <m:oMath>
-                      <m:r>
-                        <m:t>Z</m:t>
-                      </m:r>
-                      <m:r>
-                        <m:rPr>
-                          <m:sty m:val="p"/>
-                        </m:rPr>
-                        <m:t>∼</m:t>
-                      </m:r>
-                      <m:r>
-                        <m:t>N</m:t>
-                      </m:r>
-                      <m:r>
-                        <m:rPr>
-                          <m:sty m:val="p"/>
-                        </m:rPr>
-                        <m:t>(</m:t>
-                      </m:r>
-                      <m:r>
-                        <m:t>0</m:t>
-                      </m:r>
-                      <m:r>
-                        <m:rPr>
-                          <m:sty m:val="p"/>
-                        </m:rPr>
-                        <m:t>,</m:t>
-                      </m:r>
-                      <m:r>
-                        <m:t>1</m:t>
-                      </m:r>
-                      <m:r>
-                        <m:rPr>
-                          <m:sty m:val="p"/>
-                        </m:rPr>
-                        <m:t>)</m:t>
-                      </m:r>
-                    </m:oMath>
-                  </m:oMathPara>
-                </a14:m>
-              </a:p>
-              <a:p>
-                <a:pPr lvl="0" indent="0" marL="0">
-                  <a:buNone/>
-                </a:pPr>
-                <a:r>
-                  <a:rPr/>
-                  <a:t>와 카이제곱분포</a:t>
-                </a:r>
-              </a:p>
-              <a:p>
-                <a:pPr lvl="0" indent="0" marL="0">
-                  <a:buNone/>
-                </a:pPr>
-                <a14:m>
-                  <m:oMathPara xmlns:m="http://schemas.openxmlformats.org/officeDocument/2006/math">
-                    <m:oMathParaPr>
-                      <m:jc m:val="center"/>
-                    </m:oMathParaPr>
-                    <m:oMath>
-                      <m:sSup>
-                        <m:e>
-                          <m:r>
-                            <m:t>χ</m:t>
-                          </m:r>
-                        </m:e>
-                        <m:sup>
-                          <m:r>
-                            <m:t>2</m:t>
-                          </m:r>
-                        </m:sup>
-                      </m:sSup>
-                    </m:oMath>
-                  </m:oMathPara>
-                </a14:m>
-              </a:p>
-              <a:p>
-                <a:pPr lvl="0" indent="0" marL="0">
-                  <a:buNone/>
-                </a:pPr>
-                <a:r>
-                  <a:rPr/>
-                  <a:t>를 이용하여</a:t>
-                </a:r>
-              </a:p>
-              <a:p>
-                <a:pPr lvl="0" indent="0" marL="0">
-                  <a:buNone/>
-                </a:pPr>
-                <a14:m>
-                  <m:oMathPara xmlns:m="http://schemas.openxmlformats.org/officeDocument/2006/math">
-                    <m:oMathParaPr>
-                      <m:jc m:val="center"/>
-                    </m:oMathParaPr>
-                    <m:oMath>
-                      <m:r>
-                        <m:t>t</m:t>
-                      </m:r>
-                      <m:r>
-                        <m:rPr>
-                          <m:sty m:val="p"/>
-                        </m:rPr>
-                        <m:t>=</m:t>
-                      </m:r>
-                      <m:f>
-                        <m:fPr>
-                          <m:type m:val="bar"/>
-                        </m:fPr>
-                        <m:num>
-                          <m:r>
-                            <m:t>Z</m:t>
-                          </m:r>
-                        </m:num>
-                        <m:den>
-                          <m:rad>
-                            <m:radPr>
-                              <m:degHide m:val="on"/>
-                            </m:radPr>
-                            <m:deg/>
-                            <m:e>
-                              <m:sSup>
-                                <m:e>
-                                  <m:r>
-                                    <m:t>χ</m:t>
-                                  </m:r>
-                                </m:e>
-                                <m:sup>
-                                  <m:r>
-                                    <m:t>2</m:t>
-                                  </m:r>
-                                </m:sup>
-                              </m:sSup>
-                              <m:r>
-                                <m:rPr>
-                                  <m:sty m:val="p"/>
-                                </m:rPr>
-                                <m:t>/</m:t>
-                              </m:r>
-                              <m:r>
-                                <m:t>d</m:t>
-                              </m:r>
-                              <m:r>
-                                <m:t>f</m:t>
-                              </m:r>
-                            </m:e>
-                          </m:rad>
-                        </m:den>
-                      </m:f>
-                    </m:oMath>
-                  </m:oMathPara>
-                </a14:m>
-              </a:p>
-              <a:p>
-                <a:pPr lvl="0" indent="0" marL="0">
-                  <a:buNone/>
-                </a:pPr>
-                <a:r>
-                  <a:rPr/>
-                  <a:t>t값</a:t>
-                </a:r>
-              </a:p>
-              <a:p>
-                <a:pPr lvl="0" indent="0" marL="0">
-                  <a:buNone/>
-                </a:pPr>
-                <a14:m>
-                  <m:oMathPara xmlns:m="http://schemas.openxmlformats.org/officeDocument/2006/math">
-                    <m:oMathParaPr>
-                      <m:jc m:val="center"/>
-                    </m:oMathParaPr>
-                    <m:oMath>
-                      <m:r>
-                        <m:t>t</m:t>
-                      </m:r>
-                      <m:r>
-                        <m:rPr>
-                          <m:sty m:val="p"/>
-                        </m:rPr>
-                        <m:t>=</m:t>
-                      </m:r>
-                      <m:f>
-                        <m:fPr>
-                          <m:type m:val="bar"/>
-                        </m:fPr>
-                        <m:num>
-                          <m:acc>
-                            <m:accPr>
-                              <m:chr m:val="‾"/>
-                            </m:accPr>
-                            <m:e>
-                              <m:r>
-                                <m:t>X</m:t>
-                              </m:r>
-                            </m:e>
-                          </m:acc>
-                          <m:r>
-                            <m:rPr>
-                              <m:sty m:val="p"/>
-                            </m:rPr>
-                            <m:t>−</m:t>
-                          </m:r>
-                          <m:r>
-                            <m:t>μ</m:t>
-                          </m:r>
-                        </m:num>
-                        <m:den>
-                          <m:r>
-                            <m:t>s</m:t>
-                          </m:r>
-                          <m:r>
-                            <m:rPr>
-                              <m:sty m:val="p"/>
-                            </m:rPr>
-                            <m:t>/</m:t>
-                          </m:r>
-                          <m:rad>
-                            <m:radPr>
-                              <m:degHide m:val="on"/>
-                            </m:radPr>
-                            <m:deg/>
-                            <m:e>
-                              <m:r>
-                                <m:t>n</m:t>
-                              </m:r>
-                            </m:e>
-                          </m:rad>
-                        </m:den>
-                      </m:f>
-                    </m:oMath>
-                  </m:oMathPara>
-                </a14:m>
-              </a:p>
-              <a:p>
-                <a:pPr lvl="0" indent="0" marL="0">
-                  <a:buNone/>
-                </a:pPr>
-                <a:r>
-                  <a:rPr/>
-                  <a:t>즉,</a:t>
-                </a:r>
-              </a:p>
-              <a:p>
-                <a:pPr lvl="0" indent="0" marL="0">
-                  <a:buNone/>
-                </a:pPr>
-                <a14:m>
-                  <m:oMathPara xmlns:m="http://schemas.openxmlformats.org/officeDocument/2006/math">
-                    <m:oMathParaPr>
-                      <m:jc m:val="center"/>
-                    </m:oMathParaPr>
-                    <m:oMath>
-                      <m:f>
-                        <m:fPr>
-                          <m:type m:val="bar"/>
-                        </m:fPr>
-                        <m:num>
-                          <m:r>
-                            <m:t>평</m:t>
-                          </m:r>
-                          <m:r>
-                            <m:t>균</m:t>
-                          </m:r>
-                          <m:r>
-                            <m:t> </m:t>
-                          </m:r>
-                          <m:r>
-                            <m:t>차</m:t>
-                          </m:r>
-                          <m:r>
-                            <m:t>이</m:t>
-                          </m:r>
-                        </m:num>
-                        <m:den>
-                          <m:r>
-                            <m:t>표</m:t>
-                          </m:r>
-                          <m:r>
-                            <m:t>준</m:t>
-                          </m:r>
-                          <m:r>
-                            <m:t>오</m:t>
-                          </m:r>
-                          <m:r>
-                            <m:t>차</m:t>
-                          </m:r>
-                        </m:den>
-                      </m:f>
-                    </m:oMath>
-                  </m:oMathPara>
-                </a14:m>
-              </a:p>
-              <a:p>
-                <a:pPr lvl="0" indent="0" marL="0">
-                  <a:buNone/>
-                </a:pPr>
-                <a:r>
-                  <a:rPr/>
-                  <a:t>자유도(표본)가 작으면 </a:t>
-                </a:r>
-                <a:r>
-                  <a:rPr b="1"/>
-                  <a:t>꼬리가 두꺼움</a:t>
-                </a:r>
-                <a:r>
-                  <a:rPr/>
-                  <a:t>, 자유도가 커지면 </a:t>
-                </a:r>
-                <a:r>
-                  <a:rPr b="1"/>
-                  <a:t>정규분포와 거의 같아짐</a:t>
-                </a:r>
-              </a:p>
-              <a:p>
-                <a:pPr lvl="0" indent="0" marL="0">
-                  <a:buNone/>
-                </a:pPr>
-                <a:r>
-                  <a:rPr/>
-                  <a:t>(자유도에 따른 t분포 그림)</a:t>
-                </a:r>
-              </a:p>
-            </p:txBody>
-          </p:sp>
-        </mc:Choice>
-      </mc:AlternateContent>
+      <p:sp>
+        <p:nvSpPr>
+          <p:cNvPr id="3" name="Content Placeholder 2"/>
+          <p:cNvSpPr>
+            <a:spLocks noGrp="1"/>
+          </p:cNvSpPr>
+          <p:nvPr>
+            <p:ph idx="1"/>
+          </p:nvPr>
+        </p:nvSpPr>
+        <p:spPr/>
+        <p:txBody>
+          <a:bodyPr/>
+          <a:lstStyle/>
+          <a:p>
+            <a:pPr lvl="0"/>
+            <a:r>
+              <a:rPr dirty="0"/>
+              <a:t>William Sealy Gosset (1876~1937) </a:t>
+            </a:r>
+            <a:r>
+              <a:rPr dirty="0" err="1"/>
+              <a:t>이</a:t>
+            </a:r>
+            <a:r>
+              <a:rPr dirty="0"/>
+              <a:t> </a:t>
+            </a:r>
+            <a:r>
+              <a:rPr dirty="0" err="1"/>
+              <a:t>필명</a:t>
+            </a:r>
+            <a:r>
+              <a:rPr dirty="0"/>
+              <a:t> Student </a:t>
+            </a:r>
+            <a:r>
+              <a:rPr dirty="0" err="1"/>
+              <a:t>를</a:t>
+            </a:r>
+            <a:r>
+              <a:rPr dirty="0"/>
+              <a:t> </a:t>
+            </a:r>
+            <a:r>
+              <a:rPr dirty="0" err="1"/>
+              <a:t>사용하여</a:t>
+            </a:r>
+            <a:r>
+              <a:rPr dirty="0"/>
+              <a:t> </a:t>
+            </a:r>
+            <a:r>
+              <a:rPr dirty="0" err="1"/>
+              <a:t>발표하면서</a:t>
+            </a:r>
+            <a:r>
+              <a:rPr dirty="0"/>
+              <a:t> Student’s t Distribution </a:t>
+            </a:r>
+            <a:r>
+              <a:rPr dirty="0" err="1"/>
+              <a:t>칭함</a:t>
+            </a:r>
+            <a:endParaRPr dirty="0"/>
+          </a:p>
+          <a:p>
+            <a:pPr lvl="0"/>
+            <a:r>
+              <a:rPr dirty="0" err="1"/>
+              <a:t>당시</a:t>
+            </a:r>
+            <a:r>
+              <a:rPr dirty="0"/>
+              <a:t> </a:t>
+            </a:r>
+            <a:r>
+              <a:rPr dirty="0" err="1"/>
+              <a:t>Gosset이</a:t>
+            </a:r>
+            <a:r>
+              <a:rPr dirty="0"/>
+              <a:t> </a:t>
+            </a:r>
+            <a:r>
+              <a:rPr dirty="0" err="1"/>
+              <a:t>근무하던</a:t>
+            </a:r>
+            <a:r>
+              <a:rPr dirty="0"/>
+              <a:t> Guinness(</a:t>
+            </a:r>
+            <a:r>
+              <a:rPr dirty="0" err="1"/>
+              <a:t>맥주회사</a:t>
+            </a:r>
+            <a:r>
+              <a:rPr dirty="0"/>
+              <a:t>) </a:t>
+            </a:r>
+            <a:r>
+              <a:rPr dirty="0" err="1"/>
+              <a:t>에서</a:t>
+            </a:r>
+            <a:r>
+              <a:rPr dirty="0"/>
+              <a:t> </a:t>
+            </a:r>
+            <a:r>
+              <a:rPr dirty="0" err="1"/>
+              <a:t>품질검사를</a:t>
+            </a:r>
+            <a:r>
+              <a:rPr dirty="0"/>
+              <a:t> </a:t>
+            </a:r>
+            <a:r>
+              <a:rPr dirty="0" err="1"/>
+              <a:t>수행하던</a:t>
+            </a:r>
+            <a:r>
+              <a:rPr dirty="0"/>
+              <a:t> </a:t>
+            </a:r>
+            <a:r>
+              <a:rPr dirty="0" err="1"/>
+              <a:t>중</a:t>
+            </a:r>
+            <a:r>
+              <a:rPr dirty="0"/>
+              <a:t> </a:t>
+            </a:r>
+            <a:r>
+              <a:rPr dirty="0" err="1"/>
+              <a:t>표본이</a:t>
+            </a:r>
+            <a:r>
+              <a:rPr dirty="0"/>
+              <a:t> </a:t>
+            </a:r>
+            <a:r>
+              <a:rPr dirty="0" err="1"/>
+              <a:t>너무</a:t>
+            </a:r>
+            <a:r>
+              <a:rPr dirty="0"/>
+              <a:t> </a:t>
+            </a:r>
+            <a:r>
+              <a:rPr dirty="0" err="1"/>
+              <a:t>작아</a:t>
+            </a:r>
+            <a:r>
+              <a:rPr dirty="0"/>
+              <a:t> </a:t>
+            </a:r>
+            <a:r>
+              <a:rPr dirty="0" err="1"/>
+              <a:t>정규분포를</a:t>
+            </a:r>
+            <a:r>
+              <a:rPr dirty="0"/>
+              <a:t> </a:t>
+            </a:r>
+            <a:r>
+              <a:rPr dirty="0" err="1"/>
+              <a:t>따르지</a:t>
+            </a:r>
+            <a:r>
+              <a:rPr dirty="0"/>
+              <a:t> </a:t>
+            </a:r>
+            <a:r>
+              <a:rPr dirty="0" err="1"/>
+              <a:t>않는</a:t>
+            </a:r>
+            <a:r>
+              <a:rPr dirty="0"/>
+              <a:t> </a:t>
+            </a:r>
+            <a:r>
+              <a:rPr dirty="0" err="1"/>
+              <a:t>문제를</a:t>
+            </a:r>
+            <a:r>
+              <a:rPr dirty="0"/>
+              <a:t> </a:t>
+            </a:r>
+            <a:r>
+              <a:rPr dirty="0" err="1"/>
+              <a:t>발견</a:t>
+            </a:r>
+            <a:endParaRPr lang="en-US" dirty="0"/>
+          </a:p>
+          <a:p>
+            <a:pPr lvl="0"/>
+            <a:endParaRPr dirty="0"/>
+          </a:p>
+          <a:p>
+            <a:pPr lvl="0"/>
+            <a:r>
+              <a:rPr dirty="0" err="1"/>
+              <a:t>정규분포는</a:t>
+            </a:r>
+            <a:r>
+              <a:rPr dirty="0"/>
+              <a:t> </a:t>
+            </a:r>
+            <a:r>
+              <a:rPr dirty="0" err="1"/>
+              <a:t>표본이</a:t>
+            </a:r>
+            <a:r>
+              <a:rPr dirty="0"/>
+              <a:t> </a:t>
+            </a:r>
+            <a:r>
+              <a:rPr dirty="0" err="1"/>
+              <a:t>충분히</a:t>
+            </a:r>
+            <a:r>
+              <a:rPr dirty="0"/>
+              <a:t> </a:t>
+            </a:r>
+            <a:r>
+              <a:rPr dirty="0" err="1"/>
+              <a:t>많을</a:t>
+            </a:r>
+            <a:r>
+              <a:rPr dirty="0"/>
+              <a:t> </a:t>
+            </a:r>
+            <a:r>
+              <a:rPr dirty="0" err="1"/>
+              <a:t>때</a:t>
+            </a:r>
+            <a:r>
+              <a:rPr dirty="0"/>
+              <a:t> </a:t>
+            </a:r>
+            <a:r>
+              <a:rPr dirty="0" err="1"/>
+              <a:t>좋은</a:t>
+            </a:r>
+            <a:r>
+              <a:rPr dirty="0"/>
+              <a:t> </a:t>
+            </a:r>
+            <a:r>
+              <a:rPr dirty="0" err="1"/>
+              <a:t>성질을</a:t>
+            </a:r>
+            <a:r>
+              <a:rPr dirty="0"/>
+              <a:t> </a:t>
+            </a:r>
+            <a:r>
+              <a:rPr dirty="0" err="1"/>
+              <a:t>가짐</a:t>
+            </a:r>
+            <a:endParaRPr dirty="0"/>
+          </a:p>
+          <a:p>
+            <a:pPr lvl="0"/>
+            <a:endParaRPr lang="en-US" dirty="0"/>
+          </a:p>
+          <a:p>
+            <a:pPr lvl="0"/>
+            <a:r>
+              <a:rPr dirty="0" err="1"/>
+              <a:t>그러나</a:t>
+            </a:r>
+            <a:r>
+              <a:rPr dirty="0"/>
+              <a:t> </a:t>
+            </a:r>
+            <a:r>
+              <a:rPr dirty="0" err="1"/>
+              <a:t>소표본</a:t>
+            </a:r>
+            <a:r>
+              <a:rPr dirty="0"/>
+              <a:t> </a:t>
+            </a:r>
+            <a:r>
+              <a:rPr dirty="0" err="1"/>
+              <a:t>상황에서는</a:t>
+            </a:r>
+            <a:r>
+              <a:rPr dirty="0"/>
+              <a:t> </a:t>
+            </a:r>
+            <a:r>
+              <a:rPr dirty="0" err="1"/>
+              <a:t>오차가</a:t>
+            </a:r>
+            <a:r>
+              <a:rPr dirty="0"/>
+              <a:t> </a:t>
+            </a:r>
+            <a:r>
+              <a:rPr dirty="0" err="1"/>
+              <a:t>커지는</a:t>
+            </a:r>
+            <a:r>
+              <a:rPr dirty="0"/>
+              <a:t> </a:t>
+            </a:r>
+            <a:r>
+              <a:rPr dirty="0" err="1"/>
+              <a:t>문제가</a:t>
+            </a:r>
+            <a:r>
+              <a:rPr dirty="0"/>
+              <a:t> </a:t>
+            </a:r>
+            <a:r>
+              <a:rPr dirty="0" err="1"/>
+              <a:t>발생함</a:t>
+            </a:r>
+            <a:endParaRPr lang="en-US" dirty="0"/>
+          </a:p>
+          <a:p>
+            <a:pPr lvl="0"/>
+            <a:endParaRPr lang="en-US" dirty="0"/>
+          </a:p>
+          <a:p>
+            <a:pPr lvl="0"/>
+            <a:r>
+              <a:rPr lang="ko-KR" altLang="en-US" dirty="0"/>
+              <a:t>오차를 줄이려면 어떻게 해야 할까</a:t>
+            </a:r>
+            <a:r>
+              <a:rPr lang="en-US" altLang="ko-KR" dirty="0"/>
+              <a:t>?</a:t>
+            </a:r>
+            <a:endParaRPr dirty="0"/>
+          </a:p>
+        </p:txBody>
+      </p:sp>
+      <p:pic>
+        <p:nvPicPr>
+          <p:cNvPr id="5" name="Picture 4">
+            <a:extLst>
+              <a:ext uri="{FF2B5EF4-FFF2-40B4-BE49-F238E27FC236}">
+                <a16:creationId xmlns:a16="http://schemas.microsoft.com/office/drawing/2014/main" id="{F5CD7C11-8761-2E98-6938-E2014537B0E6}"/>
+              </a:ext>
+            </a:extLst>
+          </p:cNvPr>
+          <p:cNvPicPr>
+            <a:picLocks noChangeAspect="1"/>
+          </p:cNvPicPr>
+          <p:nvPr/>
+        </p:nvPicPr>
+        <p:blipFill>
+          <a:blip r:embed="rId2"/>
+          <a:stretch>
+            <a:fillRect/>
+          </a:stretch>
+        </p:blipFill>
+        <p:spPr>
+          <a:xfrm>
+            <a:off x="5460347" y="2751365"/>
+            <a:ext cx="3348011" cy="1902279"/>
+          </a:xfrm>
+          <a:prstGeom prst="rect">
+            <a:avLst/>
+          </a:prstGeom>
+        </p:spPr>
+      </p:pic>
     </p:spTree>
   </p:cSld>
+  <p:clrMapOvr>
+    <a:masterClrMapping/>
+  </p:clrMapOvr>
 </p:sld>
 </file>
 
@@ -6299,265 +9417,4 @@
   </a:objectDefaults>
   <a:extraClrSchemeLst/>
 </a:theme>
-</file>
-
-<file path=ppt/theme/theme2.xml><?xml version="1.0" encoding="utf-8"?>
-<a:theme xmlns:a="http://schemas.openxmlformats.org/drawingml/2006/main" name="Office Theme">
-  <a:themeElements>
-    <a:clrScheme name="Office">
-      <a:dk1>
-        <a:sysClr val="windowText" lastClr="000000"/>
-      </a:dk1>
-      <a:lt1>
-        <a:sysClr val="window" lastClr="FFFFFF"/>
-      </a:lt1>
-      <a:dk2>
-        <a:srgbClr val="44546A"/>
-      </a:dk2>
-      <a:lt2>
-        <a:srgbClr val="E7E6E6"/>
-      </a:lt2>
-      <a:accent1>
-        <a:srgbClr val="5B9BD5"/>
-      </a:accent1>
-      <a:accent2>
-        <a:srgbClr val="ED7D31"/>
-      </a:accent2>
-      <a:accent3>
-        <a:srgbClr val="A5A5A5"/>
-      </a:accent3>
-      <a:accent4>
-        <a:srgbClr val="FFC000"/>
-      </a:accent4>
-      <a:accent5>
-        <a:srgbClr val="4472C4"/>
-      </a:accent5>
-      <a:accent6>
-        <a:srgbClr val="70AD47"/>
-      </a:accent6>
-      <a:hlink>
-        <a:srgbClr val="0563C1"/>
-      </a:hlink>
-      <a:folHlink>
-        <a:srgbClr val="954F72"/>
-      </a:folHlink>
-    </a:clrScheme>
-    <a:fontScheme name="Office">
-      <a:majorFont>
-        <a:latin typeface="Calibri Light" panose="020F0302020204030204"/>
-        <a:ea typeface=""/>
-        <a:cs typeface=""/>
-        <a:font script="Jpan" typeface="ＭＳ Ｐゴシック"/>
-        <a:font script="Hang" typeface="맑은 고딕"/>
-        <a:font script="Hans" typeface="宋体"/>
-        <a:font script="Hant" typeface="新細明體"/>
-        <a:font script="Arab" typeface="Times New Roman"/>
-        <a:font script="Hebr" typeface="Times New Roman"/>
-        <a:font script="Thai" typeface="Angsana New"/>
-        <a:font script="Ethi" typeface="Nyala"/>
-        <a:font script="Beng" typeface="Vrinda"/>
-        <a:font script="Gujr" typeface="Shruti"/>
-        <a:font script="Khmr" typeface="MoolBoran"/>
-        <a:font script="Knda" typeface="Tunga"/>
-        <a:font script="Guru" typeface="Raavi"/>
-        <a:font script="Cans" typeface="Euphemia"/>
-        <a:font script="Cher" typeface="Plantagenet Cherokee"/>
-        <a:font script="Yiii" typeface="Microsoft Yi Baiti"/>
-        <a:font script="Tibt" typeface="Microsoft Himalaya"/>
-        <a:font script="Thaa" typeface="MV Boli"/>
-        <a:font script="Deva" typeface="Mangal"/>
-        <a:font script="Telu" typeface="Gautami"/>
-        <a:font script="Taml" typeface="Latha"/>
-        <a:font script="Syrc" typeface="Estrangelo Edessa"/>
-        <a:font script="Orya" typeface="Kalinga"/>
-        <a:font script="Mlym" typeface="Kartika"/>
-        <a:font script="Laoo" typeface="DokChampa"/>
-        <a:font script="Sinh" typeface="Iskoola Pota"/>
-        <a:font script="Mong" typeface="Mongolian Baiti"/>
-        <a:font script="Viet" typeface="Times New Roman"/>
-        <a:font script="Uigh" typeface="Microsoft Uighur"/>
-        <a:font script="Geor" typeface="Sylfaen"/>
-      </a:majorFont>
-      <a:minorFont>
-        <a:latin typeface="Calibri" panose="020F0502020204030204"/>
-        <a:ea typeface=""/>
-        <a:cs typeface=""/>
-        <a:font script="Jpan" typeface="ＭＳ Ｐゴシック"/>
-        <a:font script="Hang" typeface="맑은 고딕"/>
-        <a:font script="Hans" typeface="宋体"/>
-        <a:font script="Hant" typeface="新細明體"/>
-        <a:font script="Arab" typeface="Arial"/>
-        <a:font script="Hebr" typeface="Arial"/>
-        <a:font script="Thai" typeface="Cordia New"/>
-        <a:font script="Ethi" typeface="Nyala"/>
-        <a:font script="Beng" typeface="Vrinda"/>
-        <a:font script="Gujr" typeface="Shruti"/>
-        <a:font script="Khmr" typeface="DaunPenh"/>
-        <a:font script="Knda" typeface="Tunga"/>
-        <a:font script="Guru" typeface="Raavi"/>
-        <a:font script="Cans" typeface="Euphemia"/>
-        <a:font script="Cher" typeface="Plantagenet Cherokee"/>
-        <a:font script="Yiii" typeface="Microsoft Yi Baiti"/>
-        <a:font script="Tibt" typeface="Microsoft Himalaya"/>
-        <a:font script="Thaa" typeface="MV Boli"/>
-        <a:font script="Deva" typeface="Mangal"/>
-        <a:font script="Telu" typeface="Gautami"/>
-        <a:font script="Taml" typeface="Latha"/>
-        <a:font script="Syrc" typeface="Estrangelo Edessa"/>
-        <a:font script="Orya" typeface="Kalinga"/>
-        <a:font script="Mlym" typeface="Kartika"/>
-        <a:font script="Laoo" typeface="DokChampa"/>
-        <a:font script="Sinh" typeface="Iskoola Pota"/>
-        <a:font script="Mong" typeface="Mongolian Baiti"/>
-        <a:font script="Viet" typeface="Arial"/>
-        <a:font script="Uigh" typeface="Microsoft Uighur"/>
-        <a:font script="Geor" typeface="Sylfaen"/>
-      </a:minorFont>
-    </a:fontScheme>
-    <a:fmtScheme name="Office">
-      <a:fillStyleLst>
-        <a:solidFill>
-          <a:schemeClr val="phClr"/>
-        </a:solidFill>
-        <a:gradFill rotWithShape="1">
-          <a:gsLst>
-            <a:gs pos="0">
-              <a:schemeClr val="phClr">
-                <a:lumMod val="110000"/>
-                <a:satMod val="105000"/>
-                <a:tint val="67000"/>
-              </a:schemeClr>
-            </a:gs>
-            <a:gs pos="50000">
-              <a:schemeClr val="phClr">
-                <a:lumMod val="105000"/>
-                <a:satMod val="103000"/>
-                <a:tint val="73000"/>
-              </a:schemeClr>
-            </a:gs>
-            <a:gs pos="100000">
-              <a:schemeClr val="phClr">
-                <a:lumMod val="105000"/>
-                <a:satMod val="109000"/>
-                <a:tint val="81000"/>
-              </a:schemeClr>
-            </a:gs>
-          </a:gsLst>
-          <a:lin ang="5400000" scaled="0"/>
-        </a:gradFill>
-        <a:gradFill rotWithShape="1">
-          <a:gsLst>
-            <a:gs pos="0">
-              <a:schemeClr val="phClr">
-                <a:satMod val="103000"/>
-                <a:lumMod val="102000"/>
-                <a:tint val="94000"/>
-              </a:schemeClr>
-            </a:gs>
-            <a:gs pos="50000">
-              <a:schemeClr val="phClr">
-                <a:satMod val="110000"/>
-                <a:lumMod val="100000"/>
-                <a:shade val="100000"/>
-              </a:schemeClr>
-            </a:gs>
-            <a:gs pos="100000">
-              <a:schemeClr val="phClr">
-                <a:lumMod val="99000"/>
-                <a:satMod val="120000"/>
-                <a:shade val="78000"/>
-              </a:schemeClr>
-            </a:gs>
-          </a:gsLst>
-          <a:lin ang="5400000" scaled="0"/>
-        </a:gradFill>
-      </a:fillStyleLst>
-      <a:lnStyleLst>
-        <a:ln w="6350" cap="flat" cmpd="sng" algn="ctr">
-          <a:solidFill>
-            <a:schemeClr val="phClr"/>
-          </a:solidFill>
-          <a:prstDash val="solid"/>
-          <a:miter lim="800000"/>
-        </a:ln>
-        <a:ln w="12700" cap="flat" cmpd="sng" algn="ctr">
-          <a:solidFill>
-            <a:schemeClr val="phClr"/>
-          </a:solidFill>
-          <a:prstDash val="solid"/>
-          <a:miter lim="800000"/>
-        </a:ln>
-        <a:ln w="19050" cap="flat" cmpd="sng" algn="ctr">
-          <a:solidFill>
-            <a:schemeClr val="phClr"/>
-          </a:solidFill>
-          <a:prstDash val="solid"/>
-          <a:miter lim="800000"/>
-        </a:ln>
-      </a:lnStyleLst>
-      <a:effectStyleLst>
-        <a:effectStyle>
-          <a:effectLst/>
-        </a:effectStyle>
-        <a:effectStyle>
-          <a:effectLst/>
-        </a:effectStyle>
-        <a:effectStyle>
-          <a:effectLst>
-            <a:outerShdw blurRad="57150" dist="19050" dir="5400000" algn="ctr" rotWithShape="0">
-              <a:srgbClr val="000000">
-                <a:alpha val="63000"/>
-              </a:srgbClr>
-            </a:outerShdw>
-          </a:effectLst>
-        </a:effectStyle>
-      </a:effectStyleLst>
-      <a:bgFillStyleLst>
-        <a:solidFill>
-          <a:schemeClr val="phClr"/>
-        </a:solidFill>
-        <a:solidFill>
-          <a:schemeClr val="phClr">
-            <a:tint val="95000"/>
-            <a:satMod val="170000"/>
-          </a:schemeClr>
-        </a:solidFill>
-        <a:gradFill rotWithShape="1">
-          <a:gsLst>
-            <a:gs pos="0">
-              <a:schemeClr val="phClr">
-                <a:tint val="93000"/>
-                <a:satMod val="150000"/>
-                <a:shade val="98000"/>
-                <a:lumMod val="102000"/>
-              </a:schemeClr>
-            </a:gs>
-            <a:gs pos="50000">
-              <a:schemeClr val="phClr">
-                <a:tint val="98000"/>
-                <a:satMod val="130000"/>
-                <a:shade val="90000"/>
-                <a:lumMod val="103000"/>
-              </a:schemeClr>
-            </a:gs>
-            <a:gs pos="100000">
-              <a:schemeClr val="phClr">
-                <a:shade val="63000"/>
-                <a:satMod val="120000"/>
-              </a:schemeClr>
-            </a:gs>
-          </a:gsLst>
-          <a:lin ang="5400000" scaled="0"/>
-        </a:gradFill>
-      </a:bgFillStyleLst>
-    </a:fmtScheme>
-  </a:themeElements>
-  <a:objectDefaults/>
-  <a:extraClrSchemeLst/>
-  <a:extLst>
-    <a:ext uri="{05A4C25C-085E-4340-85A3-A5531E510DB2}">
-      <thm15:themeFamily xmlns:thm15="http://schemas.microsoft.com/office/thememl/2012/main" name="Office Theme" id="{62F939B6-93AF-4DB8-9C6B-D6C7DFDC589F}" vid="{4A3C46E8-61CC-4603-A589-7422A47A8E4A}"/>
-    </a:ext>
-  </a:extLst>
-</a:theme>
 </file>